--- a/docs/需求调研/提交版/作业1-学术成果分享平台-需求调研汇报.pptx
+++ b/docs/需求调研/提交版/作业1-学术成果分享平台-需求调研汇报.pptx
@@ -22,94 +22,103 @@
   <p:sldSz cx="12192000" cy="6858000"/>
   <p:notesSz cx="6858000" cy="9144000"/>
   <p:defaultTextStyle>
-    <a:lvl1pPr marL="0" algn="l" defTabSz="914400" rtl="0" eaLnBrk="1" latinLnBrk="0" hangingPunct="1">
+    <a:lvl1pPr marL="0" algn="l" defTabSz="914400">
+      <a:buNone/>
       <a:defRPr sz="1800" kern="1200">
         <a:solidFill>
           <a:schemeClr val="tx1"/>
         </a:solidFill>
         <a:latin typeface="+mn-lt"/>
-        <a:ea typeface="+mn-ea"/>
-        <a:cs typeface="+mn-cs"/>
+        <a:ea typeface="+mn-lt"/>
+        <a:cs typeface="+mn-lt"/>
       </a:defRPr>
     </a:lvl1pPr>
-    <a:lvl2pPr marL="457200" algn="l" defTabSz="914400" rtl="0" eaLnBrk="1" latinLnBrk="0" hangingPunct="1">
+    <a:lvl2pPr marL="457200" algn="l" defTabSz="914400">
+      <a:buNone/>
       <a:defRPr sz="1800" kern="1200">
         <a:solidFill>
           <a:schemeClr val="tx1"/>
         </a:solidFill>
         <a:latin typeface="+mn-lt"/>
-        <a:ea typeface="+mn-ea"/>
-        <a:cs typeface="+mn-cs"/>
+        <a:ea typeface="+mn-lt"/>
+        <a:cs typeface="+mn-lt"/>
       </a:defRPr>
     </a:lvl2pPr>
-    <a:lvl3pPr marL="914400" algn="l" defTabSz="914400" rtl="0" eaLnBrk="1" latinLnBrk="0" hangingPunct="1">
+    <a:lvl3pPr marL="914400" algn="l" defTabSz="914400">
+      <a:buNone/>
       <a:defRPr sz="1800" kern="1200">
         <a:solidFill>
           <a:schemeClr val="tx1"/>
         </a:solidFill>
         <a:latin typeface="+mn-lt"/>
-        <a:ea typeface="+mn-ea"/>
-        <a:cs typeface="+mn-cs"/>
+        <a:ea typeface="+mn-lt"/>
+        <a:cs typeface="+mn-lt"/>
       </a:defRPr>
     </a:lvl3pPr>
-    <a:lvl4pPr marL="1371600" algn="l" defTabSz="914400" rtl="0" eaLnBrk="1" latinLnBrk="0" hangingPunct="1">
+    <a:lvl4pPr marL="1371600" algn="l" defTabSz="914400">
+      <a:buNone/>
       <a:defRPr sz="1800" kern="1200">
         <a:solidFill>
           <a:schemeClr val="tx1"/>
         </a:solidFill>
         <a:latin typeface="+mn-lt"/>
-        <a:ea typeface="+mn-ea"/>
-        <a:cs typeface="+mn-cs"/>
+        <a:ea typeface="+mn-lt"/>
+        <a:cs typeface="+mn-lt"/>
       </a:defRPr>
     </a:lvl4pPr>
-    <a:lvl5pPr marL="1828800" algn="l" defTabSz="914400" rtl="0" eaLnBrk="1" latinLnBrk="0" hangingPunct="1">
+    <a:lvl5pPr marL="1828800" algn="l" defTabSz="914400">
+      <a:buNone/>
       <a:defRPr sz="1800" kern="1200">
         <a:solidFill>
           <a:schemeClr val="tx1"/>
         </a:solidFill>
         <a:latin typeface="+mn-lt"/>
-        <a:ea typeface="+mn-ea"/>
-        <a:cs typeface="+mn-cs"/>
+        <a:ea typeface="+mn-lt"/>
+        <a:cs typeface="+mn-lt"/>
       </a:defRPr>
     </a:lvl5pPr>
-    <a:lvl6pPr marL="2286000" algn="l" defTabSz="914400" rtl="0" eaLnBrk="1" latinLnBrk="0" hangingPunct="1">
+    <a:lvl6pPr marL="2286000" algn="l" defTabSz="914400">
+      <a:buNone/>
       <a:defRPr sz="1800" kern="1200">
         <a:solidFill>
           <a:schemeClr val="tx1"/>
         </a:solidFill>
         <a:latin typeface="+mn-lt"/>
-        <a:ea typeface="+mn-ea"/>
-        <a:cs typeface="+mn-cs"/>
+        <a:ea typeface="+mn-lt"/>
+        <a:cs typeface="+mn-lt"/>
       </a:defRPr>
     </a:lvl6pPr>
-    <a:lvl7pPr marL="2743200" algn="l" defTabSz="914400" rtl="0" eaLnBrk="1" latinLnBrk="0" hangingPunct="1">
+    <a:lvl7pPr marL="2743200" algn="l" defTabSz="914400">
+      <a:buNone/>
       <a:defRPr sz="1800" kern="1200">
         <a:solidFill>
           <a:schemeClr val="tx1"/>
         </a:solidFill>
         <a:latin typeface="+mn-lt"/>
-        <a:ea typeface="+mn-ea"/>
-        <a:cs typeface="+mn-cs"/>
+        <a:ea typeface="+mn-lt"/>
+        <a:cs typeface="+mn-lt"/>
       </a:defRPr>
     </a:lvl7pPr>
-    <a:lvl8pPr marL="3200400" algn="l" defTabSz="914400" rtl="0" eaLnBrk="1" latinLnBrk="0" hangingPunct="1">
+    <a:lvl8pPr marL="3200400" algn="l" defTabSz="914400">
+      <a:buNone/>
       <a:defRPr sz="1800" kern="1200">
         <a:solidFill>
           <a:schemeClr val="tx1"/>
         </a:solidFill>
         <a:latin typeface="+mn-lt"/>
-        <a:ea typeface="+mn-ea"/>
-        <a:cs typeface="+mn-cs"/>
+        <a:ea typeface="+mn-lt"/>
+        <a:cs typeface="+mn-lt"/>
       </a:defRPr>
     </a:lvl8pPr>
-    <a:lvl9pPr marL="3657600" algn="l" defTabSz="914400" rtl="0" eaLnBrk="1" latinLnBrk="0" hangingPunct="1">
+    <a:lvl9pPr marL="3657600" algn="l" defTabSz="914400">
+      <a:buNone/>
       <a:defRPr sz="1800" kern="1200">
         <a:solidFill>
           <a:schemeClr val="tx1"/>
         </a:solidFill>
         <a:latin typeface="+mn-lt"/>
-        <a:ea typeface="+mn-ea"/>
-        <a:cs typeface="+mn-cs"/>
+        <a:ea typeface="+mn-lt"/>
+        <a:cs typeface="+mn-lt"/>
       </a:defRPr>
     </a:lvl9pPr>
   </p:defaultTextStyle>
@@ -945,15 +954,42 @@
                 <a:cs typeface="+mj-lt"/>
               </a:defRPr>
             </a:defPPr>
-            <a:lvl1pPr/>
-            <a:lvl2pPr/>
-            <a:lvl3pPr/>
-            <a:lvl4pPr/>
-            <a:lvl5pPr/>
-            <a:lvl6pPr/>
-            <a:lvl7pPr/>
-            <a:lvl8pPr/>
-            <a:lvl9pPr/>
+            <a:lvl1pPr>
+              <a:buNone/>
+              <a:defRPr/>
+            </a:lvl1pPr>
+            <a:lvl2pPr>
+              <a:buNone/>
+              <a:defRPr/>
+            </a:lvl2pPr>
+            <a:lvl3pPr>
+              <a:buNone/>
+              <a:defRPr/>
+            </a:lvl3pPr>
+            <a:lvl4pPr>
+              <a:buNone/>
+              <a:defRPr/>
+            </a:lvl4pPr>
+            <a:lvl5pPr>
+              <a:buNone/>
+              <a:defRPr/>
+            </a:lvl5pPr>
+            <a:lvl6pPr>
+              <a:buNone/>
+              <a:defRPr/>
+            </a:lvl6pPr>
+            <a:lvl7pPr>
+              <a:buNone/>
+              <a:defRPr/>
+            </a:lvl7pPr>
+            <a:lvl8pPr>
+              <a:buNone/>
+              <a:defRPr/>
+            </a:lvl8pPr>
+            <a:lvl9pPr>
+              <a:buNone/>
+              <a:defRPr/>
+            </a:lvl9pPr>
           </a:lstStyle>
           <a:p/>
         </p:txBody>
@@ -997,15 +1033,42 @@
                 <a:cs typeface="+mn-lt"/>
               </a:defRPr>
             </a:defPPr>
-            <a:lvl1pPr/>
-            <a:lvl2pPr/>
-            <a:lvl3pPr/>
-            <a:lvl4pPr/>
-            <a:lvl5pPr/>
-            <a:lvl6pPr/>
-            <a:lvl7pPr/>
-            <a:lvl8pPr/>
-            <a:lvl9pPr/>
+            <a:lvl1pPr>
+              <a:buNone/>
+              <a:defRPr/>
+            </a:lvl1pPr>
+            <a:lvl2pPr>
+              <a:buNone/>
+              <a:defRPr/>
+            </a:lvl2pPr>
+            <a:lvl3pPr>
+              <a:buNone/>
+              <a:defRPr/>
+            </a:lvl3pPr>
+            <a:lvl4pPr>
+              <a:buNone/>
+              <a:defRPr/>
+            </a:lvl4pPr>
+            <a:lvl5pPr>
+              <a:buNone/>
+              <a:defRPr/>
+            </a:lvl5pPr>
+            <a:lvl6pPr>
+              <a:buNone/>
+              <a:defRPr/>
+            </a:lvl6pPr>
+            <a:lvl7pPr>
+              <a:buNone/>
+              <a:defRPr/>
+            </a:lvl7pPr>
+            <a:lvl8pPr>
+              <a:buNone/>
+              <a:defRPr/>
+            </a:lvl8pPr>
+            <a:lvl9pPr>
+              <a:buNone/>
+              <a:defRPr/>
+            </a:lvl9pPr>
           </a:lstStyle>
           <a:p/>
         </p:txBody>
@@ -1067,15 +1130,42 @@
                 <a:cs typeface="+mj-lt"/>
               </a:defRPr>
             </a:defPPr>
-            <a:lvl1pPr/>
-            <a:lvl2pPr/>
-            <a:lvl3pPr/>
-            <a:lvl4pPr/>
-            <a:lvl5pPr/>
-            <a:lvl6pPr/>
-            <a:lvl7pPr/>
-            <a:lvl8pPr/>
-            <a:lvl9pPr/>
+            <a:lvl1pPr>
+              <a:buNone/>
+              <a:defRPr/>
+            </a:lvl1pPr>
+            <a:lvl2pPr>
+              <a:buNone/>
+              <a:defRPr/>
+            </a:lvl2pPr>
+            <a:lvl3pPr>
+              <a:buNone/>
+              <a:defRPr/>
+            </a:lvl3pPr>
+            <a:lvl4pPr>
+              <a:buNone/>
+              <a:defRPr/>
+            </a:lvl4pPr>
+            <a:lvl5pPr>
+              <a:buNone/>
+              <a:defRPr/>
+            </a:lvl5pPr>
+            <a:lvl6pPr>
+              <a:buNone/>
+              <a:defRPr/>
+            </a:lvl6pPr>
+            <a:lvl7pPr>
+              <a:buNone/>
+              <a:defRPr/>
+            </a:lvl7pPr>
+            <a:lvl8pPr>
+              <a:buNone/>
+              <a:defRPr/>
+            </a:lvl8pPr>
+            <a:lvl9pPr>
+              <a:buNone/>
+              <a:defRPr/>
+            </a:lvl9pPr>
           </a:lstStyle>
           <a:p/>
         </p:txBody>
@@ -1137,15 +1227,42 @@
                 <a:cs typeface="+mj-lt"/>
               </a:defRPr>
             </a:defPPr>
-            <a:lvl1pPr/>
-            <a:lvl2pPr/>
-            <a:lvl3pPr/>
-            <a:lvl4pPr/>
-            <a:lvl5pPr/>
-            <a:lvl6pPr/>
-            <a:lvl7pPr/>
-            <a:lvl8pPr/>
-            <a:lvl9pPr/>
+            <a:lvl1pPr>
+              <a:buNone/>
+              <a:defRPr/>
+            </a:lvl1pPr>
+            <a:lvl2pPr>
+              <a:buNone/>
+              <a:defRPr/>
+            </a:lvl2pPr>
+            <a:lvl3pPr>
+              <a:buNone/>
+              <a:defRPr/>
+            </a:lvl3pPr>
+            <a:lvl4pPr>
+              <a:buNone/>
+              <a:defRPr/>
+            </a:lvl4pPr>
+            <a:lvl5pPr>
+              <a:buNone/>
+              <a:defRPr/>
+            </a:lvl5pPr>
+            <a:lvl6pPr>
+              <a:buNone/>
+              <a:defRPr/>
+            </a:lvl6pPr>
+            <a:lvl7pPr>
+              <a:buNone/>
+              <a:defRPr/>
+            </a:lvl7pPr>
+            <a:lvl8pPr>
+              <a:buNone/>
+              <a:defRPr/>
+            </a:lvl8pPr>
+            <a:lvl9pPr>
+              <a:buNone/>
+              <a:defRPr/>
+            </a:lvl9pPr>
           </a:lstStyle>
           <a:p/>
         </p:txBody>
@@ -1189,15 +1306,42 @@
                 <a:cs typeface="+mn-lt"/>
               </a:defRPr>
             </a:defPPr>
-            <a:lvl1pPr/>
-            <a:lvl2pPr/>
-            <a:lvl3pPr/>
-            <a:lvl4pPr/>
-            <a:lvl5pPr/>
-            <a:lvl6pPr/>
-            <a:lvl7pPr/>
-            <a:lvl8pPr/>
-            <a:lvl9pPr/>
+            <a:lvl1pPr>
+              <a:buNone/>
+              <a:defRPr/>
+            </a:lvl1pPr>
+            <a:lvl2pPr>
+              <a:buNone/>
+              <a:defRPr/>
+            </a:lvl2pPr>
+            <a:lvl3pPr>
+              <a:buNone/>
+              <a:defRPr/>
+            </a:lvl3pPr>
+            <a:lvl4pPr>
+              <a:buNone/>
+              <a:defRPr/>
+            </a:lvl4pPr>
+            <a:lvl5pPr>
+              <a:buNone/>
+              <a:defRPr/>
+            </a:lvl5pPr>
+            <a:lvl6pPr>
+              <a:buNone/>
+              <a:defRPr/>
+            </a:lvl6pPr>
+            <a:lvl7pPr>
+              <a:buNone/>
+              <a:defRPr/>
+            </a:lvl7pPr>
+            <a:lvl8pPr>
+              <a:buNone/>
+              <a:defRPr/>
+            </a:lvl8pPr>
+            <a:lvl9pPr>
+              <a:buNone/>
+              <a:defRPr/>
+            </a:lvl9pPr>
           </a:lstStyle>
           <a:p/>
         </p:txBody>
@@ -1259,15 +1403,42 @@
                 <a:cs typeface="+mj-lt"/>
               </a:defRPr>
             </a:defPPr>
-            <a:lvl1pPr/>
-            <a:lvl2pPr/>
-            <a:lvl3pPr/>
-            <a:lvl4pPr/>
-            <a:lvl5pPr/>
-            <a:lvl6pPr/>
-            <a:lvl7pPr/>
-            <a:lvl8pPr/>
-            <a:lvl9pPr/>
+            <a:lvl1pPr>
+              <a:buNone/>
+              <a:defRPr/>
+            </a:lvl1pPr>
+            <a:lvl2pPr>
+              <a:buNone/>
+              <a:defRPr/>
+            </a:lvl2pPr>
+            <a:lvl3pPr>
+              <a:buNone/>
+              <a:defRPr/>
+            </a:lvl3pPr>
+            <a:lvl4pPr>
+              <a:buNone/>
+              <a:defRPr/>
+            </a:lvl4pPr>
+            <a:lvl5pPr>
+              <a:buNone/>
+              <a:defRPr/>
+            </a:lvl5pPr>
+            <a:lvl6pPr>
+              <a:buNone/>
+              <a:defRPr/>
+            </a:lvl6pPr>
+            <a:lvl7pPr>
+              <a:buNone/>
+              <a:defRPr/>
+            </a:lvl7pPr>
+            <a:lvl8pPr>
+              <a:buNone/>
+              <a:defRPr/>
+            </a:lvl8pPr>
+            <a:lvl9pPr>
+              <a:buNone/>
+              <a:defRPr/>
+            </a:lvl9pPr>
           </a:lstStyle>
           <a:p/>
         </p:txBody>
@@ -1311,15 +1482,42 @@
                 <a:cs typeface="+mn-lt"/>
               </a:defRPr>
             </a:defPPr>
-            <a:lvl1pPr/>
-            <a:lvl2pPr/>
-            <a:lvl3pPr/>
-            <a:lvl4pPr/>
-            <a:lvl5pPr/>
-            <a:lvl6pPr/>
-            <a:lvl7pPr/>
-            <a:lvl8pPr/>
-            <a:lvl9pPr/>
+            <a:lvl1pPr>
+              <a:buNone/>
+              <a:defRPr/>
+            </a:lvl1pPr>
+            <a:lvl2pPr>
+              <a:buNone/>
+              <a:defRPr/>
+            </a:lvl2pPr>
+            <a:lvl3pPr>
+              <a:buNone/>
+              <a:defRPr/>
+            </a:lvl3pPr>
+            <a:lvl4pPr>
+              <a:buNone/>
+              <a:defRPr/>
+            </a:lvl4pPr>
+            <a:lvl5pPr>
+              <a:buNone/>
+              <a:defRPr/>
+            </a:lvl5pPr>
+            <a:lvl6pPr>
+              <a:buNone/>
+              <a:defRPr/>
+            </a:lvl6pPr>
+            <a:lvl7pPr>
+              <a:buNone/>
+              <a:defRPr/>
+            </a:lvl7pPr>
+            <a:lvl8pPr>
+              <a:buNone/>
+              <a:defRPr/>
+            </a:lvl8pPr>
+            <a:lvl9pPr>
+              <a:buNone/>
+              <a:defRPr/>
+            </a:lvl9pPr>
           </a:lstStyle>
           <a:p/>
         </p:txBody>
@@ -1363,15 +1561,42 @@
                 <a:cs typeface="+mn-lt"/>
               </a:defRPr>
             </a:defPPr>
-            <a:lvl1pPr/>
-            <a:lvl2pPr/>
-            <a:lvl3pPr/>
-            <a:lvl4pPr/>
-            <a:lvl5pPr/>
-            <a:lvl6pPr/>
-            <a:lvl7pPr/>
-            <a:lvl8pPr/>
-            <a:lvl9pPr/>
+            <a:lvl1pPr>
+              <a:buNone/>
+              <a:defRPr/>
+            </a:lvl1pPr>
+            <a:lvl2pPr>
+              <a:buNone/>
+              <a:defRPr/>
+            </a:lvl2pPr>
+            <a:lvl3pPr>
+              <a:buNone/>
+              <a:defRPr/>
+            </a:lvl3pPr>
+            <a:lvl4pPr>
+              <a:buNone/>
+              <a:defRPr/>
+            </a:lvl4pPr>
+            <a:lvl5pPr>
+              <a:buNone/>
+              <a:defRPr/>
+            </a:lvl5pPr>
+            <a:lvl6pPr>
+              <a:buNone/>
+              <a:defRPr/>
+            </a:lvl6pPr>
+            <a:lvl7pPr>
+              <a:buNone/>
+              <a:defRPr/>
+            </a:lvl7pPr>
+            <a:lvl8pPr>
+              <a:buNone/>
+              <a:defRPr/>
+            </a:lvl8pPr>
+            <a:lvl9pPr>
+              <a:buNone/>
+              <a:defRPr/>
+            </a:lvl9pPr>
           </a:lstStyle>
           <a:p/>
         </p:txBody>
@@ -1433,15 +1658,42 @@
                 <a:cs typeface="+mj-lt"/>
               </a:defRPr>
             </a:defPPr>
-            <a:lvl1pPr/>
-            <a:lvl2pPr/>
-            <a:lvl3pPr/>
-            <a:lvl4pPr/>
-            <a:lvl5pPr/>
-            <a:lvl6pPr/>
-            <a:lvl7pPr/>
-            <a:lvl8pPr/>
-            <a:lvl9pPr/>
+            <a:lvl1pPr>
+              <a:buNone/>
+              <a:defRPr/>
+            </a:lvl1pPr>
+            <a:lvl2pPr>
+              <a:buNone/>
+              <a:defRPr/>
+            </a:lvl2pPr>
+            <a:lvl3pPr>
+              <a:buNone/>
+              <a:defRPr/>
+            </a:lvl3pPr>
+            <a:lvl4pPr>
+              <a:buNone/>
+              <a:defRPr/>
+            </a:lvl4pPr>
+            <a:lvl5pPr>
+              <a:buNone/>
+              <a:defRPr/>
+            </a:lvl5pPr>
+            <a:lvl6pPr>
+              <a:buNone/>
+              <a:defRPr/>
+            </a:lvl6pPr>
+            <a:lvl7pPr>
+              <a:buNone/>
+              <a:defRPr/>
+            </a:lvl7pPr>
+            <a:lvl8pPr>
+              <a:buNone/>
+              <a:defRPr/>
+            </a:lvl8pPr>
+            <a:lvl9pPr>
+              <a:buNone/>
+              <a:defRPr/>
+            </a:lvl9pPr>
           </a:lstStyle>
           <a:p/>
         </p:txBody>
@@ -1485,15 +1737,42 @@
                 <a:cs typeface="+mn-lt"/>
               </a:defRPr>
             </a:defPPr>
-            <a:lvl1pPr/>
-            <a:lvl2pPr/>
-            <a:lvl3pPr/>
-            <a:lvl4pPr/>
-            <a:lvl5pPr/>
-            <a:lvl6pPr/>
-            <a:lvl7pPr/>
-            <a:lvl8pPr/>
-            <a:lvl9pPr/>
+            <a:lvl1pPr>
+              <a:buNone/>
+              <a:defRPr/>
+            </a:lvl1pPr>
+            <a:lvl2pPr>
+              <a:buNone/>
+              <a:defRPr/>
+            </a:lvl2pPr>
+            <a:lvl3pPr>
+              <a:buNone/>
+              <a:defRPr/>
+            </a:lvl3pPr>
+            <a:lvl4pPr>
+              <a:buNone/>
+              <a:defRPr/>
+            </a:lvl4pPr>
+            <a:lvl5pPr>
+              <a:buNone/>
+              <a:defRPr/>
+            </a:lvl5pPr>
+            <a:lvl6pPr>
+              <a:buNone/>
+              <a:defRPr/>
+            </a:lvl6pPr>
+            <a:lvl7pPr>
+              <a:buNone/>
+              <a:defRPr/>
+            </a:lvl7pPr>
+            <a:lvl8pPr>
+              <a:buNone/>
+              <a:defRPr/>
+            </a:lvl8pPr>
+            <a:lvl9pPr>
+              <a:buNone/>
+              <a:defRPr/>
+            </a:lvl9pPr>
           </a:lstStyle>
           <a:p/>
         </p:txBody>
@@ -1836,7 +2115,7 @@
     <p:bg>
       <p:bgPr>
         <a:solidFill>
-          <a:srgbClr val="F7FAFC"/>
+          <a:srgbClr val="102A43"/>
         </a:solidFill>
         <a:effectLst/>
       </p:bgPr>
@@ -1876,7 +2155,7 @@
             <a:defPPr>
               <a:defRPr sz="1575" b="0">
                 <a:solidFill>
-                  <a:srgbClr val="5D7183"/>
+                  <a:srgbClr val="B3C8D6"/>
                 </a:solidFill>
                 <a:latin typeface="Hiragino Sans GB" panose="020B0300000000000000" charset="-122"/>
                 <a:ea typeface="Hiragino Sans GB" panose="020B0300000000000000" charset="-122"/>
@@ -1886,6 +2165,7 @@
           </a:lstStyle>
           <a:p>
             <a:pPr>
+              <a:buNone/>
               <a:defRPr sz="1575" b="0">
                 <a:solidFill>
                   <a:srgbClr val="5D7183"/>
@@ -1898,7 +2178,7 @@
             <a:r>
               <a:rPr sz="1575" b="0">
                 <a:solidFill>
-                  <a:srgbClr val="5D7183"/>
+                  <a:srgbClr val="B3C8D6"/>
                 </a:solidFill>
                 <a:latin typeface="Hiragino Sans GB" panose="020B0300000000000000" charset="-122"/>
                 <a:ea typeface="Hiragino Sans GB" panose="020B0300000000000000" charset="-122"/>
@@ -1943,9 +2223,9 @@
           <a:bodyPr anchor="ctr"/>
           <a:lstStyle>
             <a:defPPr>
-              <a:defRPr sz="3975" b="1">
-                <a:solidFill>
-                  <a:srgbClr val="24364B"/>
+              <a:defRPr sz="4200" b="1">
+                <a:solidFill>
+                  <a:srgbClr val="FFFFFF"/>
                 </a:solidFill>
                 <a:latin typeface="Hiragino Sans GB" panose="020B0300000000000000" charset="-122"/>
                 <a:ea typeface="Hiragino Sans GB" panose="020B0300000000000000" charset="-122"/>
@@ -1955,6 +2235,7 @@
           </a:lstStyle>
           <a:p>
             <a:pPr>
+              <a:buNone/>
               <a:defRPr sz="3975" b="1">
                 <a:solidFill>
                   <a:srgbClr val="24364B"/>
@@ -1965,9 +2246,9 @@
               </a:defRPr>
             </a:pPr>
             <a:r>
-              <a:rPr sz="3975" b="1">
-                <a:solidFill>
-                  <a:srgbClr val="24364B"/>
+              <a:rPr sz="4200" b="1">
+                <a:solidFill>
+                  <a:srgbClr val="FFFFFF"/>
                 </a:solidFill>
                 <a:latin typeface="Hiragino Sans GB" panose="020B0300000000000000" charset="-122"/>
                 <a:ea typeface="Hiragino Sans GB" panose="020B0300000000000000" charset="-122"/>
@@ -2012,9 +2293,9 @@
           <a:bodyPr anchor="ctr"/>
           <a:lstStyle>
             <a:defPPr>
-              <a:defRPr sz="2325" b="0">
-                <a:solidFill>
-                  <a:srgbClr val="385E7D"/>
+              <a:defRPr sz="2550" b="0">
+                <a:solidFill>
+                  <a:srgbClr val="69D0D2"/>
                 </a:solidFill>
                 <a:latin typeface="Hiragino Sans GB" panose="020B0300000000000000" charset="-122"/>
                 <a:ea typeface="Hiragino Sans GB" panose="020B0300000000000000" charset="-122"/>
@@ -2024,6 +2305,7 @@
           </a:lstStyle>
           <a:p>
             <a:pPr>
+              <a:buNone/>
               <a:defRPr sz="2325" b="0">
                 <a:solidFill>
                   <a:srgbClr val="385E7D"/>
@@ -2034,9 +2316,9 @@
               </a:defRPr>
             </a:pPr>
             <a:r>
-              <a:rPr sz="2325" b="0">
-                <a:solidFill>
-                  <a:srgbClr val="385E7D"/>
+              <a:rPr sz="2550" b="0">
+                <a:solidFill>
+                  <a:srgbClr val="69D0D2"/>
                 </a:solidFill>
                 <a:latin typeface="Hiragino Sans GB" panose="020B0300000000000000" charset="-122"/>
                 <a:ea typeface="Hiragino Sans GB" panose="020B0300000000000000" charset="-122"/>
@@ -2072,7 +2354,7 @@
             <a:avLst/>
           </a:prstGeom>
           <a:solidFill>
-            <a:srgbClr val="C9D9E5"/>
+            <a:srgbClr val="087E8B"/>
           </a:solidFill>
           <a:ln w="0">
             <a:noFill/>
@@ -2108,7 +2390,7 @@
             <a:defPPr>
               <a:defRPr sz="1650" b="0">
                 <a:solidFill>
-                  <a:srgbClr val="24364B"/>
+                  <a:srgbClr val="E6F0F5"/>
                 </a:solidFill>
                 <a:latin typeface="Hiragino Sans GB" panose="020B0300000000000000" charset="-122"/>
                 <a:ea typeface="Hiragino Sans GB" panose="020B0300000000000000" charset="-122"/>
@@ -2118,6 +2400,7 @@
           </a:lstStyle>
           <a:p>
             <a:pPr>
+              <a:buNone/>
               <a:defRPr sz="1650" b="0">
                 <a:solidFill>
                   <a:srgbClr val="24364B"/>
@@ -2130,13 +2413,13 @@
             <a:r>
               <a:rPr sz="1650" b="0">
                 <a:solidFill>
-                  <a:srgbClr val="24364B"/>
+                  <a:srgbClr val="E6F0F5"/>
                 </a:solidFill>
                 <a:latin typeface="Hiragino Sans GB" panose="020B0300000000000000" charset="-122"/>
                 <a:ea typeface="Hiragino Sans GB" panose="020B0300000000000000" charset="-122"/>
                 <a:cs typeface="Hiragino Sans GB" panose="020B0300000000000000" charset="-122"/>
               </a:rPr>
-              <a:t>普通用户问卷、任务走查、公开数据源与跨类型样本</a:t>
+              <a:t>北航软件学院案例：问卷、任务走查与公开数据源核验</a:t>
             </a:r>
             <a:endParaRPr sz="1650" b="0">
               <a:solidFill>
@@ -2177,7 +2460,7 @@
             <a:defPPr>
               <a:defRPr sz="1500" b="0">
                 <a:solidFill>
-                  <a:srgbClr val="24364B"/>
+                  <a:srgbClr val="E6F0F5"/>
                 </a:solidFill>
                 <a:latin typeface="Hiragino Sans GB" panose="020B0300000000000000" charset="-122"/>
                 <a:ea typeface="Hiragino Sans GB" panose="020B0300000000000000" charset="-122"/>
@@ -2187,6 +2470,7 @@
           </a:lstStyle>
           <a:p>
             <a:pPr>
+              <a:buNone/>
               <a:defRPr sz="1500" b="0">
                 <a:solidFill>
                   <a:srgbClr val="24364B"/>
@@ -2199,18 +2483,18 @@
             <a:r>
               <a:rPr sz="1500" b="0">
                 <a:solidFill>
-                  <a:srgbClr val="24364B"/>
+                  <a:srgbClr val="E6F0F5"/>
                 </a:solidFill>
                 <a:latin typeface="Hiragino Sans GB" panose="020B0300000000000000" charset="-122"/>
                 <a:ea typeface="Hiragino Sans GB" panose="020B0300000000000000" charset="-122"/>
                 <a:cs typeface="Hiragino Sans GB" panose="020B0300000000000000" charset="-122"/>
               </a:rPr>
-              <a:t>小组名称：___</a:t>
+              <a:t> 小组名称：__</a:t>
             </a:r>
             <a:r>
               <a:rPr lang="zh-CN" sz="1500" b="0">
                 <a:solidFill>
-                  <a:srgbClr val="24364B"/>
+                  <a:srgbClr val="E6F0F5"/>
                 </a:solidFill>
                 <a:latin typeface="Hiragino Sans GB" panose="020B0300000000000000" charset="-122"/>
                 <a:ea typeface="Hiragino Sans GB" panose="020B0300000000000000" charset="-122"/>
@@ -2221,13 +2505,35 @@
             <a:r>
               <a:rPr sz="1500" b="0">
                 <a:solidFill>
-                  <a:srgbClr val="24364B"/>
+                  <a:srgbClr val="E6F0F5"/>
                 </a:solidFill>
                 <a:latin typeface="Hiragino Sans GB" panose="020B0300000000000000" charset="-122"/>
                 <a:ea typeface="Hiragino Sans GB" panose="020B0300000000000000" charset="-122"/>
                 <a:cs typeface="Hiragino Sans GB" panose="020B0300000000000000" charset="-122"/>
               </a:rPr>
-              <a:t>___</a:t>
+              <a:t>__    汇报人：__</a:t>
+            </a:r>
+            <a:r>
+              <a:rPr lang="zh-CN" sz="1500" b="0">
+                <a:solidFill>
+                  <a:srgbClr val="E6F0F5"/>
+                </a:solidFill>
+                <a:latin typeface="Hiragino Sans GB" panose="020B0300000000000000" charset="-122"/>
+                <a:ea typeface="Hiragino Sans GB" panose="020B0300000000000000" charset="-122"/>
+                <a:cs typeface="Hiragino Sans GB" panose="020B0300000000000000" charset="-122"/>
+              </a:rPr>
+              <a:t>朱胥锦</a:t>
+            </a:r>
+            <a:r>
+              <a:rPr sz="1500" b="0">
+                <a:solidFill>
+                  <a:srgbClr val="E6F0F5"/>
+                </a:solidFill>
+                <a:latin typeface="Hiragino Sans GB" panose="020B0300000000000000" charset="-122"/>
+                <a:ea typeface="Hiragino Sans GB" panose="020B0300000000000000" charset="-122"/>
+                <a:cs typeface="Hiragino Sans GB" panose="020B0300000000000000" charset="-122"/>
+              </a:rPr>
+              <a:t>_</a:t>
             </a:r>
             <a:endParaRPr sz="1500" b="0">
               <a:solidFill>
@@ -2278,6 +2584,7 @@
           </a:lstStyle>
           <a:p>
             <a:pPr>
+              <a:buNone/>
               <a:defRPr sz="1425" b="0">
                 <a:solidFill>
                   <a:srgbClr val="24364B"/>
@@ -2326,7 +2633,7 @@
             <a:defPPr>
               <a:defRPr sz="1275" b="0">
                 <a:solidFill>
-                  <a:srgbClr val="5D7183"/>
+                  <a:srgbClr val="B3C8D6"/>
                 </a:solidFill>
                 <a:latin typeface="Hiragino Sans GB" panose="020B0300000000000000" charset="-122"/>
                 <a:ea typeface="Hiragino Sans GB" panose="020B0300000000000000" charset="-122"/>
@@ -2336,6 +2643,7 @@
           </a:lstStyle>
           <a:p>
             <a:pPr>
+              <a:buNone/>
               <a:defRPr sz="1275" b="0">
                 <a:solidFill>
                   <a:srgbClr val="5D7183"/>
@@ -2348,13 +2656,13 @@
             <a:r>
               <a:rPr sz="1275" b="0">
                 <a:solidFill>
-                  <a:srgbClr val="5D7183"/>
+                  <a:srgbClr val="B3C8D6"/>
                 </a:solidFill>
                 <a:latin typeface="Hiragino Sans GB" panose="020B0300000000000000" charset="-122"/>
                 <a:ea typeface="Hiragino Sans GB" panose="020B0300000000000000" charset="-122"/>
                 <a:cs typeface="Hiragino Sans GB" panose="020B0300000000000000" charset="-122"/>
               </a:rPr>
-              <a:t>2026 年 10 月 13 日</a:t>
+              <a:t>2026 年 10 月 </a:t>
             </a:r>
             <a:endParaRPr sz="1275" b="0">
               <a:solidFill>
@@ -2419,9 +2727,9 @@
           <a:bodyPr anchor="ctr"/>
           <a:lstStyle>
             <a:defPPr>
-              <a:defRPr sz="2475" b="1">
-                <a:solidFill>
-                  <a:srgbClr val="24364B"/>
+              <a:defRPr sz="2700" b="1">
+                <a:solidFill>
+                  <a:srgbClr val="102A43"/>
                 </a:solidFill>
                 <a:latin typeface="Hiragino Sans GB" panose="020B0300000000000000" charset="-122"/>
                 <a:ea typeface="Hiragino Sans GB" panose="020B0300000000000000" charset="-122"/>
@@ -2431,6 +2739,7 @@
           </a:lstStyle>
           <a:p>
             <a:pPr>
+              <a:buNone/>
               <a:defRPr sz="2475" b="1">
                 <a:solidFill>
                   <a:srgbClr val="24364B"/>
@@ -2441,15 +2750,15 @@
               </a:defRPr>
             </a:pPr>
             <a:r>
-              <a:rPr sz="2475" b="1">
-                <a:solidFill>
-                  <a:srgbClr val="24364B"/>
+              <a:rPr sz="2700" b="1">
+                <a:solidFill>
+                  <a:srgbClr val="102A43"/>
                 </a:solidFill>
                 <a:latin typeface="Hiragino Sans GB" panose="020B0300000000000000" charset="-122"/>
                 <a:ea typeface="Hiragino Sans GB" panose="020B0300000000000000" charset="-122"/>
                 <a:cs typeface="Hiragino Sans GB" panose="020B0300000000000000" charset="-122"/>
               </a:rPr>
-              <a:t>调研交付与下一轮验证</a:t>
+              <a:t>调研输出：优先级、边界与待验证项</a:t>
             </a:r>
             <a:endParaRPr sz="2475" b="1">
               <a:solidFill>
@@ -2473,13 +2782,13 @@
         <p:spPr>
           <a:xfrm>
             <a:off x="590550" y="1057275"/>
-            <a:ext cx="11010900" cy="19050"/>
+            <a:ext cx="11010900" cy="38100"/>
           </a:xfrm>
           <a:prstGeom prst="rect">
             <a:avLst/>
           </a:prstGeom>
           <a:solidFill>
-            <a:srgbClr val="C9D9E5"/>
+            <a:srgbClr val="087E8B"/>
           </a:solidFill>
           <a:ln w="0">
             <a:noFill/>
@@ -2515,7 +2824,7 @@
             <a:defPPr>
               <a:defRPr sz="1050" b="0">
                 <a:solidFill>
-                  <a:srgbClr val="5D7183"/>
+                  <a:srgbClr val="62788B"/>
                 </a:solidFill>
                 <a:latin typeface="Hiragino Sans GB" panose="020B0300000000000000" charset="-122"/>
                 <a:ea typeface="Hiragino Sans GB" panose="020B0300000000000000" charset="-122"/>
@@ -2525,6 +2834,7 @@
           </a:lstStyle>
           <a:p>
             <a:pPr>
+              <a:buNone/>
               <a:defRPr sz="1050" b="0">
                 <a:solidFill>
                   <a:srgbClr val="5D7183"/>
@@ -2537,7 +2847,7 @@
             <a:r>
               <a:rPr sz="1050" b="0">
                 <a:solidFill>
-                  <a:srgbClr val="5D7183"/>
+                  <a:srgbClr val="62788B"/>
                 </a:solidFill>
                 <a:latin typeface="Hiragino Sans GB" panose="020B0300000000000000" charset="-122"/>
                 <a:ea typeface="Hiragino Sans GB" panose="020B0300000000000000" charset="-122"/>
@@ -2584,7 +2894,7 @@
             <a:defPPr>
               <a:defRPr sz="975" b="0">
                 <a:solidFill>
-                  <a:srgbClr val="5D7183"/>
+                  <a:srgbClr val="62788B"/>
                 </a:solidFill>
                 <a:latin typeface="Hiragino Sans GB" panose="020B0300000000000000" charset="-122"/>
                 <a:ea typeface="Hiragino Sans GB" panose="020B0300000000000000" charset="-122"/>
@@ -2594,6 +2904,7 @@
           </a:lstStyle>
           <a:p>
             <a:pPr>
+              <a:buNone/>
               <a:defRPr sz="975" b="0">
                 <a:solidFill>
                   <a:srgbClr val="5D7183"/>
@@ -2606,7 +2917,7 @@
             <a:r>
               <a:rPr sz="975" b="0">
                 <a:solidFill>
-                  <a:srgbClr val="5D7183"/>
+                  <a:srgbClr val="62788B"/>
                 </a:solidFill>
                 <a:latin typeface="Hiragino Sans GB" panose="020B0300000000000000" charset="-122"/>
                 <a:ea typeface="Hiragino Sans GB" panose="020B0300000000000000" charset="-122"/>
@@ -2646,7 +2957,7 @@
           </a:solidFill>
           <a:ln w="9525">
             <a:solidFill>
-              <a:srgbClr val="C9D9E5"/>
+              <a:srgbClr val="BBD1DD"/>
             </a:solidFill>
             <a:prstDash val="solid"/>
           </a:ln>
@@ -2669,7 +2980,7 @@
             <a:avLst/>
           </a:prstGeom>
           <a:solidFill>
-            <a:srgbClr val="385E7D"/>
+            <a:srgbClr val="087E8B"/>
           </a:solidFill>
           <a:ln w="0">
             <a:noFill/>
@@ -2703,9 +3014,9 @@
           <a:bodyPr anchor="ctr"/>
           <a:lstStyle>
             <a:defPPr>
-              <a:defRPr sz="1725" b="1">
-                <a:solidFill>
-                  <a:srgbClr val="385E7D"/>
+              <a:defRPr sz="1800" b="1">
+                <a:solidFill>
+                  <a:srgbClr val="0A6676"/>
                 </a:solidFill>
                 <a:latin typeface="Hiragino Sans GB" panose="020B0300000000000000" charset="-122"/>
                 <a:ea typeface="Hiragino Sans GB" panose="020B0300000000000000" charset="-122"/>
@@ -2715,6 +3026,7 @@
           </a:lstStyle>
           <a:p>
             <a:pPr>
+              <a:buNone/>
               <a:defRPr sz="1725" b="1">
                 <a:solidFill>
                   <a:srgbClr val="385E7D"/>
@@ -2725,15 +3037,15 @@
               </a:defRPr>
             </a:pPr>
             <a:r>
-              <a:rPr sz="1725" b="1">
-                <a:solidFill>
-                  <a:srgbClr val="385E7D"/>
+              <a:rPr sz="1800" b="1">
+                <a:solidFill>
+                  <a:srgbClr val="0A6676"/>
                 </a:solidFill>
                 <a:latin typeface="Hiragino Sans GB" panose="020B0300000000000000" charset="-122"/>
                 <a:ea typeface="Hiragino Sans GB" panose="020B0300000000000000" charset="-122"/>
                 <a:cs typeface="Hiragino Sans GB" panose="020B0300000000000000" charset="-122"/>
               </a:rPr>
-              <a:t>本次已完成</a:t>
+              <a:t>需求优先级</a:t>
             </a:r>
             <a:endParaRPr sz="1725" b="1">
               <a:solidFill>
@@ -2774,7 +3086,7 @@
             <a:defPPr>
               <a:defRPr sz="1425" b="0">
                 <a:solidFill>
-                  <a:srgbClr val="24364B"/>
+                  <a:srgbClr val="1F364D"/>
                 </a:solidFill>
                 <a:latin typeface="Hiragino Sans GB" panose="020B0300000000000000" charset="-122"/>
                 <a:ea typeface="Hiragino Sans GB" panose="020B0300000000000000" charset="-122"/>
@@ -2784,6 +3096,7 @@
           </a:lstStyle>
           <a:p>
             <a:pPr>
+              <a:buNone/>
               <a:defRPr sz="1425" b="0">
                 <a:solidFill>
                   <a:srgbClr val="24364B"/>
@@ -2796,13 +3109,13 @@
             <a:r>
               <a:rPr sz="1425" b="0">
                 <a:solidFill>
-                  <a:srgbClr val="24364B"/>
+                  <a:srgbClr val="1F364D"/>
                 </a:solidFill>
                 <a:latin typeface="Hiragino Sans GB" panose="020B0300000000000000" charset="-122"/>
                 <a:ea typeface="Hiragino Sans GB" panose="020B0300000000000000" charset="-122"/>
                 <a:cs typeface="Hiragino Sans GB" panose="020B0300000000000000" charset="-122"/>
               </a:rPr>
-              <a:t>调研方案与访谈提纲；</a:t>
+              <a:t>R01—R06：Must，覆盖四类成果、组合检索、来源留痕、状态区分、门户认领和合法采集。</a:t>
             </a:r>
             <a:endParaRPr sz="1425" b="0">
               <a:solidFill>
@@ -2815,6 +3128,28 @@
           </a:p>
           <a:p>
             <a:pPr>
+              <a:buNone/>
+              <a:defRPr sz="1425" b="0">
+                <a:solidFill>
+                  <a:srgbClr val="24364B"/>
+                </a:solidFill>
+                <a:latin typeface="Hiragino Sans GB" panose="020B0300000000000000" charset="-122"/>
+                <a:ea typeface="Hiragino Sans GB" panose="020B0300000000000000" charset="-122"/>
+                <a:cs typeface="Hiragino Sans GB" panose="020B0300000000000000" charset="-122"/>
+              </a:defRPr>
+            </a:pPr>
+            <a:endParaRPr sz="1425" b="0">
+              <a:solidFill>
+                <a:srgbClr val="24364B"/>
+              </a:solidFill>
+              <a:latin typeface="Hiragino Sans GB" panose="020B0300000000000000" charset="-122"/>
+              <a:ea typeface="Hiragino Sans GB" panose="020B0300000000000000" charset="-122"/>
+              <a:cs typeface="Hiragino Sans GB" panose="020B0300000000000000" charset="-122"/>
+            </a:endParaRPr>
+          </a:p>
+          <a:p>
+            <a:pPr>
+              <a:buNone/>
               <a:defRPr sz="1425" b="0">
                 <a:solidFill>
                   <a:srgbClr val="24364B"/>
@@ -2827,13 +3162,13 @@
             <a:r>
               <a:rPr sz="1425" b="0">
                 <a:solidFill>
-                  <a:srgbClr val="24364B"/>
+                  <a:srgbClr val="1F364D"/>
                 </a:solidFill>
                 <a:latin typeface="Hiragino Sans GB" panose="020B0300000000000000" charset="-122"/>
                 <a:ea typeface="Hiragino Sans GB" panose="020B0300000000000000" charset="-122"/>
                 <a:cs typeface="Hiragino Sans GB" panose="020B0300000000000000" charset="-122"/>
               </a:rPr>
-              <a:t>20份普通用户问卷；</a:t>
+              <a:t>R07—R08：Should，涉及引用入口与缺失字段。</a:t>
             </a:r>
             <a:endParaRPr sz="1425" b="0">
               <a:solidFill>
@@ -2846,6 +3181,28 @@
           </a:p>
           <a:p>
             <a:pPr>
+              <a:buNone/>
+              <a:defRPr sz="1425" b="0">
+                <a:solidFill>
+                  <a:srgbClr val="24364B"/>
+                </a:solidFill>
+                <a:latin typeface="Hiragino Sans GB" panose="020B0300000000000000" charset="-122"/>
+                <a:ea typeface="Hiragino Sans GB" panose="020B0300000000000000" charset="-122"/>
+                <a:cs typeface="Hiragino Sans GB" panose="020B0300000000000000" charset="-122"/>
+              </a:defRPr>
+            </a:pPr>
+            <a:endParaRPr sz="1425" b="0">
+              <a:solidFill>
+                <a:srgbClr val="24364B"/>
+              </a:solidFill>
+              <a:latin typeface="Hiragino Sans GB" panose="020B0300000000000000" charset="-122"/>
+              <a:ea typeface="Hiragino Sans GB" panose="020B0300000000000000" charset="-122"/>
+              <a:cs typeface="Hiragino Sans GB" panose="020B0300000000000000" charset="-122"/>
+            </a:endParaRPr>
+          </a:p>
+          <a:p>
+            <a:pPr>
+              <a:buNone/>
               <a:defRPr sz="1425" b="0">
                 <a:solidFill>
                   <a:srgbClr val="24364B"/>
@@ -2858,13 +3215,13 @@
             <a:r>
               <a:rPr sz="1425" b="0">
                 <a:solidFill>
-                  <a:srgbClr val="24364B"/>
+                  <a:srgbClr val="1F364D"/>
                 </a:solidFill>
                 <a:latin typeface="Hiragino Sans GB" panose="020B0300000000000000" charset="-122"/>
                 <a:ea typeface="Hiragino Sans GB" panose="020B0300000000000000" charset="-122"/>
                 <a:cs typeface="Hiragino Sans GB" panose="020B0300000000000000" charset="-122"/>
               </a:rPr>
-              <a:t>知网及官网任务走查；</a:t>
+              <a:t>R09：基础统计 Must，网络分阶段。R10：待验证。</a:t>
             </a:r>
             <a:endParaRPr sz="1425" b="0">
               <a:solidFill>
@@ -2875,99 +3232,6 @@
               <a:cs typeface="Hiragino Sans GB" panose="020B0300000000000000" charset="-122"/>
             </a:endParaRPr>
           </a:p>
-          <a:p>
-            <a:pPr>
-              <a:defRPr sz="1425" b="0">
-                <a:solidFill>
-                  <a:srgbClr val="24364B"/>
-                </a:solidFill>
-                <a:latin typeface="Hiragino Sans GB" panose="020B0300000000000000" charset="-122"/>
-                <a:ea typeface="Hiragino Sans GB" panose="020B0300000000000000" charset="-122"/>
-                <a:cs typeface="Hiragino Sans GB" panose="020B0300000000000000" charset="-122"/>
-              </a:defRPr>
-            </a:pPr>
-            <a:r>
-              <a:rPr sz="1425" b="0">
-                <a:solidFill>
-                  <a:srgbClr val="24364B"/>
-                </a:solidFill>
-                <a:latin typeface="Hiragino Sans GB" panose="020B0300000000000000" charset="-122"/>
-                <a:ea typeface="Hiragino Sans GB" panose="020B0300000000000000" charset="-122"/>
-                <a:cs typeface="Hiragino Sans GB" panose="020B0300000000000000" charset="-122"/>
-              </a:rPr>
-              <a:t>七渠道比较和浙大存量抽样；</a:t>
-            </a:r>
-            <a:endParaRPr sz="1425" b="0">
-              <a:solidFill>
-                <a:srgbClr val="24364B"/>
-              </a:solidFill>
-              <a:latin typeface="Hiragino Sans GB" panose="020B0300000000000000" charset="-122"/>
-              <a:ea typeface="Hiragino Sans GB" panose="020B0300000000000000" charset="-122"/>
-              <a:cs typeface="Hiragino Sans GB" panose="020B0300000000000000" charset="-122"/>
-            </a:endParaRPr>
-          </a:p>
-          <a:p>
-            <a:pPr>
-              <a:defRPr sz="1425" b="0">
-                <a:solidFill>
-                  <a:srgbClr val="24364B"/>
-                </a:solidFill>
-                <a:latin typeface="Hiragino Sans GB" panose="020B0300000000000000" charset="-122"/>
-                <a:ea typeface="Hiragino Sans GB" panose="020B0300000000000000" charset="-122"/>
-                <a:cs typeface="Hiragino Sans GB" panose="020B0300000000000000" charset="-122"/>
-              </a:defRPr>
-            </a:pPr>
-            <a:r>
-              <a:rPr sz="1425" b="0">
-                <a:solidFill>
-                  <a:srgbClr val="24364B"/>
-                </a:solidFill>
-                <a:latin typeface="Hiragino Sans GB" panose="020B0300000000000000" charset="-122"/>
-                <a:ea typeface="Hiragino Sans GB" panose="020B0300000000000000" charset="-122"/>
-                <a:cs typeface="Hiragino Sans GB" panose="020B0300000000000000" charset="-122"/>
-              </a:rPr>
-              <a:t>公开源与跨类型样本；</a:t>
-            </a:r>
-            <a:endParaRPr sz="1425" b="0">
-              <a:solidFill>
-                <a:srgbClr val="24364B"/>
-              </a:solidFill>
-              <a:latin typeface="Hiragino Sans GB" panose="020B0300000000000000" charset="-122"/>
-              <a:ea typeface="Hiragino Sans GB" panose="020B0300000000000000" charset="-122"/>
-              <a:cs typeface="Hiragino Sans GB" panose="020B0300000000000000" charset="-122"/>
-            </a:endParaRPr>
-          </a:p>
-          <a:p>
-            <a:pPr>
-              <a:defRPr sz="1425" b="0">
-                <a:solidFill>
-                  <a:srgbClr val="24364B"/>
-                </a:solidFill>
-                <a:latin typeface="Hiragino Sans GB" panose="020B0300000000000000" charset="-122"/>
-                <a:ea typeface="Hiragino Sans GB" panose="020B0300000000000000" charset="-122"/>
-                <a:cs typeface="Hiragino Sans GB" panose="020B0300000000000000" charset="-122"/>
-              </a:defRPr>
-            </a:pPr>
-            <a:r>
-              <a:rPr sz="1425" b="0">
-                <a:solidFill>
-                  <a:srgbClr val="24364B"/>
-                </a:solidFill>
-                <a:latin typeface="Hiragino Sans GB" panose="020B0300000000000000" charset="-122"/>
-                <a:ea typeface="Hiragino Sans GB" panose="020B0300000000000000" charset="-122"/>
-                <a:cs typeface="Hiragino Sans GB" panose="020B0300000000000000" charset="-122"/>
-              </a:rPr>
-              <a:t>十条领域试标。</a:t>
-            </a:r>
-            <a:endParaRPr sz="1425" b="0">
-              <a:solidFill>
-                <a:srgbClr val="24364B"/>
-              </a:solidFill>
-              <a:latin typeface="Hiragino Sans GB" panose="020B0300000000000000" charset="-122"/>
-              <a:ea typeface="Hiragino Sans GB" panose="020B0300000000000000" charset="-122"/>
-              <a:cs typeface="Hiragino Sans GB" panose="020B0300000000000000" charset="-122"/>
-            </a:endParaRPr>
-          </a:p>
         </p:txBody>
       </p:sp>
       <p:sp>
@@ -2991,7 +3255,7 @@
           </a:solidFill>
           <a:ln w="9525">
             <a:solidFill>
-              <a:srgbClr val="C9D9E5"/>
+              <a:srgbClr val="BBD1DD"/>
             </a:solidFill>
             <a:prstDash val="solid"/>
           </a:ln>
@@ -3014,7 +3278,7 @@
             <a:avLst/>
           </a:prstGeom>
           <a:solidFill>
-            <a:srgbClr val="385E7D"/>
+            <a:srgbClr val="087E8B"/>
           </a:solidFill>
           <a:ln w="0">
             <a:noFill/>
@@ -3048,9 +3312,9 @@
           <a:bodyPr anchor="ctr"/>
           <a:lstStyle>
             <a:defPPr>
-              <a:defRPr sz="1725" b="1">
-                <a:solidFill>
-                  <a:srgbClr val="385E7D"/>
+              <a:defRPr sz="1800" b="1">
+                <a:solidFill>
+                  <a:srgbClr val="0A6676"/>
                 </a:solidFill>
                 <a:latin typeface="Hiragino Sans GB" panose="020B0300000000000000" charset="-122"/>
                 <a:ea typeface="Hiragino Sans GB" panose="020B0300000000000000" charset="-122"/>
@@ -3060,6 +3324,7 @@
           </a:lstStyle>
           <a:p>
             <a:pPr>
+              <a:buNone/>
               <a:defRPr sz="1725" b="1">
                 <a:solidFill>
                   <a:srgbClr val="385E7D"/>
@@ -3070,9 +3335,9 @@
               </a:defRPr>
             </a:pPr>
             <a:r>
-              <a:rPr sz="1725" b="1">
-                <a:solidFill>
-                  <a:srgbClr val="385E7D"/>
+              <a:rPr sz="1800" b="1">
+                <a:solidFill>
+                  <a:srgbClr val="0A6676"/>
                 </a:solidFill>
                 <a:latin typeface="Hiragino Sans GB" panose="020B0300000000000000" charset="-122"/>
                 <a:ea typeface="Hiragino Sans GB" panose="020B0300000000000000" charset="-122"/>
@@ -3119,7 +3384,7 @@
             <a:defPPr>
               <a:defRPr sz="1425" b="0">
                 <a:solidFill>
-                  <a:srgbClr val="24364B"/>
+                  <a:srgbClr val="1F364D"/>
                 </a:solidFill>
                 <a:latin typeface="Hiragino Sans GB" panose="020B0300000000000000" charset="-122"/>
                 <a:ea typeface="Hiragino Sans GB" panose="020B0300000000000000" charset="-122"/>
@@ -3129,6 +3394,7 @@
           </a:lstStyle>
           <a:p>
             <a:pPr>
+              <a:buNone/>
               <a:defRPr sz="1425" b="0">
                 <a:solidFill>
                   <a:srgbClr val="24364B"/>
@@ -3141,13 +3407,13 @@
             <a:r>
               <a:rPr sz="1425" b="0">
                 <a:solidFill>
-                  <a:srgbClr val="24364B"/>
+                  <a:srgbClr val="1F364D"/>
                 </a:solidFill>
                 <a:latin typeface="Hiragino Sans GB" panose="020B0300000000000000" charset="-122"/>
                 <a:ea typeface="Hiragino Sans GB" panose="020B0300000000000000" charset="-122"/>
                 <a:cs typeface="Hiragino Sans GB" panose="020B0300000000000000" charset="-122"/>
               </a:rPr>
-              <a:t>教师和管理员真实流程；</a:t>
+              <a:t>教师和管理员尚无真实访谈；软著和课件缺逐件授权。</a:t>
             </a:r>
             <a:endParaRPr sz="1425" b="0">
               <a:solidFill>
@@ -3160,6 +3426,28 @@
           </a:p>
           <a:p>
             <a:pPr>
+              <a:buNone/>
+              <a:defRPr sz="1425" b="0">
+                <a:solidFill>
+                  <a:srgbClr val="24364B"/>
+                </a:solidFill>
+                <a:latin typeface="Hiragino Sans GB" panose="020B0300000000000000" charset="-122"/>
+                <a:ea typeface="Hiragino Sans GB" panose="020B0300000000000000" charset="-122"/>
+                <a:cs typeface="Hiragino Sans GB" panose="020B0300000000000000" charset="-122"/>
+              </a:defRPr>
+            </a:pPr>
+            <a:endParaRPr sz="1425" b="0">
+              <a:solidFill>
+                <a:srgbClr val="24364B"/>
+              </a:solidFill>
+              <a:latin typeface="Hiragino Sans GB" panose="020B0300000000000000" charset="-122"/>
+              <a:ea typeface="Hiragino Sans GB" panose="020B0300000000000000" charset="-122"/>
+              <a:cs typeface="Hiragino Sans GB" panose="020B0300000000000000" charset="-122"/>
+            </a:endParaRPr>
+          </a:p>
+          <a:p>
+            <a:pPr>
+              <a:buNone/>
               <a:defRPr sz="1425" b="0">
                 <a:solidFill>
                   <a:srgbClr val="24364B"/>
@@ -3172,13 +3460,13 @@
             <a:r>
               <a:rPr sz="1425" b="0">
                 <a:solidFill>
-                  <a:srgbClr val="24364B"/>
+                  <a:srgbClr val="1F364D"/>
                 </a:solidFill>
                 <a:latin typeface="Hiragino Sans GB" panose="020B0300000000000000" charset="-122"/>
                 <a:ea typeface="Hiragino Sans GB" panose="020B0300000000000000" charset="-122"/>
                 <a:cs typeface="Hiragino Sans GB" panose="020B0300000000000000" charset="-122"/>
               </a:rPr>
-              <a:t>软著逐件权属、课程材料公开授权；</a:t>
+              <a:t>项目正式状态、专利法律状态及逐源批量许可仍需核对。</a:t>
             </a:r>
             <a:endParaRPr sz="1425" b="0">
               <a:solidFill>
@@ -3189,68 +3477,6 @@
               <a:cs typeface="Hiragino Sans GB" panose="020B0300000000000000" charset="-122"/>
             </a:endParaRPr>
           </a:p>
-          <a:p>
-            <a:pPr>
-              <a:defRPr sz="1425" b="0">
-                <a:solidFill>
-                  <a:srgbClr val="24364B"/>
-                </a:solidFill>
-                <a:latin typeface="Hiragino Sans GB" panose="020B0300000000000000" charset="-122"/>
-                <a:ea typeface="Hiragino Sans GB" panose="020B0300000000000000" charset="-122"/>
-                <a:cs typeface="Hiragino Sans GB" panose="020B0300000000000000" charset="-122"/>
-              </a:defRPr>
-            </a:pPr>
-            <a:r>
-              <a:rPr sz="1425" b="0">
-                <a:solidFill>
-                  <a:srgbClr val="24364B"/>
-                </a:solidFill>
-                <a:latin typeface="Hiragino Sans GB" panose="020B0300000000000000" charset="-122"/>
-                <a:ea typeface="Hiragino Sans GB" panose="020B0300000000000000" charset="-122"/>
-                <a:cs typeface="Hiragino Sans GB" panose="020B0300000000000000" charset="-122"/>
-              </a:rPr>
-              <a:t>项目正式状态、专利法律状态；</a:t>
-            </a:r>
-            <a:endParaRPr sz="1425" b="0">
-              <a:solidFill>
-                <a:srgbClr val="24364B"/>
-              </a:solidFill>
-              <a:latin typeface="Hiragino Sans GB" panose="020B0300000000000000" charset="-122"/>
-              <a:ea typeface="Hiragino Sans GB" panose="020B0300000000000000" charset="-122"/>
-              <a:cs typeface="Hiragino Sans GB" panose="020B0300000000000000" charset="-122"/>
-            </a:endParaRPr>
-          </a:p>
-          <a:p>
-            <a:pPr>
-              <a:defRPr sz="1425" b="0">
-                <a:solidFill>
-                  <a:srgbClr val="24364B"/>
-                </a:solidFill>
-                <a:latin typeface="Hiragino Sans GB" panose="020B0300000000000000" charset="-122"/>
-                <a:ea typeface="Hiragino Sans GB" panose="020B0300000000000000" charset="-122"/>
-                <a:cs typeface="Hiragino Sans GB" panose="020B0300000000000000" charset="-122"/>
-              </a:defRPr>
-            </a:pPr>
-            <a:r>
-              <a:rPr sz="1425" b="0">
-                <a:solidFill>
-                  <a:srgbClr val="24364B"/>
-                </a:solidFill>
-                <a:latin typeface="Hiragino Sans GB" panose="020B0300000000000000" charset="-122"/>
-                <a:ea typeface="Hiragino Sans GB" panose="020B0300000000000000" charset="-122"/>
-                <a:cs typeface="Hiragino Sans GB" panose="020B0300000000000000" charset="-122"/>
-              </a:rPr>
-              <a:t>逐源自动采集与附件许可。</a:t>
-            </a:r>
-            <a:endParaRPr sz="1425" b="0">
-              <a:solidFill>
-                <a:srgbClr val="24364B"/>
-              </a:solidFill>
-              <a:latin typeface="Hiragino Sans GB" panose="020B0300000000000000" charset="-122"/>
-              <a:ea typeface="Hiragino Sans GB" panose="020B0300000000000000" charset="-122"/>
-              <a:cs typeface="Hiragino Sans GB" panose="020B0300000000000000" charset="-122"/>
-            </a:endParaRPr>
-          </a:p>
         </p:txBody>
       </p:sp>
       <p:sp>
@@ -3274,7 +3500,7 @@
           </a:solidFill>
           <a:ln w="9525">
             <a:solidFill>
-              <a:srgbClr val="C9D9E5"/>
+              <a:srgbClr val="BBD1DD"/>
             </a:solidFill>
             <a:prstDash val="solid"/>
           </a:ln>
@@ -3297,7 +3523,7 @@
             <a:avLst/>
           </a:prstGeom>
           <a:solidFill>
-            <a:srgbClr val="385E7D"/>
+            <a:srgbClr val="087E8B"/>
           </a:solidFill>
           <a:ln w="0">
             <a:noFill/>
@@ -3331,9 +3557,9 @@
           <a:bodyPr anchor="ctr"/>
           <a:lstStyle>
             <a:defPPr>
-              <a:defRPr sz="1725" b="1">
-                <a:solidFill>
-                  <a:srgbClr val="385E7D"/>
+              <a:defRPr sz="1800" b="1">
+                <a:solidFill>
+                  <a:srgbClr val="0A6676"/>
                 </a:solidFill>
                 <a:latin typeface="Hiragino Sans GB" panose="020B0300000000000000" charset="-122"/>
                 <a:ea typeface="Hiragino Sans GB" panose="020B0300000000000000" charset="-122"/>
@@ -3343,6 +3569,7 @@
           </a:lstStyle>
           <a:p>
             <a:pPr>
+              <a:buNone/>
               <a:defRPr sz="1725" b="1">
                 <a:solidFill>
                   <a:srgbClr val="385E7D"/>
@@ -3353,9 +3580,9 @@
               </a:defRPr>
             </a:pPr>
             <a:r>
-              <a:rPr sz="1725" b="1">
-                <a:solidFill>
-                  <a:srgbClr val="385E7D"/>
+              <a:rPr sz="1800" b="1">
+                <a:solidFill>
+                  <a:srgbClr val="0A6676"/>
                 </a:solidFill>
                 <a:latin typeface="Hiragino Sans GB" panose="020B0300000000000000" charset="-122"/>
                 <a:ea typeface="Hiragino Sans GB" panose="020B0300000000000000" charset="-122"/>
@@ -3402,7 +3629,7 @@
             <a:defPPr>
               <a:defRPr sz="1425" b="0">
                 <a:solidFill>
-                  <a:srgbClr val="24364B"/>
+                  <a:srgbClr val="1F364D"/>
                 </a:solidFill>
                 <a:latin typeface="Hiragino Sans GB" panose="020B0300000000000000" charset="-122"/>
                 <a:ea typeface="Hiragino Sans GB" panose="020B0300000000000000" charset="-122"/>
@@ -3412,6 +3639,7 @@
           </a:lstStyle>
           <a:p>
             <a:pPr>
+              <a:buNone/>
               <a:defRPr sz="1425" b="0">
                 <a:solidFill>
                   <a:srgbClr val="24364B"/>
@@ -3424,13 +3652,13 @@
             <a:r>
               <a:rPr sz="1425" b="0">
                 <a:solidFill>
-                  <a:srgbClr val="24364B"/>
+                  <a:srgbClr val="1F364D"/>
                 </a:solidFill>
                 <a:latin typeface="Hiragino Sans GB" panose="020B0300000000000000" charset="-122"/>
                 <a:ea typeface="Hiragino Sans GB" panose="020B0300000000000000" charset="-122"/>
                 <a:cs typeface="Hiragino Sans GB" panose="020B0300000000000000" charset="-122"/>
               </a:rPr>
-              <a:t>作业1实测四类公开成果；</a:t>
+              <a:t>作业 1 实测四类公开样本。作业 2 依 B 组 SRS V1.1 设计七类成果，专家合作网络列为本期必验。</a:t>
             </a:r>
             <a:endParaRPr sz="1425" b="0">
               <a:solidFill>
@@ -3443,6 +3671,7 @@
           </a:p>
           <a:p>
             <a:pPr>
+              <a:buNone/>
               <a:defRPr sz="1425" b="0">
                 <a:solidFill>
                   <a:srgbClr val="24364B"/>
@@ -3452,17 +3681,6 @@
                 <a:cs typeface="Hiragino Sans GB" panose="020B0300000000000000" charset="-122"/>
               </a:defRPr>
             </a:pPr>
-            <a:r>
-              <a:rPr sz="1425" b="0">
-                <a:solidFill>
-                  <a:srgbClr val="24364B"/>
-                </a:solidFill>
-                <a:latin typeface="Hiragino Sans GB" panose="020B0300000000000000" charset="-122"/>
-                <a:ea typeface="Hiragino Sans GB" panose="020B0300000000000000" charset="-122"/>
-                <a:cs typeface="Hiragino Sans GB" panose="020B0300000000000000" charset="-122"/>
-              </a:rPr>
-              <a:t>作业2依B组SRS设计七类成果。专家合作网络是首期选定创新，尚未经真实用户偏好验证。</a:t>
-            </a:r>
             <a:endParaRPr sz="1425" b="0">
               <a:solidFill>
                 <a:srgbClr val="24364B"/>
@@ -3473,38 +3691,10 @@
             </a:endParaRPr>
           </a:p>
           <a:p>
+            <a:r>
+              <a:t>设计范围不等于七类真实样本已取得。</a:t>
+            </a:r>
             <a:endParaRPr sz="1425"/>
-          </a:p>
-          <a:p>
-            <a:pPr>
-              <a:defRPr sz="1425" b="0">
-                <a:solidFill>
-                  <a:srgbClr val="24364B"/>
-                </a:solidFill>
-                <a:latin typeface="Hiragino Sans GB" panose="020B0300000000000000" charset="-122"/>
-                <a:ea typeface="Hiragino Sans GB" panose="020B0300000000000000" charset="-122"/>
-                <a:cs typeface="Hiragino Sans GB" panose="020B0300000000000000" charset="-122"/>
-              </a:defRPr>
-            </a:pPr>
-            <a:r>
-              <a:rPr sz="1425" b="0">
-                <a:solidFill>
-                  <a:srgbClr val="24364B"/>
-                </a:solidFill>
-                <a:latin typeface="Hiragino Sans GB" panose="020B0300000000000000" charset="-122"/>
-                <a:ea typeface="Hiragino Sans GB" panose="020B0300000000000000" charset="-122"/>
-                <a:cs typeface="Hiragino Sans GB" panose="020B0300000000000000" charset="-122"/>
-              </a:rPr>
-              <a:t>报告保留 R01—R10 与证据等级。</a:t>
-            </a:r>
-            <a:endParaRPr sz="1425" b="0">
-              <a:solidFill>
-                <a:srgbClr val="24364B"/>
-              </a:solidFill>
-              <a:latin typeface="Hiragino Sans GB" panose="020B0300000000000000" charset="-122"/>
-              <a:ea typeface="Hiragino Sans GB" panose="020B0300000000000000" charset="-122"/>
-              <a:cs typeface="Hiragino Sans GB" panose="020B0300000000000000" charset="-122"/>
-            </a:endParaRPr>
           </a:p>
         </p:txBody>
       </p:sp>
@@ -3525,7 +3715,7 @@
             <a:avLst/>
           </a:prstGeom>
           <a:solidFill>
-            <a:srgbClr val="EAF1F8"/>
+            <a:srgbClr val="DDEEF2"/>
           </a:solidFill>
           <a:ln w="0">
             <a:noFill/>
@@ -3561,7 +3751,7 @@
             <a:defPPr>
               <a:defRPr sz="1350" b="0">
                 <a:solidFill>
-                  <a:srgbClr val="24364B"/>
+                  <a:srgbClr val="1F364D"/>
                 </a:solidFill>
                 <a:latin typeface="Hiragino Sans GB" panose="020B0300000000000000" charset="-122"/>
                 <a:ea typeface="Hiragino Sans GB" panose="020B0300000000000000" charset="-122"/>
@@ -3571,6 +3761,7 @@
           </a:lstStyle>
           <a:p>
             <a:pPr>
+              <a:buNone/>
               <a:defRPr sz="1350" b="0">
                 <a:solidFill>
                   <a:srgbClr val="24364B"/>
@@ -3583,13 +3774,13 @@
             <a:r>
               <a:rPr sz="1350" b="0">
                 <a:solidFill>
-                  <a:srgbClr val="24364B"/>
+                  <a:srgbClr val="1F364D"/>
                 </a:solidFill>
                 <a:latin typeface="Hiragino Sans GB" panose="020B0300000000000000" charset="-122"/>
                 <a:ea typeface="Hiragino Sans GB" panose="020B0300000000000000" charset="-122"/>
                 <a:cs typeface="Hiragino Sans GB" panose="020B0300000000000000" charset="-122"/>
               </a:rPr>
-              <a:t>报告、数据源清单与补充实测记录保存可复核入口；“已实测”“设计选择”“待验证”分别标注。</a:t>
+              <a:t>报告、数据源清单与实测记录留有入口；“已实测”“设计选择”“待验证”始终分开。</a:t>
             </a:r>
             <a:endParaRPr sz="1350" b="0">
               <a:solidFill>
@@ -3654,9 +3845,9 @@
           <a:bodyPr anchor="ctr"/>
           <a:lstStyle>
             <a:defPPr>
-              <a:defRPr sz="2475" b="1">
-                <a:solidFill>
-                  <a:srgbClr val="24364B"/>
+              <a:defRPr sz="2700" b="1">
+                <a:solidFill>
+                  <a:srgbClr val="102A43"/>
                 </a:solidFill>
                 <a:latin typeface="Hiragino Sans GB" panose="020B0300000000000000" charset="-122"/>
                 <a:ea typeface="Hiragino Sans GB" panose="020B0300000000000000" charset="-122"/>
@@ -3666,6 +3857,7 @@
           </a:lstStyle>
           <a:p>
             <a:pPr>
+              <a:buNone/>
               <a:defRPr sz="2475" b="1">
                 <a:solidFill>
                   <a:srgbClr val="24364B"/>
@@ -3676,15 +3868,15 @@
               </a:defRPr>
             </a:pPr>
             <a:r>
-              <a:rPr sz="2475" b="1">
-                <a:solidFill>
-                  <a:srgbClr val="24364B"/>
+              <a:rPr sz="2700" b="1">
+                <a:solidFill>
+                  <a:srgbClr val="102A43"/>
                 </a:solidFill>
                 <a:latin typeface="Hiragino Sans GB" panose="020B0300000000000000" charset="-122"/>
                 <a:ea typeface="Hiragino Sans GB" panose="020B0300000000000000" charset="-122"/>
                 <a:cs typeface="Hiragino Sans GB" panose="020B0300000000000000" charset="-122"/>
               </a:rPr>
-              <a:t>调研方案：目标、对象与时间</a:t>
+              <a:t>调研方案：三类角色、两阶段执行</a:t>
             </a:r>
             <a:endParaRPr sz="2475" b="1">
               <a:solidFill>
@@ -3708,13 +3900,13 @@
         <p:spPr>
           <a:xfrm>
             <a:off x="590550" y="1057275"/>
-            <a:ext cx="11010900" cy="19050"/>
+            <a:ext cx="11010900" cy="38100"/>
           </a:xfrm>
           <a:prstGeom prst="rect">
             <a:avLst/>
           </a:prstGeom>
           <a:solidFill>
-            <a:srgbClr val="C9D9E5"/>
+            <a:srgbClr val="087E8B"/>
           </a:solidFill>
           <a:ln w="0">
             <a:noFill/>
@@ -3750,7 +3942,7 @@
             <a:defPPr>
               <a:defRPr sz="1050" b="0">
                 <a:solidFill>
-                  <a:srgbClr val="5D7183"/>
+                  <a:srgbClr val="62788B"/>
                 </a:solidFill>
                 <a:latin typeface="Hiragino Sans GB" panose="020B0300000000000000" charset="-122"/>
                 <a:ea typeface="Hiragino Sans GB" panose="020B0300000000000000" charset="-122"/>
@@ -3760,6 +3952,7 @@
           </a:lstStyle>
           <a:p>
             <a:pPr>
+              <a:buNone/>
               <a:defRPr sz="1050" b="0">
                 <a:solidFill>
                   <a:srgbClr val="5D7183"/>
@@ -3772,7 +3965,7 @@
             <a:r>
               <a:rPr sz="1050" b="0">
                 <a:solidFill>
-                  <a:srgbClr val="5D7183"/>
+                  <a:srgbClr val="62788B"/>
                 </a:solidFill>
                 <a:latin typeface="Hiragino Sans GB" panose="020B0300000000000000" charset="-122"/>
                 <a:ea typeface="Hiragino Sans GB" panose="020B0300000000000000" charset="-122"/>
@@ -3819,7 +4012,7 @@
             <a:defPPr>
               <a:defRPr sz="975" b="0">
                 <a:solidFill>
-                  <a:srgbClr val="5D7183"/>
+                  <a:srgbClr val="62788B"/>
                 </a:solidFill>
                 <a:latin typeface="Hiragino Sans GB" panose="020B0300000000000000" charset="-122"/>
                 <a:ea typeface="Hiragino Sans GB" panose="020B0300000000000000" charset="-122"/>
@@ -3829,6 +4022,7 @@
           </a:lstStyle>
           <a:p>
             <a:pPr>
+              <a:buNone/>
               <a:defRPr sz="975" b="0">
                 <a:solidFill>
                   <a:srgbClr val="5D7183"/>
@@ -3841,7 +4035,7 @@
             <a:r>
               <a:rPr sz="975" b="0">
                 <a:solidFill>
-                  <a:srgbClr val="5D7183"/>
+                  <a:srgbClr val="62788B"/>
                 </a:solidFill>
                 <a:latin typeface="Hiragino Sans GB" panose="020B0300000000000000" charset="-122"/>
                 <a:ea typeface="Hiragino Sans GB" panose="020B0300000000000000" charset="-122"/>
@@ -3881,7 +4075,7 @@
           </a:solidFill>
           <a:ln w="9525">
             <a:solidFill>
-              <a:srgbClr val="C9D9E5"/>
+              <a:srgbClr val="BBD1DD"/>
             </a:solidFill>
             <a:prstDash val="solid"/>
           </a:ln>
@@ -3904,7 +4098,7 @@
             <a:avLst/>
           </a:prstGeom>
           <a:solidFill>
-            <a:srgbClr val="385E7D"/>
+            <a:srgbClr val="087E8B"/>
           </a:solidFill>
           <a:ln w="0">
             <a:noFill/>
@@ -3938,9 +4132,9 @@
           <a:bodyPr anchor="ctr"/>
           <a:lstStyle>
             <a:defPPr>
-              <a:defRPr sz="1725" b="1">
-                <a:solidFill>
-                  <a:srgbClr val="385E7D"/>
+              <a:defRPr sz="1800" b="1">
+                <a:solidFill>
+                  <a:srgbClr val="0A6676"/>
                 </a:solidFill>
                 <a:latin typeface="Hiragino Sans GB" panose="020B0300000000000000" charset="-122"/>
                 <a:ea typeface="Hiragino Sans GB" panose="020B0300000000000000" charset="-122"/>
@@ -3950,6 +4144,7 @@
           </a:lstStyle>
           <a:p>
             <a:pPr>
+              <a:buNone/>
               <a:defRPr sz="1725" b="1">
                 <a:solidFill>
                   <a:srgbClr val="385E7D"/>
@@ -3960,9 +4155,9 @@
               </a:defRPr>
             </a:pPr>
             <a:r>
-              <a:rPr sz="1725" b="1">
-                <a:solidFill>
-                  <a:srgbClr val="385E7D"/>
+              <a:rPr sz="1800" b="1">
+                <a:solidFill>
+                  <a:srgbClr val="0A6676"/>
                 </a:solidFill>
                 <a:latin typeface="Hiragino Sans GB" panose="020B0300000000000000" charset="-122"/>
                 <a:ea typeface="Hiragino Sans GB" panose="020B0300000000000000" charset="-122"/>
@@ -4009,7 +4204,7 @@
             <a:defPPr>
               <a:defRPr sz="1425" b="0">
                 <a:solidFill>
-                  <a:srgbClr val="24364B"/>
+                  <a:srgbClr val="1F364D"/>
                 </a:solidFill>
                 <a:latin typeface="Hiragino Sans GB" panose="020B0300000000000000" charset="-122"/>
                 <a:ea typeface="Hiragino Sans GB" panose="020B0300000000000000" charset="-122"/>
@@ -4019,6 +4214,7 @@
           </a:lstStyle>
           <a:p>
             <a:pPr>
+              <a:buNone/>
               <a:defRPr sz="1425" b="0">
                 <a:solidFill>
                   <a:srgbClr val="24364B"/>
@@ -4031,13 +4227,13 @@
             <a:r>
               <a:rPr sz="1425" b="0">
                 <a:solidFill>
-                  <a:srgbClr val="24364B"/>
+                  <a:srgbClr val="1F364D"/>
                 </a:solidFill>
                 <a:latin typeface="Hiragino Sans GB" panose="020B0300000000000000" charset="-122"/>
                 <a:ea typeface="Hiragino Sans GB" panose="020B0300000000000000" charset="-122"/>
                 <a:cs typeface="Hiragino Sans GB" panose="020B0300000000000000" charset="-122"/>
               </a:rPr>
-              <a:t>识别成果查找、来源可信度、门户认领与审核中的真实问题，形成有证据边界的需求。</a:t>
+              <a:t>核验成果查找、来源可信度、门户认领与审核中的问题，形成可追溯的需求。</a:t>
             </a:r>
             <a:endParaRPr sz="1425" b="0">
               <a:solidFill>
@@ -4071,7 +4267,7 @@
           </a:solidFill>
           <a:ln w="9525">
             <a:solidFill>
-              <a:srgbClr val="C9D9E5"/>
+              <a:srgbClr val="BBD1DD"/>
             </a:solidFill>
             <a:prstDash val="solid"/>
           </a:ln>
@@ -4094,7 +4290,7 @@
             <a:avLst/>
           </a:prstGeom>
           <a:solidFill>
-            <a:srgbClr val="385E7D"/>
+            <a:srgbClr val="087E8B"/>
           </a:solidFill>
           <a:ln w="0">
             <a:noFill/>
@@ -4128,9 +4324,9 @@
           <a:bodyPr anchor="ctr"/>
           <a:lstStyle>
             <a:defPPr>
-              <a:defRPr sz="1725" b="1">
-                <a:solidFill>
-                  <a:srgbClr val="385E7D"/>
+              <a:defRPr sz="1800" b="1">
+                <a:solidFill>
+                  <a:srgbClr val="0A6676"/>
                 </a:solidFill>
                 <a:latin typeface="Hiragino Sans GB" panose="020B0300000000000000" charset="-122"/>
                 <a:ea typeface="Hiragino Sans GB" panose="020B0300000000000000" charset="-122"/>
@@ -4140,6 +4336,7 @@
           </a:lstStyle>
           <a:p>
             <a:pPr>
+              <a:buNone/>
               <a:defRPr sz="1725" b="1">
                 <a:solidFill>
                   <a:srgbClr val="385E7D"/>
@@ -4150,9 +4347,9 @@
               </a:defRPr>
             </a:pPr>
             <a:r>
-              <a:rPr sz="1725" b="1">
-                <a:solidFill>
-                  <a:srgbClr val="385E7D"/>
+              <a:rPr sz="1800" b="1">
+                <a:solidFill>
+                  <a:srgbClr val="0A6676"/>
                 </a:solidFill>
                 <a:latin typeface="Hiragino Sans GB" panose="020B0300000000000000" charset="-122"/>
                 <a:ea typeface="Hiragino Sans GB" panose="020B0300000000000000" charset="-122"/>
@@ -4199,7 +4396,7 @@
             <a:defPPr>
               <a:defRPr sz="1425" b="0">
                 <a:solidFill>
-                  <a:srgbClr val="24364B"/>
+                  <a:srgbClr val="1F364D"/>
                 </a:solidFill>
                 <a:latin typeface="Hiragino Sans GB" panose="020B0300000000000000" charset="-122"/>
                 <a:ea typeface="Hiragino Sans GB" panose="020B0300000000000000" charset="-122"/>
@@ -4209,6 +4406,7 @@
           </a:lstStyle>
           <a:p>
             <a:pPr>
+              <a:buNone/>
               <a:defRPr sz="1425" b="0">
                 <a:solidFill>
                   <a:srgbClr val="24364B"/>
@@ -4221,13 +4419,13 @@
             <a:r>
               <a:rPr sz="1425" b="0">
                 <a:solidFill>
-                  <a:srgbClr val="24364B"/>
+                  <a:srgbClr val="1F364D"/>
                 </a:solidFill>
                 <a:latin typeface="Hiragino Sans GB" panose="020B0300000000000000" charset="-122"/>
                 <a:ea typeface="Hiragino Sans GB" panose="020B0300000000000000" charset="-122"/>
                 <a:cs typeface="Hiragino Sans GB" panose="020B0300000000000000" charset="-122"/>
               </a:rPr>
-              <a:t>普通用户／学生取得20份问卷。科研人员／教师、平台管理员设计了访谈提纲，尚未取得真实访谈。</a:t>
+              <a:t>普通用户：20 份学生问卷。科研人员和管理员：已设计访谈提纲，本轮没有真实访谈。</a:t>
             </a:r>
             <a:endParaRPr sz="1425" b="0">
               <a:solidFill>
@@ -4261,7 +4459,7 @@
           </a:solidFill>
           <a:ln w="9525">
             <a:solidFill>
-              <a:srgbClr val="C9D9E5"/>
+              <a:srgbClr val="BBD1DD"/>
             </a:solidFill>
             <a:prstDash val="solid"/>
           </a:ln>
@@ -4284,7 +4482,7 @@
             <a:avLst/>
           </a:prstGeom>
           <a:solidFill>
-            <a:srgbClr val="385E7D"/>
+            <a:srgbClr val="087E8B"/>
           </a:solidFill>
           <a:ln w="0">
             <a:noFill/>
@@ -4318,9 +4516,9 @@
           <a:bodyPr anchor="ctr"/>
           <a:lstStyle>
             <a:defPPr>
-              <a:defRPr sz="1725" b="1">
-                <a:solidFill>
-                  <a:srgbClr val="385E7D"/>
+              <a:defRPr sz="1800" b="1">
+                <a:solidFill>
+                  <a:srgbClr val="0A6676"/>
                 </a:solidFill>
                 <a:latin typeface="Hiragino Sans GB" panose="020B0300000000000000" charset="-122"/>
                 <a:ea typeface="Hiragino Sans GB" panose="020B0300000000000000" charset="-122"/>
@@ -4330,6 +4528,7 @@
           </a:lstStyle>
           <a:p>
             <a:pPr>
+              <a:buNone/>
               <a:defRPr sz="1725" b="1">
                 <a:solidFill>
                   <a:srgbClr val="385E7D"/>
@@ -4340,9 +4539,9 @@
               </a:defRPr>
             </a:pPr>
             <a:r>
-              <a:rPr sz="1725" b="1">
-                <a:solidFill>
-                  <a:srgbClr val="385E7D"/>
+              <a:rPr sz="1800" b="1">
+                <a:solidFill>
+                  <a:srgbClr val="0A6676"/>
                 </a:solidFill>
                 <a:latin typeface="Hiragino Sans GB" panose="020B0300000000000000" charset="-122"/>
                 <a:ea typeface="Hiragino Sans GB" panose="020B0300000000000000" charset="-122"/>
@@ -4389,7 +4588,7 @@
             <a:defPPr>
               <a:defRPr sz="1425" b="0">
                 <a:solidFill>
-                  <a:srgbClr val="24364B"/>
+                  <a:srgbClr val="1F364D"/>
                 </a:solidFill>
                 <a:latin typeface="Hiragino Sans GB" panose="020B0300000000000000" charset="-122"/>
                 <a:ea typeface="Hiragino Sans GB" panose="020B0300000000000000" charset="-122"/>
@@ -4399,6 +4598,7 @@
           </a:lstStyle>
           <a:p>
             <a:pPr>
+              <a:buNone/>
               <a:defRPr sz="1425" b="0">
                 <a:solidFill>
                   <a:srgbClr val="24364B"/>
@@ -4411,13 +4611,13 @@
             <a:r>
               <a:rPr sz="1425" b="0">
                 <a:solidFill>
-                  <a:srgbClr val="24364B"/>
+                  <a:srgbClr val="1F364D"/>
                 </a:solidFill>
                 <a:latin typeface="Hiragino Sans GB" panose="020B0300000000000000" charset="-122"/>
                 <a:ea typeface="Hiragino Sans GB" panose="020B0300000000000000" charset="-122"/>
                 <a:cs typeface="Hiragino Sans GB" panose="020B0300000000000000" charset="-122"/>
               </a:rPr>
-              <a:t>背景资料研读、数据源走查、同类平台比较、问卷与任务观察、半结构访谈提纲设计。</a:t>
+              <a:t>研读背景资料，开展问卷与任务走查，比较七个渠道，再核验公开数据源和许可。</a:t>
             </a:r>
             <a:endParaRPr sz="1425" b="0">
               <a:solidFill>
@@ -4447,7 +4647,7 @@
             <a:avLst/>
           </a:prstGeom>
           <a:solidFill>
-            <a:srgbClr val="EAF1F8"/>
+            <a:srgbClr val="DDEEF2"/>
           </a:solidFill>
           <a:ln w="9525">
             <a:solidFill>
@@ -4458,9 +4658,8 @@
         </p:spPr>
         <p:txBody>
           <a:bodyPr/>
-          <a:p>
-            <a:endParaRPr lang="zh-CN" altLang="en-US"/>
-          </a:p>
+          <a:lstStyle/>
+          <a:p/>
         </p:txBody>
       </p:sp>
       <p:sp>
@@ -4491,7 +4690,7 @@
             <a:defPPr>
               <a:defRPr sz="1350" b="1">
                 <a:solidFill>
-                  <a:srgbClr val="385E7D"/>
+                  <a:srgbClr val="0A6676"/>
                 </a:solidFill>
                 <a:latin typeface="Hiragino Sans GB" panose="020B0300000000000000" charset="-122"/>
                 <a:ea typeface="Hiragino Sans GB" panose="020B0300000000000000" charset="-122"/>
@@ -4501,6 +4700,7 @@
           </a:lstStyle>
           <a:p>
             <a:pPr>
+              <a:buNone/>
               <a:defRPr sz="1350" b="1">
                 <a:solidFill>
                   <a:srgbClr val="385E7D"/>
@@ -4511,9 +4711,9 @@
               </a:defRPr>
             </a:pPr>
             <a:r>
-              <a:rPr lang="zh-CN" sz="1350" b="1">
-                <a:solidFill>
-                  <a:srgbClr val="385E7D"/>
+              <a:rPr sz="1350" b="1">
+                <a:solidFill>
+                  <a:srgbClr val="0A6676"/>
                 </a:solidFill>
                 <a:latin typeface="Hiragino Sans GB" panose="020B0300000000000000" charset="-122"/>
                 <a:ea typeface="Hiragino Sans GB" panose="020B0300000000000000" charset="-122"/>
@@ -4521,7 +4721,7 @@
               </a:rPr>
               <a:t>阶段</a:t>
             </a:r>
-            <a:endParaRPr lang="zh-CN" sz="1350" b="1">
+            <a:endParaRPr sz="1350" b="1">
               <a:solidFill>
                 <a:srgbClr val="385E7D"/>
               </a:solidFill>
@@ -4549,7 +4749,7 @@
             <a:avLst/>
           </a:prstGeom>
           <a:solidFill>
-            <a:srgbClr val="EAF1F8"/>
+            <a:srgbClr val="DDEEF2"/>
           </a:solidFill>
           <a:ln w="9525">
             <a:solidFill>
@@ -4587,7 +4787,7 @@
             <a:defPPr>
               <a:defRPr sz="1350" b="1">
                 <a:solidFill>
-                  <a:srgbClr val="385E7D"/>
+                  <a:srgbClr val="0A6676"/>
                 </a:solidFill>
                 <a:latin typeface="Hiragino Sans GB" panose="020B0300000000000000" charset="-122"/>
                 <a:ea typeface="Hiragino Sans GB" panose="020B0300000000000000" charset="-122"/>
@@ -4597,6 +4797,7 @@
           </a:lstStyle>
           <a:p>
             <a:pPr>
+              <a:buNone/>
               <a:defRPr sz="1350" b="1">
                 <a:solidFill>
                   <a:srgbClr val="385E7D"/>
@@ -4609,7 +4810,7 @@
             <a:r>
               <a:rPr sz="1350" b="1">
                 <a:solidFill>
-                  <a:srgbClr val="385E7D"/>
+                  <a:srgbClr val="0A6676"/>
                 </a:solidFill>
                 <a:latin typeface="Hiragino Sans GB" panose="020B0300000000000000" charset="-122"/>
                 <a:ea typeface="Hiragino Sans GB" panose="020B0300000000000000" charset="-122"/>
@@ -4645,7 +4846,7 @@
             <a:avLst/>
           </a:prstGeom>
           <a:solidFill>
-            <a:srgbClr val="EAF1F8"/>
+            <a:srgbClr val="DDEEF2"/>
           </a:solidFill>
           <a:ln w="9525">
             <a:solidFill>
@@ -4683,7 +4884,7 @@
             <a:defPPr>
               <a:defRPr sz="1350" b="1">
                 <a:solidFill>
-                  <a:srgbClr val="385E7D"/>
+                  <a:srgbClr val="0A6676"/>
                 </a:solidFill>
                 <a:latin typeface="Hiragino Sans GB" panose="020B0300000000000000" charset="-122"/>
                 <a:ea typeface="Hiragino Sans GB" panose="020B0300000000000000" charset="-122"/>
@@ -4693,6 +4894,7 @@
           </a:lstStyle>
           <a:p>
             <a:pPr>
+              <a:buNone/>
               <a:defRPr sz="1350" b="1">
                 <a:solidFill>
                   <a:srgbClr val="385E7D"/>
@@ -4705,7 +4907,7 @@
             <a:r>
               <a:rPr sz="1350" b="1">
                 <a:solidFill>
-                  <a:srgbClr val="385E7D"/>
+                  <a:srgbClr val="0A6676"/>
                 </a:solidFill>
                 <a:latin typeface="Hiragino Sans GB" panose="020B0300000000000000" charset="-122"/>
                 <a:ea typeface="Hiragino Sans GB" panose="020B0300000000000000" charset="-122"/>
@@ -4745,7 +4947,7 @@
           </a:solidFill>
           <a:ln w="9525">
             <a:solidFill>
-              <a:srgbClr val="C9D9E5"/>
+              <a:srgbClr val="BBD1DD"/>
             </a:solidFill>
             <a:prstDash val="solid"/>
           </a:ln>
@@ -4779,7 +4981,7 @@
             <a:defPPr>
               <a:defRPr sz="1350" b="1">
                 <a:solidFill>
-                  <a:srgbClr val="24364B"/>
+                  <a:srgbClr val="1F364D"/>
                 </a:solidFill>
                 <a:latin typeface="Hiragino Sans GB" panose="020B0300000000000000" charset="-122"/>
                 <a:ea typeface="Hiragino Sans GB" panose="020B0300000000000000" charset="-122"/>
@@ -4789,6 +4991,7 @@
           </a:lstStyle>
           <a:p>
             <a:pPr>
+              <a:buNone/>
               <a:defRPr sz="1350" b="1">
                 <a:solidFill>
                   <a:srgbClr val="24364B"/>
@@ -4799,17 +5002,17 @@
               </a:defRPr>
             </a:pPr>
             <a:r>
-              <a:rPr lang="zh-CN" sz="1350" b="1">
-                <a:solidFill>
-                  <a:srgbClr val="24364B"/>
+              <a:rPr sz="1350" b="1">
+                <a:solidFill>
+                  <a:srgbClr val="1F364D"/>
                 </a:solidFill>
                 <a:latin typeface="Hiragino Sans GB" panose="020B0300000000000000" charset="-122"/>
                 <a:ea typeface="Hiragino Sans GB" panose="020B0300000000000000" charset="-122"/>
                 <a:cs typeface="Hiragino Sans GB" panose="020B0300000000000000" charset="-122"/>
               </a:rPr>
-              <a:t>第一阶段</a:t>
+              <a:t>10 月 9—12 日</a:t>
             </a:r>
-            <a:endParaRPr lang="zh-CN" sz="1350" b="1">
+            <a:endParaRPr sz="1350" b="1">
               <a:solidFill>
                 <a:srgbClr val="24364B"/>
               </a:solidFill>
@@ -4841,7 +5044,7 @@
           </a:solidFill>
           <a:ln w="9525">
             <a:solidFill>
-              <a:srgbClr val="C9D9E5"/>
+              <a:srgbClr val="BBD1DD"/>
             </a:solidFill>
             <a:prstDash val="solid"/>
           </a:ln>
@@ -4875,7 +5078,7 @@
             <a:defPPr>
               <a:defRPr sz="1350" b="0">
                 <a:solidFill>
-                  <a:srgbClr val="24364B"/>
+                  <a:srgbClr val="1F364D"/>
                 </a:solidFill>
                 <a:latin typeface="Hiragino Sans GB" panose="020B0300000000000000" charset="-122"/>
                 <a:ea typeface="Hiragino Sans GB" panose="020B0300000000000000" charset="-122"/>
@@ -4885,6 +5088,7 @@
           </a:lstStyle>
           <a:p>
             <a:pPr>
+              <a:buNone/>
               <a:defRPr sz="1350" b="0">
                 <a:solidFill>
                   <a:srgbClr val="24364B"/>
@@ -4897,13 +5101,13 @@
             <a:r>
               <a:rPr sz="1350" b="0">
                 <a:solidFill>
-                  <a:srgbClr val="24364B"/>
+                  <a:srgbClr val="1F364D"/>
                 </a:solidFill>
                 <a:latin typeface="Hiragino Sans GB" panose="020B0300000000000000" charset="-122"/>
                 <a:ea typeface="Hiragino Sans GB" panose="020B0300000000000000" charset="-122"/>
                 <a:cs typeface="Hiragino Sans GB" panose="020B0300000000000000" charset="-122"/>
               </a:rPr>
-              <a:t>问卷、知网任务走查、七渠道竞品比较与存量抽样</a:t>
+              <a:t>问卷、知网及官网任务走查、竞品比较和存量抽样</a:t>
             </a:r>
             <a:endParaRPr sz="1350" b="0">
               <a:solidFill>
@@ -4937,7 +5141,7 @@
           </a:solidFill>
           <a:ln w="9525">
             <a:solidFill>
-              <a:srgbClr val="C9D9E5"/>
+              <a:srgbClr val="BBD1DD"/>
             </a:solidFill>
             <a:prstDash val="solid"/>
           </a:ln>
@@ -4971,7 +5175,7 @@
             <a:defPPr>
               <a:defRPr sz="1350" b="0">
                 <a:solidFill>
-                  <a:srgbClr val="24364B"/>
+                  <a:srgbClr val="1F364D"/>
                 </a:solidFill>
                 <a:latin typeface="Hiragino Sans GB" panose="020B0300000000000000" charset="-122"/>
                 <a:ea typeface="Hiragino Sans GB" panose="020B0300000000000000" charset="-122"/>
@@ -4981,6 +5185,7 @@
           </a:lstStyle>
           <a:p>
             <a:pPr>
+              <a:buNone/>
               <a:defRPr sz="1350" b="0">
                 <a:solidFill>
                   <a:srgbClr val="24364B"/>
@@ -4993,13 +5198,13 @@
             <a:r>
               <a:rPr sz="1350" b="0">
                 <a:solidFill>
-                  <a:srgbClr val="24364B"/>
+                  <a:srgbClr val="1F364D"/>
                 </a:solidFill>
                 <a:latin typeface="Hiragino Sans GB" panose="020B0300000000000000" charset="-122"/>
                 <a:ea typeface="Hiragino Sans GB" panose="020B0300000000000000" charset="-122"/>
                 <a:cs typeface="Hiragino Sans GB" panose="020B0300000000000000" charset="-122"/>
               </a:rPr>
-              <a:t>答卷、条件、截图、导出与矩阵</a:t>
+              <a:t>答卷、查询条件、截图、导出文件及矩阵</a:t>
             </a:r>
             <a:endParaRPr sz="1350" b="0">
               <a:solidFill>
@@ -5033,7 +5238,7 @@
           </a:solidFill>
           <a:ln w="9525">
             <a:solidFill>
-              <a:srgbClr val="C9D9E5"/>
+              <a:srgbClr val="BBD1DD"/>
             </a:solidFill>
             <a:prstDash val="solid"/>
           </a:ln>
@@ -5067,7 +5272,7 @@
             <a:defPPr>
               <a:defRPr sz="1350" b="1">
                 <a:solidFill>
-                  <a:srgbClr val="24364B"/>
+                  <a:srgbClr val="1F364D"/>
                 </a:solidFill>
                 <a:latin typeface="Hiragino Sans GB" panose="020B0300000000000000" charset="-122"/>
                 <a:ea typeface="Hiragino Sans GB" panose="020B0300000000000000" charset="-122"/>
@@ -5077,6 +5282,7 @@
           </a:lstStyle>
           <a:p>
             <a:pPr>
+              <a:buNone/>
               <a:defRPr sz="1350" b="1">
                 <a:solidFill>
                   <a:srgbClr val="24364B"/>
@@ -5087,17 +5293,17 @@
               </a:defRPr>
             </a:pPr>
             <a:r>
-              <a:rPr lang="zh-CN" sz="1350" b="1">
-                <a:solidFill>
-                  <a:srgbClr val="24364B"/>
+              <a:rPr sz="1350" b="1">
+                <a:solidFill>
+                  <a:srgbClr val="1F364D"/>
                 </a:solidFill>
                 <a:latin typeface="Hiragino Sans GB" panose="020B0300000000000000" charset="-122"/>
                 <a:ea typeface="Hiragino Sans GB" panose="020B0300000000000000" charset="-122"/>
                 <a:cs typeface="Hiragino Sans GB" panose="020B0300000000000000" charset="-122"/>
               </a:rPr>
-              <a:t>第二阶段</a:t>
+              <a:t>10 月 13 日</a:t>
             </a:r>
-            <a:endParaRPr lang="zh-CN" sz="1350" b="1">
+            <a:endParaRPr sz="1350" b="1">
               <a:solidFill>
                 <a:srgbClr val="24364B"/>
               </a:solidFill>
@@ -5129,7 +5335,7 @@
           </a:solidFill>
           <a:ln w="9525">
             <a:solidFill>
-              <a:srgbClr val="C9D9E5"/>
+              <a:srgbClr val="BBD1DD"/>
             </a:solidFill>
             <a:prstDash val="solid"/>
           </a:ln>
@@ -5163,7 +5369,7 @@
             <a:defPPr>
               <a:defRPr sz="1350" b="0">
                 <a:solidFill>
-                  <a:srgbClr val="24364B"/>
+                  <a:srgbClr val="1F364D"/>
                 </a:solidFill>
                 <a:latin typeface="Hiragino Sans GB" panose="020B0300000000000000" charset="-122"/>
                 <a:ea typeface="Hiragino Sans GB" panose="020B0300000000000000" charset="-122"/>
@@ -5173,6 +5379,7 @@
           </a:lstStyle>
           <a:p>
             <a:pPr>
+              <a:buNone/>
               <a:defRPr sz="1350" b="0">
                 <a:solidFill>
                   <a:srgbClr val="24364B"/>
@@ -5185,13 +5392,13 @@
             <a:r>
               <a:rPr sz="1350" b="0">
                 <a:solidFill>
-                  <a:srgbClr val="24364B"/>
+                  <a:srgbClr val="1F364D"/>
                 </a:solidFill>
                 <a:latin typeface="Hiragino Sans GB" panose="020B0300000000000000" charset="-122"/>
                 <a:ea typeface="Hiragino Sans GB" panose="020B0300000000000000" charset="-122"/>
                 <a:cs typeface="Hiragino Sans GB" panose="020B0300000000000000" charset="-122"/>
               </a:rPr>
-              <a:t>开放接口、专利／项目／获奖样本、领域试标与许可核对</a:t>
+              <a:t>开放接口、跨类型样本、领域试标和逐源许可核对</a:t>
             </a:r>
             <a:endParaRPr sz="1350" b="0">
               <a:solidFill>
@@ -5225,7 +5432,7 @@
           </a:solidFill>
           <a:ln w="9525">
             <a:solidFill>
-              <a:srgbClr val="C9D9E5"/>
+              <a:srgbClr val="BBD1DD"/>
             </a:solidFill>
             <a:prstDash val="solid"/>
           </a:ln>
@@ -5259,7 +5466,7 @@
             <a:defPPr>
               <a:defRPr sz="1350" b="0">
                 <a:solidFill>
-                  <a:srgbClr val="24364B"/>
+                  <a:srgbClr val="1F364D"/>
                 </a:solidFill>
                 <a:latin typeface="Hiragino Sans GB" panose="020B0300000000000000" charset="-122"/>
                 <a:ea typeface="Hiragino Sans GB" panose="020B0300000000000000" charset="-122"/>
@@ -5269,6 +5476,7 @@
           </a:lstStyle>
           <a:p>
             <a:pPr>
+              <a:buNone/>
               <a:defRPr sz="1350" b="0">
                 <a:solidFill>
                   <a:srgbClr val="24364B"/>
@@ -5281,13 +5489,13 @@
             <a:r>
               <a:rPr sz="1350" b="0">
                 <a:solidFill>
-                  <a:srgbClr val="24364B"/>
+                  <a:srgbClr val="1F364D"/>
                 </a:solidFill>
                 <a:latin typeface="Hiragino Sans GB" panose="020B0300000000000000" charset="-122"/>
                 <a:ea typeface="Hiragino Sans GB" panose="020B0300000000000000" charset="-122"/>
                 <a:cs typeface="Hiragino Sans GB" panose="020B0300000000000000" charset="-122"/>
               </a:rPr>
-              <a:t>请求响应、来源链接、字段缺口表</a:t>
+              <a:t>接口响应、来源链接、字段缺口与许可记录</a:t>
             </a:r>
             <a:endParaRPr sz="1350" b="0">
               <a:solidFill>
@@ -5352,9 +5560,9 @@
           <a:bodyPr anchor="ctr"/>
           <a:lstStyle>
             <a:defPPr>
-              <a:defRPr sz="2475" b="1">
-                <a:solidFill>
-                  <a:srgbClr val="24364B"/>
+              <a:defRPr sz="2700" b="1">
+                <a:solidFill>
+                  <a:srgbClr val="102A43"/>
                 </a:solidFill>
                 <a:latin typeface="Hiragino Sans GB" panose="020B0300000000000000" charset="-122"/>
                 <a:ea typeface="Hiragino Sans GB" panose="020B0300000000000000" charset="-122"/>
@@ -5364,6 +5572,7 @@
           </a:lstStyle>
           <a:p>
             <a:pPr>
+              <a:buNone/>
               <a:defRPr sz="2475" b="1">
                 <a:solidFill>
                   <a:srgbClr val="24364B"/>
@@ -5374,15 +5583,15 @@
               </a:defRPr>
             </a:pPr>
             <a:r>
-              <a:rPr sz="2475" b="1">
-                <a:solidFill>
-                  <a:srgbClr val="24364B"/>
+              <a:rPr sz="2700" b="1">
+                <a:solidFill>
+                  <a:srgbClr val="102A43"/>
                 </a:solidFill>
                 <a:latin typeface="Hiragino Sans GB" panose="020B0300000000000000" charset="-122"/>
                 <a:ea typeface="Hiragino Sans GB" panose="020B0300000000000000" charset="-122"/>
                 <a:cs typeface="Hiragino Sans GB" panose="020B0300000000000000" charset="-122"/>
               </a:rPr>
-              <a:t>执行证据：两组样本</a:t>
+              <a:t>证据地图：两组材料回答不同问题</a:t>
             </a:r>
             <a:endParaRPr sz="2475" b="1">
               <a:solidFill>
@@ -5406,13 +5615,13 @@
         <p:spPr>
           <a:xfrm>
             <a:off x="590550" y="1057275"/>
-            <a:ext cx="11010900" cy="19050"/>
+            <a:ext cx="11010900" cy="38100"/>
           </a:xfrm>
           <a:prstGeom prst="rect">
             <a:avLst/>
           </a:prstGeom>
           <a:solidFill>
-            <a:srgbClr val="C9D9E5"/>
+            <a:srgbClr val="087E8B"/>
           </a:solidFill>
           <a:ln w="0">
             <a:noFill/>
@@ -5448,7 +5657,7 @@
             <a:defPPr>
               <a:defRPr sz="1050" b="0">
                 <a:solidFill>
-                  <a:srgbClr val="5D7183"/>
+                  <a:srgbClr val="62788B"/>
                 </a:solidFill>
                 <a:latin typeface="Hiragino Sans GB" panose="020B0300000000000000" charset="-122"/>
                 <a:ea typeface="Hiragino Sans GB" panose="020B0300000000000000" charset="-122"/>
@@ -5458,6 +5667,7 @@
           </a:lstStyle>
           <a:p>
             <a:pPr>
+              <a:buNone/>
               <a:defRPr sz="1050" b="0">
                 <a:solidFill>
                   <a:srgbClr val="5D7183"/>
@@ -5470,7 +5680,7 @@
             <a:r>
               <a:rPr sz="1050" b="0">
                 <a:solidFill>
-                  <a:srgbClr val="5D7183"/>
+                  <a:srgbClr val="62788B"/>
                 </a:solidFill>
                 <a:latin typeface="Hiragino Sans GB" panose="020B0300000000000000" charset="-122"/>
                 <a:ea typeface="Hiragino Sans GB" panose="020B0300000000000000" charset="-122"/>
@@ -5517,7 +5727,7 @@
             <a:defPPr>
               <a:defRPr sz="975" b="0">
                 <a:solidFill>
-                  <a:srgbClr val="5D7183"/>
+                  <a:srgbClr val="62788B"/>
                 </a:solidFill>
                 <a:latin typeface="Hiragino Sans GB" panose="020B0300000000000000" charset="-122"/>
                 <a:ea typeface="Hiragino Sans GB" panose="020B0300000000000000" charset="-122"/>
@@ -5527,6 +5737,7 @@
           </a:lstStyle>
           <a:p>
             <a:pPr>
+              <a:buNone/>
               <a:defRPr sz="975" b="0">
                 <a:solidFill>
                   <a:srgbClr val="5D7183"/>
@@ -5539,7 +5750,7 @@
             <a:r>
               <a:rPr sz="975" b="0">
                 <a:solidFill>
-                  <a:srgbClr val="5D7183"/>
+                  <a:srgbClr val="62788B"/>
                 </a:solidFill>
                 <a:latin typeface="Hiragino Sans GB" panose="020B0300000000000000" charset="-122"/>
                 <a:ea typeface="Hiragino Sans GB" panose="020B0300000000000000" charset="-122"/>
@@ -5579,7 +5790,7 @@
           </a:solidFill>
           <a:ln w="9525">
             <a:solidFill>
-              <a:srgbClr val="C9D9E5"/>
+              <a:srgbClr val="BBD1DD"/>
             </a:solidFill>
             <a:prstDash val="solid"/>
           </a:ln>
@@ -5602,7 +5813,7 @@
             <a:avLst/>
           </a:prstGeom>
           <a:solidFill>
-            <a:srgbClr val="385E7D"/>
+            <a:srgbClr val="087E8B"/>
           </a:solidFill>
           <a:ln w="0">
             <a:noFill/>
@@ -5636,9 +5847,9 @@
           <a:bodyPr anchor="ctr"/>
           <a:lstStyle>
             <a:defPPr>
-              <a:defRPr sz="1725" b="1">
-                <a:solidFill>
-                  <a:srgbClr val="385E7D"/>
+              <a:defRPr sz="1800" b="1">
+                <a:solidFill>
+                  <a:srgbClr val="0A6676"/>
                 </a:solidFill>
                 <a:latin typeface="Hiragino Sans GB" panose="020B0300000000000000" charset="-122"/>
                 <a:ea typeface="Hiragino Sans GB" panose="020B0300000000000000" charset="-122"/>
@@ -5648,6 +5859,7 @@
           </a:lstStyle>
           <a:p>
             <a:pPr>
+              <a:buNone/>
               <a:defRPr sz="1725" b="1">
                 <a:solidFill>
                   <a:srgbClr val="385E7D"/>
@@ -5658,15 +5870,15 @@
               </a:defRPr>
             </a:pPr>
             <a:r>
-              <a:rPr sz="1725" b="1">
-                <a:solidFill>
-                  <a:srgbClr val="385E7D"/>
+              <a:rPr sz="1800" b="1">
+                <a:solidFill>
+                  <a:srgbClr val="0A6676"/>
                 </a:solidFill>
                 <a:latin typeface="Hiragino Sans GB" panose="020B0300000000000000" charset="-122"/>
                 <a:ea typeface="Hiragino Sans GB" panose="020B0300000000000000" charset="-122"/>
                 <a:cs typeface="Hiragino Sans GB" panose="020B0300000000000000" charset="-122"/>
               </a:rPr>
-              <a:t>A 组：北航软件学院渠道</a:t>
+              <a:t>A 组：北航案例与一手走查</a:t>
             </a:r>
             <a:endParaRPr sz="1725" b="1">
               <a:solidFill>
@@ -5707,7 +5919,7 @@
             <a:defPPr>
               <a:defRPr sz="1500" b="0">
                 <a:solidFill>
-                  <a:srgbClr val="24364B"/>
+                  <a:srgbClr val="1F364D"/>
                 </a:solidFill>
                 <a:latin typeface="Hiragino Sans GB" panose="020B0300000000000000" charset="-122"/>
                 <a:ea typeface="Hiragino Sans GB" panose="020B0300000000000000" charset="-122"/>
@@ -5717,6 +5929,7 @@
           </a:lstStyle>
           <a:p>
             <a:pPr>
+              <a:buNone/>
               <a:defRPr sz="1500" b="0">
                 <a:solidFill>
                   <a:srgbClr val="24364B"/>
@@ -5729,13 +5942,13 @@
             <a:r>
               <a:rPr sz="1500" b="0">
                 <a:solidFill>
-                  <a:srgbClr val="24364B"/>
+                  <a:srgbClr val="1F364D"/>
                 </a:solidFill>
                 <a:latin typeface="Hiragino Sans GB" panose="020B0300000000000000" charset="-122"/>
                 <a:ea typeface="Hiragino Sans GB" panose="020B0300000000000000" charset="-122"/>
                 <a:cs typeface="Hiragino Sans GB" panose="020B0300000000000000" charset="-122"/>
               </a:rPr>
-              <a:t>20份学生问卷；知网、学院官网和课题组走查。</a:t>
+              <a:t>20 份学生问卷，知网、学院官网和课题组的任务走查。</a:t>
             </a:r>
             <a:endParaRPr sz="1500" b="0">
               <a:solidFill>
@@ -5751,6 +5964,7 @@
           </a:p>
           <a:p>
             <a:pPr>
+              <a:buNone/>
               <a:defRPr sz="1500" b="0">
                 <a:solidFill>
                   <a:srgbClr val="24364B"/>
@@ -5763,13 +5977,13 @@
             <a:r>
               <a:rPr sz="1500" b="0">
                 <a:solidFill>
-                  <a:srgbClr val="24364B"/>
+                  <a:srgbClr val="1F364D"/>
                 </a:solidFill>
                 <a:latin typeface="Hiragino Sans GB" panose="020B0300000000000000" charset="-122"/>
                 <a:ea typeface="Hiragino Sans GB" panose="020B0300000000000000" charset="-122"/>
                 <a:cs typeface="Hiragino Sans GB" panose="020B0300000000000000" charset="-122"/>
               </a:rPr>
-              <a:t>核对5篇已知论文、3件专利、3项项目与3项获奖的公开来源。</a:t>
+              <a:t>已知样本：5 篇论文、3 件专利、3 项项目、3 项获奖。</a:t>
             </a:r>
             <a:endParaRPr sz="1500" b="0">
               <a:solidFill>
@@ -5785,6 +5999,7 @@
           </a:p>
           <a:p>
             <a:pPr>
+              <a:buNone/>
               <a:defRPr sz="1500" b="0">
                 <a:solidFill>
                   <a:srgbClr val="24364B"/>
@@ -5797,13 +6012,13 @@
             <a:r>
               <a:rPr sz="1500" b="0">
                 <a:solidFill>
-                  <a:srgbClr val="24364B"/>
+                  <a:srgbClr val="1F364D"/>
                 </a:solidFill>
                 <a:latin typeface="Hiragino Sans GB" panose="020B0300000000000000" charset="-122"/>
                 <a:ea typeface="Hiragino Sans GB" panose="020B0300000000000000" charset="-122"/>
                 <a:cs typeface="Hiragino Sans GB" panose="020B0300000000000000" charset="-122"/>
               </a:rPr>
-              <a:t>保存检索条件、访问结果、原值与失败状态。</a:t>
+              <a:t>保存查询条件、页面反馈、来源原值与失败状态。</a:t>
             </a:r>
             <a:endParaRPr sz="1500" b="0">
               <a:solidFill>
@@ -5837,7 +6052,7 @@
           </a:solidFill>
           <a:ln w="9525">
             <a:solidFill>
-              <a:srgbClr val="C9D9E5"/>
+              <a:srgbClr val="BBD1DD"/>
             </a:solidFill>
             <a:prstDash val="solid"/>
           </a:ln>
@@ -5860,7 +6075,7 @@
             <a:avLst/>
           </a:prstGeom>
           <a:solidFill>
-            <a:srgbClr val="385E7D"/>
+            <a:srgbClr val="087E8B"/>
           </a:solidFill>
           <a:ln w="0">
             <a:noFill/>
@@ -5894,9 +6109,9 @@
           <a:bodyPr anchor="ctr"/>
           <a:lstStyle>
             <a:defPPr>
-              <a:defRPr sz="1725" b="1">
-                <a:solidFill>
-                  <a:srgbClr val="385E7D"/>
+              <a:defRPr sz="1800" b="1">
+                <a:solidFill>
+                  <a:srgbClr val="0A6676"/>
                 </a:solidFill>
                 <a:latin typeface="Hiragino Sans GB" panose="020B0300000000000000" charset="-122"/>
                 <a:ea typeface="Hiragino Sans GB" panose="020B0300000000000000" charset="-122"/>
@@ -5906,6 +6121,7 @@
           </a:lstStyle>
           <a:p>
             <a:pPr>
+              <a:buNone/>
               <a:defRPr sz="1725" b="1">
                 <a:solidFill>
                   <a:srgbClr val="385E7D"/>
@@ -5916,15 +6132,15 @@
               </a:defRPr>
             </a:pPr>
             <a:r>
-              <a:rPr sz="1725" b="1">
-                <a:solidFill>
-                  <a:srgbClr val="385E7D"/>
+              <a:rPr sz="1800" b="1">
+                <a:solidFill>
+                  <a:srgbClr val="0A6676"/>
                 </a:solidFill>
                 <a:latin typeface="Hiragino Sans GB" panose="020B0300000000000000" charset="-122"/>
                 <a:ea typeface="Hiragino Sans GB" panose="020B0300000000000000" charset="-122"/>
                 <a:cs typeface="Hiragino Sans GB" panose="020B0300000000000000" charset="-122"/>
               </a:rPr>
-              <a:t>B 组：竞品与浙大机构抽样</a:t>
+              <a:t>B 组：渠道比较与字段抽样</a:t>
             </a:r>
             <a:endParaRPr sz="1725" b="1">
               <a:solidFill>
@@ -5965,7 +6181,7 @@
             <a:defPPr>
               <a:defRPr sz="1500" b="0">
                 <a:solidFill>
-                  <a:srgbClr val="24364B"/>
+                  <a:srgbClr val="1F364D"/>
                 </a:solidFill>
                 <a:latin typeface="Hiragino Sans GB" panose="020B0300000000000000" charset="-122"/>
                 <a:ea typeface="Hiragino Sans GB" panose="020B0300000000000000" charset="-122"/>
@@ -5975,6 +6191,7 @@
           </a:lstStyle>
           <a:p>
             <a:pPr>
+              <a:buNone/>
               <a:defRPr sz="1500" b="0">
                 <a:solidFill>
                   <a:srgbClr val="24364B"/>
@@ -5987,13 +6204,13 @@
             <a:r>
               <a:rPr sz="1500" b="0">
                 <a:solidFill>
-                  <a:srgbClr val="24364B"/>
+                  <a:srgbClr val="1F364D"/>
                 </a:solidFill>
                 <a:latin typeface="Hiragino Sans GB" panose="020B0300000000000000" charset="-122"/>
                 <a:ea typeface="Hiragino Sans GB" panose="020B0300000000000000" charset="-122"/>
                 <a:cs typeface="Hiragino Sans GB" panose="020B0300000000000000" charset="-122"/>
               </a:rPr>
-              <a:t>七渠道竞品矩阵。</a:t>
+              <a:t>比较 7 个渠道的公开能力和未知边界。</a:t>
             </a:r>
             <a:endParaRPr sz="1500" b="0">
               <a:solidFill>
@@ -6009,6 +6226,7 @@
           </a:p>
           <a:p>
             <a:pPr>
+              <a:buNone/>
               <a:defRPr sz="1500" b="0">
                 <a:solidFill>
                   <a:srgbClr val="24364B"/>
@@ -6021,13 +6239,13 @@
             <a:r>
               <a:rPr sz="1500" b="0">
                 <a:solidFill>
-                  <a:srgbClr val="24364B"/>
+                  <a:srgbClr val="1F364D"/>
                 </a:solidFill>
                 <a:latin typeface="Hiragino Sans GB" panose="020B0300000000000000" charset="-122"/>
                 <a:ea typeface="Hiragino Sans GB" panose="020B0300000000000000" charset="-122"/>
                 <a:cs typeface="Hiragino Sans GB" panose="020B0300000000000000" charset="-122"/>
               </a:rPr>
-              <a:t>知网以浙大计算机学院为样本：2021至2025年检得456条，抽样20条查字段完整度。</a:t>
+              <a:t>浙大计算机学院指定知网查询返回 456 条，从中抽 20 条核对页面字段。</a:t>
             </a:r>
             <a:endParaRPr sz="1500" b="0">
               <a:solidFill>
@@ -6043,6 +6261,7 @@
           </a:p>
           <a:p>
             <a:pPr>
+              <a:buNone/>
               <a:defRPr sz="1500" b="0">
                 <a:solidFill>
                   <a:srgbClr val="24364B"/>
@@ -6055,13 +6274,13 @@
             <a:r>
               <a:rPr sz="1500" b="0">
                 <a:solidFill>
-                  <a:srgbClr val="24364B"/>
+                  <a:srgbClr val="1F364D"/>
                 </a:solidFill>
                 <a:latin typeface="Hiragino Sans GB" panose="020B0300000000000000" charset="-122"/>
                 <a:ea typeface="Hiragino Sans GB" panose="020B0300000000000000" charset="-122"/>
                 <a:cs typeface="Hiragino Sans GB" panose="020B0300000000000000" charset="-122"/>
               </a:rPr>
-              <a:t>教师／管理员诉求仅作角色推演。</a:t>
+              <a:t>教师和管理员诉求仅为角色推演。</a:t>
             </a:r>
             <a:endParaRPr sz="1500" b="0">
               <a:solidFill>
@@ -6091,7 +6310,7 @@
             <a:avLst/>
           </a:prstGeom>
           <a:solidFill>
-            <a:srgbClr val="EAF1F8"/>
+            <a:srgbClr val="DDEEF2"/>
           </a:solidFill>
           <a:ln w="0">
             <a:noFill/>
@@ -6127,7 +6346,7 @@
             <a:defPPr>
               <a:defRPr sz="1350" b="0">
                 <a:solidFill>
-                  <a:srgbClr val="24364B"/>
+                  <a:srgbClr val="1F364D"/>
                 </a:solidFill>
                 <a:latin typeface="Hiragino Sans GB" panose="020B0300000000000000" charset="-122"/>
                 <a:ea typeface="Hiragino Sans GB" panose="020B0300000000000000" charset="-122"/>
@@ -6137,6 +6356,7 @@
           </a:lstStyle>
           <a:p>
             <a:pPr>
+              <a:buNone/>
               <a:defRPr sz="1350" b="0">
                 <a:solidFill>
                   <a:srgbClr val="24364B"/>
@@ -6149,13 +6369,13 @@
             <a:r>
               <a:rPr sz="1350" b="0">
                 <a:solidFill>
-                  <a:srgbClr val="24364B"/>
+                  <a:srgbClr val="1F364D"/>
                 </a:solidFill>
                 <a:latin typeface="Hiragino Sans GB" panose="020B0300000000000000" charset="-122"/>
                 <a:ea typeface="Hiragino Sans GB" panose="020B0300000000000000" charset="-122"/>
                 <a:cs typeface="Hiragino Sans GB" panose="020B0300000000000000" charset="-122"/>
               </a:rPr>
-              <a:t>北航公开样本与浙大知网存量抽样回答不同问题，统计数字分别引用，不相加为同一学院成果。</a:t>
+              <a:t>北航任务走查与浙大字段抽样的对象、方法不同；数字分别解释，不合并为一份机构成果清单。</a:t>
             </a:r>
             <a:endParaRPr sz="1350" b="0">
               <a:solidFill>
@@ -6220,9 +6440,9 @@
           <a:bodyPr anchor="ctr"/>
           <a:lstStyle>
             <a:defPPr>
-              <a:defRPr sz="2475" b="1">
-                <a:solidFill>
-                  <a:srgbClr val="24364B"/>
+              <a:defRPr sz="2700" b="1">
+                <a:solidFill>
+                  <a:srgbClr val="102A43"/>
                 </a:solidFill>
                 <a:latin typeface="Hiragino Sans GB" panose="020B0300000000000000" charset="-122"/>
                 <a:ea typeface="Hiragino Sans GB" panose="020B0300000000000000" charset="-122"/>
@@ -6232,6 +6452,7 @@
           </a:lstStyle>
           <a:p>
             <a:pPr>
+              <a:buNone/>
               <a:defRPr sz="2475" b="1">
                 <a:solidFill>
                   <a:srgbClr val="24364B"/>
@@ -6242,15 +6463,26 @@
               </a:defRPr>
             </a:pPr>
             <a:r>
-              <a:rPr sz="2475" b="1">
-                <a:solidFill>
-                  <a:srgbClr val="24364B"/>
+              <a:rPr lang="zh-CN" sz="2700" b="1">
+                <a:solidFill>
+                  <a:srgbClr val="102A43"/>
                 </a:solidFill>
                 <a:latin typeface="Hiragino Sans GB" panose="020B0300000000000000" charset="-122"/>
                 <a:ea typeface="Hiragino Sans GB" panose="020B0300000000000000" charset="-122"/>
                 <a:cs typeface="Hiragino Sans GB" panose="020B0300000000000000" charset="-122"/>
               </a:rPr>
-              <a:t>问卷与任务走查揭示检索问题</a:t>
+              <a:t>问卷结果与</a:t>
+            </a:r>
+            <a:r>
+              <a:rPr sz="2700" b="1">
+                <a:solidFill>
+                  <a:srgbClr val="102A43"/>
+                </a:solidFill>
+                <a:latin typeface="Hiragino Sans GB" panose="020B0300000000000000" charset="-122"/>
+                <a:ea typeface="Hiragino Sans GB" panose="020B0300000000000000" charset="-122"/>
+                <a:cs typeface="Hiragino Sans GB" panose="020B0300000000000000" charset="-122"/>
+              </a:rPr>
+              <a:t>同一论文在不同渠道得到不同反馈</a:t>
             </a:r>
             <a:endParaRPr sz="2475" b="1">
               <a:solidFill>
@@ -6274,13 +6506,13 @@
         <p:spPr>
           <a:xfrm>
             <a:off x="590550" y="1057275"/>
-            <a:ext cx="11010900" cy="19050"/>
+            <a:ext cx="11010900" cy="38100"/>
           </a:xfrm>
           <a:prstGeom prst="rect">
             <a:avLst/>
           </a:prstGeom>
           <a:solidFill>
-            <a:srgbClr val="C9D9E5"/>
+            <a:srgbClr val="087E8B"/>
           </a:solidFill>
           <a:ln w="0">
             <a:noFill/>
@@ -6316,7 +6548,7 @@
             <a:defPPr>
               <a:defRPr sz="1050" b="0">
                 <a:solidFill>
-                  <a:srgbClr val="5D7183"/>
+                  <a:srgbClr val="62788B"/>
                 </a:solidFill>
                 <a:latin typeface="Hiragino Sans GB" panose="020B0300000000000000" charset="-122"/>
                 <a:ea typeface="Hiragino Sans GB" panose="020B0300000000000000" charset="-122"/>
@@ -6326,6 +6558,7 @@
           </a:lstStyle>
           <a:p>
             <a:pPr>
+              <a:buNone/>
               <a:defRPr sz="1050" b="0">
                 <a:solidFill>
                   <a:srgbClr val="5D7183"/>
@@ -6338,7 +6571,7 @@
             <a:r>
               <a:rPr sz="1050" b="0">
                 <a:solidFill>
-                  <a:srgbClr val="5D7183"/>
+                  <a:srgbClr val="62788B"/>
                 </a:solidFill>
                 <a:latin typeface="Hiragino Sans GB" panose="020B0300000000000000" charset="-122"/>
                 <a:ea typeface="Hiragino Sans GB" panose="020B0300000000000000" charset="-122"/>
@@ -6385,7 +6618,7 @@
             <a:defPPr>
               <a:defRPr sz="975" b="0">
                 <a:solidFill>
-                  <a:srgbClr val="5D7183"/>
+                  <a:srgbClr val="62788B"/>
                 </a:solidFill>
                 <a:latin typeface="Hiragino Sans GB" panose="020B0300000000000000" charset="-122"/>
                 <a:ea typeface="Hiragino Sans GB" panose="020B0300000000000000" charset="-122"/>
@@ -6395,6 +6628,7 @@
           </a:lstStyle>
           <a:p>
             <a:pPr>
+              <a:buNone/>
               <a:defRPr sz="975" b="0">
                 <a:solidFill>
                   <a:srgbClr val="5D7183"/>
@@ -6407,7 +6641,7 @@
             <a:r>
               <a:rPr sz="975" b="0">
                 <a:solidFill>
-                  <a:srgbClr val="5D7183"/>
+                  <a:srgbClr val="62788B"/>
                 </a:solidFill>
                 <a:latin typeface="Hiragino Sans GB" panose="020B0300000000000000" charset="-122"/>
                 <a:ea typeface="Hiragino Sans GB" panose="020B0300000000000000" charset="-122"/>
@@ -6471,7 +6705,7 @@
           </a:solidFill>
           <a:ln w="9525">
             <a:solidFill>
-              <a:srgbClr val="C9D9E5"/>
+              <a:srgbClr val="BBD1DD"/>
             </a:solidFill>
             <a:prstDash val="solid"/>
           </a:ln>
@@ -6494,7 +6728,7 @@
             <a:avLst/>
           </a:prstGeom>
           <a:solidFill>
-            <a:srgbClr val="385E7D"/>
+            <a:srgbClr val="087E8B"/>
           </a:solidFill>
           <a:ln w="0">
             <a:noFill/>
@@ -6528,9 +6762,9 @@
           <a:bodyPr anchor="ctr"/>
           <a:lstStyle>
             <a:defPPr>
-              <a:defRPr sz="1725" b="1">
-                <a:solidFill>
-                  <a:srgbClr val="385E7D"/>
+              <a:defRPr sz="1800" b="1">
+                <a:solidFill>
+                  <a:srgbClr val="0A6676"/>
                 </a:solidFill>
                 <a:latin typeface="Hiragino Sans GB" panose="020B0300000000000000" charset="-122"/>
                 <a:ea typeface="Hiragino Sans GB" panose="020B0300000000000000" charset="-122"/>
@@ -6540,6 +6774,7 @@
           </a:lstStyle>
           <a:p>
             <a:pPr>
+              <a:buNone/>
               <a:defRPr sz="1725" b="1">
                 <a:solidFill>
                   <a:srgbClr val="385E7D"/>
@@ -6550,9 +6785,9 @@
               </a:defRPr>
             </a:pPr>
             <a:r>
-              <a:rPr sz="1725" b="1">
-                <a:solidFill>
-                  <a:srgbClr val="385E7D"/>
+              <a:rPr sz="1800" b="1">
+                <a:solidFill>
+                  <a:srgbClr val="0A6676"/>
                 </a:solidFill>
                 <a:latin typeface="Hiragino Sans GB" panose="020B0300000000000000" charset="-122"/>
                 <a:ea typeface="Hiragino Sans GB" panose="020B0300000000000000" charset="-122"/>
@@ -6599,7 +6834,7 @@
             <a:defPPr>
               <a:defRPr sz="1425" b="0">
                 <a:solidFill>
-                  <a:srgbClr val="24364B"/>
+                  <a:srgbClr val="1F364D"/>
                 </a:solidFill>
                 <a:latin typeface="Hiragino Sans GB" panose="020B0300000000000000" charset="-122"/>
                 <a:ea typeface="Hiragino Sans GB" panose="020B0300000000000000" charset="-122"/>
@@ -6609,6 +6844,7 @@
           </a:lstStyle>
           <a:p>
             <a:pPr>
+              <a:buNone/>
               <a:defRPr sz="1425" b="0">
                 <a:solidFill>
                   <a:srgbClr val="24364B"/>
@@ -6621,13 +6857,13 @@
             <a:r>
               <a:rPr sz="1425" b="0">
                 <a:solidFill>
-                  <a:srgbClr val="24364B"/>
+                  <a:srgbClr val="1F364D"/>
                 </a:solidFill>
                 <a:latin typeface="Hiragino Sans GB" panose="020B0300000000000000" charset="-122"/>
                 <a:ea typeface="Hiragino Sans GB" panose="020B0300000000000000" charset="-122"/>
                 <a:cs typeface="Hiragino Sans GB" panose="020B0300000000000000" charset="-122"/>
               </a:rPr>
-              <a:t>文献检索与下载重要性均值4.10分。样本以本科生为主，只能反映本轮普通用户偏好。</a:t>
+              <a:t>20 份答卷中 18 人为本科生；检索与下载的重要性均值为 4.10/5。仅作学生侧探索。</a:t>
             </a:r>
             <a:endParaRPr sz="1425" b="0">
               <a:solidFill>
@@ -6661,7 +6897,7 @@
           </a:solidFill>
           <a:ln w="9525">
             <a:solidFill>
-              <a:srgbClr val="C9D9E5"/>
+              <a:srgbClr val="BBD1DD"/>
             </a:solidFill>
             <a:prstDash val="solid"/>
           </a:ln>
@@ -6684,7 +6920,7 @@
             <a:avLst/>
           </a:prstGeom>
           <a:solidFill>
-            <a:srgbClr val="385E7D"/>
+            <a:srgbClr val="087E8B"/>
           </a:solidFill>
           <a:ln w="0">
             <a:noFill/>
@@ -6718,9 +6954,9 @@
           <a:bodyPr anchor="ctr"/>
           <a:lstStyle>
             <a:defPPr>
-              <a:defRPr sz="1725" b="1">
-                <a:solidFill>
-                  <a:srgbClr val="385E7D"/>
+              <a:defRPr sz="1800" b="1">
+                <a:solidFill>
+                  <a:srgbClr val="0A6676"/>
                 </a:solidFill>
                 <a:latin typeface="Hiragino Sans GB" panose="020B0300000000000000" charset="-122"/>
                 <a:ea typeface="Hiragino Sans GB" panose="020B0300000000000000" charset="-122"/>
@@ -6730,6 +6966,7 @@
           </a:lstStyle>
           <a:p>
             <a:pPr>
+              <a:buNone/>
               <a:defRPr sz="1725" b="1">
                 <a:solidFill>
                   <a:srgbClr val="385E7D"/>
@@ -6740,9 +6977,9 @@
               </a:defRPr>
             </a:pPr>
             <a:r>
-              <a:rPr sz="1725" b="1">
-                <a:solidFill>
-                  <a:srgbClr val="385E7D"/>
+              <a:rPr sz="1800" b="1">
+                <a:solidFill>
+                  <a:srgbClr val="0A6676"/>
                 </a:solidFill>
                 <a:latin typeface="Hiragino Sans GB" panose="020B0300000000000000" charset="-122"/>
                 <a:ea typeface="Hiragino Sans GB" panose="020B0300000000000000" charset="-122"/>
@@ -6789,7 +7026,7 @@
             <a:defPPr>
               <a:defRPr sz="1425" b="0">
                 <a:solidFill>
-                  <a:srgbClr val="24364B"/>
+                  <a:srgbClr val="1F364D"/>
                 </a:solidFill>
                 <a:latin typeface="Hiragino Sans GB" panose="020B0300000000000000" charset="-122"/>
                 <a:ea typeface="Hiragino Sans GB" panose="020B0300000000000000" charset="-122"/>
@@ -6799,6 +7036,7 @@
           </a:lstStyle>
           <a:p>
             <a:pPr>
+              <a:buNone/>
               <a:defRPr sz="1425" b="0">
                 <a:solidFill>
                   <a:srgbClr val="24364B"/>
@@ -6811,13 +7049,13 @@
             <a:r>
               <a:rPr sz="1425" b="0">
                 <a:solidFill>
-                  <a:srgbClr val="24364B"/>
+                  <a:srgbClr val="1F364D"/>
                 </a:solidFill>
                 <a:latin typeface="Hiragino Sans GB" panose="020B0300000000000000" charset="-122"/>
                 <a:ea typeface="Hiragino Sans GB" panose="020B0300000000000000" charset="-122"/>
                 <a:cs typeface="Hiragino Sans GB" panose="020B0300000000000000" charset="-122"/>
               </a:rPr>
-              <a:t>SANER论文可从官网和课题组核对题名、作者及获奖报道；知网指定查询多次报错。错误不能写成“该库零收录”。</a:t>
+              <a:t>学院官网与课题组可核对 SANER 论文和获奖线索；知网指定查询反复报错。记录为查询失败，不能推断零收录。</a:t>
             </a:r>
             <a:endParaRPr sz="1425" b="0">
               <a:solidFill>
@@ -6882,9 +7120,9 @@
           <a:bodyPr anchor="ctr"/>
           <a:lstStyle>
             <a:defPPr>
-              <a:defRPr sz="2475" b="1">
-                <a:solidFill>
-                  <a:srgbClr val="24364B"/>
+              <a:defRPr sz="2700" b="1">
+                <a:solidFill>
+                  <a:srgbClr val="102A43"/>
                 </a:solidFill>
                 <a:latin typeface="Hiragino Sans GB" panose="020B0300000000000000" charset="-122"/>
                 <a:ea typeface="Hiragino Sans GB" panose="020B0300000000000000" charset="-122"/>
@@ -6894,6 +7132,7 @@
           </a:lstStyle>
           <a:p>
             <a:pPr>
+              <a:buNone/>
               <a:defRPr sz="2475" b="1">
                 <a:solidFill>
                   <a:srgbClr val="24364B"/>
@@ -6904,15 +7143,15 @@
               </a:defRPr>
             </a:pPr>
             <a:r>
-              <a:rPr sz="2475" b="1">
-                <a:solidFill>
-                  <a:srgbClr val="24364B"/>
+              <a:rPr sz="2700" b="1">
+                <a:solidFill>
+                  <a:srgbClr val="102A43"/>
                 </a:solidFill>
                 <a:latin typeface="Hiragino Sans GB" panose="020B0300000000000000" charset="-122"/>
                 <a:ea typeface="Hiragino Sans GB" panose="020B0300000000000000" charset="-122"/>
                 <a:cs typeface="Hiragino Sans GB" panose="020B0300000000000000" charset="-122"/>
               </a:rPr>
-              <a:t>查询状态要保留失败原因</a:t>
+              <a:t>检索结果必须区分五种状态</a:t>
             </a:r>
             <a:endParaRPr sz="2475" b="1">
               <a:solidFill>
@@ -6936,13 +7175,13 @@
         <p:spPr>
           <a:xfrm>
             <a:off x="590550" y="1057275"/>
-            <a:ext cx="11010900" cy="19050"/>
+            <a:ext cx="11010900" cy="38100"/>
           </a:xfrm>
           <a:prstGeom prst="rect">
             <a:avLst/>
           </a:prstGeom>
           <a:solidFill>
-            <a:srgbClr val="C9D9E5"/>
+            <a:srgbClr val="087E8B"/>
           </a:solidFill>
           <a:ln w="0">
             <a:noFill/>
@@ -6978,7 +7217,7 @@
             <a:defPPr>
               <a:defRPr sz="1050" b="0">
                 <a:solidFill>
-                  <a:srgbClr val="5D7183"/>
+                  <a:srgbClr val="62788B"/>
                 </a:solidFill>
                 <a:latin typeface="Hiragino Sans GB" panose="020B0300000000000000" charset="-122"/>
                 <a:ea typeface="Hiragino Sans GB" panose="020B0300000000000000" charset="-122"/>
@@ -6988,6 +7227,7 @@
           </a:lstStyle>
           <a:p>
             <a:pPr>
+              <a:buNone/>
               <a:defRPr sz="1050" b="0">
                 <a:solidFill>
                   <a:srgbClr val="5D7183"/>
@@ -7000,7 +7240,7 @@
             <a:r>
               <a:rPr sz="1050" b="0">
                 <a:solidFill>
-                  <a:srgbClr val="5D7183"/>
+                  <a:srgbClr val="62788B"/>
                 </a:solidFill>
                 <a:latin typeface="Hiragino Sans GB" panose="020B0300000000000000" charset="-122"/>
                 <a:ea typeface="Hiragino Sans GB" panose="020B0300000000000000" charset="-122"/>
@@ -7047,7 +7287,7 @@
             <a:defPPr>
               <a:defRPr sz="975" b="0">
                 <a:solidFill>
-                  <a:srgbClr val="5D7183"/>
+                  <a:srgbClr val="62788B"/>
                 </a:solidFill>
                 <a:latin typeface="Hiragino Sans GB" panose="020B0300000000000000" charset="-122"/>
                 <a:ea typeface="Hiragino Sans GB" panose="020B0300000000000000" charset="-122"/>
@@ -7057,6 +7297,7 @@
           </a:lstStyle>
           <a:p>
             <a:pPr>
+              <a:buNone/>
               <a:defRPr sz="975" b="0">
                 <a:solidFill>
                   <a:srgbClr val="5D7183"/>
@@ -7069,7 +7310,7 @@
             <a:r>
               <a:rPr sz="975" b="0">
                 <a:solidFill>
-                  <a:srgbClr val="5D7183"/>
+                  <a:srgbClr val="62788B"/>
                 </a:solidFill>
                 <a:latin typeface="Hiragino Sans GB" panose="020B0300000000000000" charset="-122"/>
                 <a:ea typeface="Hiragino Sans GB" panose="020B0300000000000000" charset="-122"/>
@@ -7105,7 +7346,7 @@
             <a:avLst/>
           </a:prstGeom>
           <a:solidFill>
-            <a:srgbClr val="EAF1F8"/>
+            <a:srgbClr val="DDEEF2"/>
           </a:solidFill>
           <a:ln w="9525">
             <a:solidFill>
@@ -7143,7 +7384,7 @@
             <a:defPPr>
               <a:defRPr sz="1350" b="1">
                 <a:solidFill>
-                  <a:srgbClr val="385E7D"/>
+                  <a:srgbClr val="0A6676"/>
                 </a:solidFill>
                 <a:latin typeface="Hiragino Sans GB" panose="020B0300000000000000" charset="-122"/>
                 <a:ea typeface="Hiragino Sans GB" panose="020B0300000000000000" charset="-122"/>
@@ -7153,6 +7394,7 @@
           </a:lstStyle>
           <a:p>
             <a:pPr>
+              <a:buNone/>
               <a:defRPr sz="1350" b="1">
                 <a:solidFill>
                   <a:srgbClr val="385E7D"/>
@@ -7165,7 +7407,7 @@
             <a:r>
               <a:rPr sz="1350" b="1">
                 <a:solidFill>
-                  <a:srgbClr val="385E7D"/>
+                  <a:srgbClr val="0A6676"/>
                 </a:solidFill>
                 <a:latin typeface="Hiragino Sans GB" panose="020B0300000000000000" charset="-122"/>
                 <a:ea typeface="Hiragino Sans GB" panose="020B0300000000000000" charset="-122"/>
@@ -7201,7 +7443,7 @@
             <a:avLst/>
           </a:prstGeom>
           <a:solidFill>
-            <a:srgbClr val="EAF1F8"/>
+            <a:srgbClr val="DDEEF2"/>
           </a:solidFill>
           <a:ln w="9525">
             <a:solidFill>
@@ -7239,7 +7481,7 @@
             <a:defPPr>
               <a:defRPr sz="1350" b="1">
                 <a:solidFill>
-                  <a:srgbClr val="385E7D"/>
+                  <a:srgbClr val="0A6676"/>
                 </a:solidFill>
                 <a:latin typeface="Hiragino Sans GB" panose="020B0300000000000000" charset="-122"/>
                 <a:ea typeface="Hiragino Sans GB" panose="020B0300000000000000" charset="-122"/>
@@ -7249,6 +7491,7 @@
           </a:lstStyle>
           <a:p>
             <a:pPr>
+              <a:buNone/>
               <a:defRPr sz="1350" b="1">
                 <a:solidFill>
                   <a:srgbClr val="385E7D"/>
@@ -7261,7 +7504,7 @@
             <a:r>
               <a:rPr sz="1350" b="1">
                 <a:solidFill>
-                  <a:srgbClr val="385E7D"/>
+                  <a:srgbClr val="0A6676"/>
                 </a:solidFill>
                 <a:latin typeface="Hiragino Sans GB" panose="020B0300000000000000" charset="-122"/>
                 <a:ea typeface="Hiragino Sans GB" panose="020B0300000000000000" charset="-122"/>
@@ -7297,7 +7540,7 @@
             <a:avLst/>
           </a:prstGeom>
           <a:solidFill>
-            <a:srgbClr val="EAF1F8"/>
+            <a:srgbClr val="DDEEF2"/>
           </a:solidFill>
           <a:ln w="9525">
             <a:solidFill>
@@ -7335,7 +7578,7 @@
             <a:defPPr>
               <a:defRPr sz="1350" b="1">
                 <a:solidFill>
-                  <a:srgbClr val="385E7D"/>
+                  <a:srgbClr val="0A6676"/>
                 </a:solidFill>
                 <a:latin typeface="Hiragino Sans GB" panose="020B0300000000000000" charset="-122"/>
                 <a:ea typeface="Hiragino Sans GB" panose="020B0300000000000000" charset="-122"/>
@@ -7345,6 +7588,7 @@
           </a:lstStyle>
           <a:p>
             <a:pPr>
+              <a:buNone/>
               <a:defRPr sz="1350" b="1">
                 <a:solidFill>
                   <a:srgbClr val="385E7D"/>
@@ -7357,7 +7601,7 @@
             <a:r>
               <a:rPr sz="1350" b="1">
                 <a:solidFill>
-                  <a:srgbClr val="385E7D"/>
+                  <a:srgbClr val="0A6676"/>
                 </a:solidFill>
                 <a:latin typeface="Hiragino Sans GB" panose="020B0300000000000000" charset="-122"/>
                 <a:ea typeface="Hiragino Sans GB" panose="020B0300000000000000" charset="-122"/>
@@ -7397,7 +7641,7 @@
           </a:solidFill>
           <a:ln w="9525">
             <a:solidFill>
-              <a:srgbClr val="C9D9E5"/>
+              <a:srgbClr val="BBD1DD"/>
             </a:solidFill>
             <a:prstDash val="solid"/>
           </a:ln>
@@ -7431,7 +7675,7 @@
             <a:defPPr>
               <a:defRPr sz="1350" b="1">
                 <a:solidFill>
-                  <a:srgbClr val="24364B"/>
+                  <a:srgbClr val="1F364D"/>
                 </a:solidFill>
                 <a:latin typeface="Hiragino Sans GB" panose="020B0300000000000000" charset="-122"/>
                 <a:ea typeface="Hiragino Sans GB" panose="020B0300000000000000" charset="-122"/>
@@ -7441,6 +7685,7 @@
           </a:lstStyle>
           <a:p>
             <a:pPr>
+              <a:buNone/>
               <a:defRPr sz="1350" b="1">
                 <a:solidFill>
                   <a:srgbClr val="24364B"/>
@@ -7453,7 +7698,7 @@
             <a:r>
               <a:rPr sz="1350" b="1">
                 <a:solidFill>
-                  <a:srgbClr val="24364B"/>
+                  <a:srgbClr val="1F364D"/>
                 </a:solidFill>
                 <a:latin typeface="Hiragino Sans GB" panose="020B0300000000000000" charset="-122"/>
                 <a:ea typeface="Hiragino Sans GB" panose="020B0300000000000000" charset="-122"/>
@@ -7493,7 +7738,7 @@
           </a:solidFill>
           <a:ln w="9525">
             <a:solidFill>
-              <a:srgbClr val="C9D9E5"/>
+              <a:srgbClr val="BBD1DD"/>
             </a:solidFill>
             <a:prstDash val="solid"/>
           </a:ln>
@@ -7527,7 +7772,7 @@
             <a:defPPr>
               <a:defRPr sz="1350" b="0">
                 <a:solidFill>
-                  <a:srgbClr val="24364B"/>
+                  <a:srgbClr val="1F364D"/>
                 </a:solidFill>
                 <a:latin typeface="Hiragino Sans GB" panose="020B0300000000000000" charset="-122"/>
                 <a:ea typeface="Hiragino Sans GB" panose="020B0300000000000000" charset="-122"/>
@@ -7537,6 +7782,7 @@
           </a:lstStyle>
           <a:p>
             <a:pPr>
+              <a:buNone/>
               <a:defRPr sz="1350" b="0">
                 <a:solidFill>
                   <a:srgbClr val="24364B"/>
@@ -7549,7 +7795,7 @@
             <a:r>
               <a:rPr sz="1350" b="0">
                 <a:solidFill>
-                  <a:srgbClr val="24364B"/>
+                  <a:srgbClr val="1F364D"/>
                 </a:solidFill>
                 <a:latin typeface="Hiragino Sans GB" panose="020B0300000000000000" charset="-122"/>
                 <a:ea typeface="Hiragino Sans GB" panose="020B0300000000000000" charset="-122"/>
@@ -7589,7 +7835,7 @@
           </a:solidFill>
           <a:ln w="9525">
             <a:solidFill>
-              <a:srgbClr val="C9D9E5"/>
+              <a:srgbClr val="BBD1DD"/>
             </a:solidFill>
             <a:prstDash val="solid"/>
           </a:ln>
@@ -7623,7 +7869,7 @@
             <a:defPPr>
               <a:defRPr sz="1350" b="0">
                 <a:solidFill>
-                  <a:srgbClr val="24364B"/>
+                  <a:srgbClr val="1F364D"/>
                 </a:solidFill>
                 <a:latin typeface="Hiragino Sans GB" panose="020B0300000000000000" charset="-122"/>
                 <a:ea typeface="Hiragino Sans GB" panose="020B0300000000000000" charset="-122"/>
@@ -7633,6 +7879,7 @@
           </a:lstStyle>
           <a:p>
             <a:pPr>
+              <a:buNone/>
               <a:defRPr sz="1350" b="0">
                 <a:solidFill>
                   <a:srgbClr val="24364B"/>
@@ -7645,7 +7892,7 @@
             <a:r>
               <a:rPr sz="1350" b="0">
                 <a:solidFill>
-                  <a:srgbClr val="24364B"/>
+                  <a:srgbClr val="1F364D"/>
                 </a:solidFill>
                 <a:latin typeface="Hiragino Sans GB" panose="020B0300000000000000" charset="-122"/>
                 <a:ea typeface="Hiragino Sans GB" panose="020B0300000000000000" charset="-122"/>
@@ -7685,7 +7932,7 @@
           </a:solidFill>
           <a:ln w="9525">
             <a:solidFill>
-              <a:srgbClr val="C9D9E5"/>
+              <a:srgbClr val="BBD1DD"/>
             </a:solidFill>
             <a:prstDash val="solid"/>
           </a:ln>
@@ -7719,7 +7966,7 @@
             <a:defPPr>
               <a:defRPr sz="1350" b="1">
                 <a:solidFill>
-                  <a:srgbClr val="24364B"/>
+                  <a:srgbClr val="1F364D"/>
                 </a:solidFill>
                 <a:latin typeface="Hiragino Sans GB" panose="020B0300000000000000" charset="-122"/>
                 <a:ea typeface="Hiragino Sans GB" panose="020B0300000000000000" charset="-122"/>
@@ -7729,6 +7976,7 @@
           </a:lstStyle>
           <a:p>
             <a:pPr>
+              <a:buNone/>
               <a:defRPr sz="1350" b="1">
                 <a:solidFill>
                   <a:srgbClr val="24364B"/>
@@ -7741,7 +7989,7 @@
             <a:r>
               <a:rPr sz="1350" b="1">
                 <a:solidFill>
-                  <a:srgbClr val="24364B"/>
+                  <a:srgbClr val="1F364D"/>
                 </a:solidFill>
                 <a:latin typeface="Hiragino Sans GB" panose="020B0300000000000000" charset="-122"/>
                 <a:ea typeface="Hiragino Sans GB" panose="020B0300000000000000" charset="-122"/>
@@ -7781,7 +8029,7 @@
           </a:solidFill>
           <a:ln w="9525">
             <a:solidFill>
-              <a:srgbClr val="C9D9E5"/>
+              <a:srgbClr val="BBD1DD"/>
             </a:solidFill>
             <a:prstDash val="solid"/>
           </a:ln>
@@ -7815,7 +8063,7 @@
             <a:defPPr>
               <a:defRPr sz="1350" b="0">
                 <a:solidFill>
-                  <a:srgbClr val="24364B"/>
+                  <a:srgbClr val="1F364D"/>
                 </a:solidFill>
                 <a:latin typeface="Hiragino Sans GB" panose="020B0300000000000000" charset="-122"/>
                 <a:ea typeface="Hiragino Sans GB" panose="020B0300000000000000" charset="-122"/>
@@ -7825,6 +8073,7 @@
           </a:lstStyle>
           <a:p>
             <a:pPr>
+              <a:buNone/>
               <a:defRPr sz="1350" b="0">
                 <a:solidFill>
                   <a:srgbClr val="24364B"/>
@@ -7837,7 +8086,7 @@
             <a:r>
               <a:rPr sz="1350" b="0">
                 <a:solidFill>
-                  <a:srgbClr val="24364B"/>
+                  <a:srgbClr val="1F364D"/>
                 </a:solidFill>
                 <a:latin typeface="Hiragino Sans GB" panose="020B0300000000000000" charset="-122"/>
                 <a:ea typeface="Hiragino Sans GB" panose="020B0300000000000000" charset="-122"/>
@@ -7877,7 +8126,7 @@
           </a:solidFill>
           <a:ln w="9525">
             <a:solidFill>
-              <a:srgbClr val="C9D9E5"/>
+              <a:srgbClr val="BBD1DD"/>
             </a:solidFill>
             <a:prstDash val="solid"/>
           </a:ln>
@@ -7911,7 +8160,7 @@
             <a:defPPr>
               <a:defRPr sz="1350" b="0">
                 <a:solidFill>
-                  <a:srgbClr val="24364B"/>
+                  <a:srgbClr val="1F364D"/>
                 </a:solidFill>
                 <a:latin typeface="Hiragino Sans GB" panose="020B0300000000000000" charset="-122"/>
                 <a:ea typeface="Hiragino Sans GB" panose="020B0300000000000000" charset="-122"/>
@@ -7921,6 +8170,7 @@
           </a:lstStyle>
           <a:p>
             <a:pPr>
+              <a:buNone/>
               <a:defRPr sz="1350" b="0">
                 <a:solidFill>
                   <a:srgbClr val="24364B"/>
@@ -7933,7 +8183,7 @@
             <a:r>
               <a:rPr sz="1350" b="0">
                 <a:solidFill>
-                  <a:srgbClr val="24364B"/>
+                  <a:srgbClr val="1F364D"/>
                 </a:solidFill>
                 <a:latin typeface="Hiragino Sans GB" panose="020B0300000000000000" charset="-122"/>
                 <a:ea typeface="Hiragino Sans GB" panose="020B0300000000000000" charset="-122"/>
@@ -7973,7 +8223,7 @@
           </a:solidFill>
           <a:ln w="9525">
             <a:solidFill>
-              <a:srgbClr val="C9D9E5"/>
+              <a:srgbClr val="BBD1DD"/>
             </a:solidFill>
             <a:prstDash val="solid"/>
           </a:ln>
@@ -8007,7 +8257,7 @@
             <a:defPPr>
               <a:defRPr sz="1350" b="1">
                 <a:solidFill>
-                  <a:srgbClr val="24364B"/>
+                  <a:srgbClr val="1F364D"/>
                 </a:solidFill>
                 <a:latin typeface="Hiragino Sans GB" panose="020B0300000000000000" charset="-122"/>
                 <a:ea typeface="Hiragino Sans GB" panose="020B0300000000000000" charset="-122"/>
@@ -8017,6 +8267,7 @@
           </a:lstStyle>
           <a:p>
             <a:pPr>
+              <a:buNone/>
               <a:defRPr sz="1350" b="1">
                 <a:solidFill>
                   <a:srgbClr val="24364B"/>
@@ -8029,7 +8280,7 @@
             <a:r>
               <a:rPr sz="1350" b="1">
                 <a:solidFill>
-                  <a:srgbClr val="24364B"/>
+                  <a:srgbClr val="1F364D"/>
                 </a:solidFill>
                 <a:latin typeface="Hiragino Sans GB" panose="020B0300000000000000" charset="-122"/>
                 <a:ea typeface="Hiragino Sans GB" panose="020B0300000000000000" charset="-122"/>
@@ -8069,7 +8320,7 @@
           </a:solidFill>
           <a:ln w="9525">
             <a:solidFill>
-              <a:srgbClr val="C9D9E5"/>
+              <a:srgbClr val="BBD1DD"/>
             </a:solidFill>
             <a:prstDash val="solid"/>
           </a:ln>
@@ -8103,7 +8354,7 @@
             <a:defPPr>
               <a:defRPr sz="1350" b="0">
                 <a:solidFill>
-                  <a:srgbClr val="24364B"/>
+                  <a:srgbClr val="1F364D"/>
                 </a:solidFill>
                 <a:latin typeface="Hiragino Sans GB" panose="020B0300000000000000" charset="-122"/>
                 <a:ea typeface="Hiragino Sans GB" panose="020B0300000000000000" charset="-122"/>
@@ -8113,6 +8364,7 @@
           </a:lstStyle>
           <a:p>
             <a:pPr>
+              <a:buNone/>
               <a:defRPr sz="1350" b="0">
                 <a:solidFill>
                   <a:srgbClr val="24364B"/>
@@ -8125,7 +8377,7 @@
             <a:r>
               <a:rPr sz="1350" b="0">
                 <a:solidFill>
-                  <a:srgbClr val="24364B"/>
+                  <a:srgbClr val="1F364D"/>
                 </a:solidFill>
                 <a:latin typeface="Hiragino Sans GB" panose="020B0300000000000000" charset="-122"/>
                 <a:ea typeface="Hiragino Sans GB" panose="020B0300000000000000" charset="-122"/>
@@ -8165,7 +8417,7 @@
           </a:solidFill>
           <a:ln w="9525">
             <a:solidFill>
-              <a:srgbClr val="C9D9E5"/>
+              <a:srgbClr val="BBD1DD"/>
             </a:solidFill>
             <a:prstDash val="solid"/>
           </a:ln>
@@ -8199,7 +8451,7 @@
             <a:defPPr>
               <a:defRPr sz="1350" b="0">
                 <a:solidFill>
-                  <a:srgbClr val="24364B"/>
+                  <a:srgbClr val="1F364D"/>
                 </a:solidFill>
                 <a:latin typeface="Hiragino Sans GB" panose="020B0300000000000000" charset="-122"/>
                 <a:ea typeface="Hiragino Sans GB" panose="020B0300000000000000" charset="-122"/>
@@ -8209,6 +8461,7 @@
           </a:lstStyle>
           <a:p>
             <a:pPr>
+              <a:buNone/>
               <a:defRPr sz="1350" b="0">
                 <a:solidFill>
                   <a:srgbClr val="24364B"/>
@@ -8221,7 +8474,7 @@
             <a:r>
               <a:rPr sz="1350" b="0">
                 <a:solidFill>
-                  <a:srgbClr val="24364B"/>
+                  <a:srgbClr val="1F364D"/>
                 </a:solidFill>
                 <a:latin typeface="Hiragino Sans GB" panose="020B0300000000000000" charset="-122"/>
                 <a:ea typeface="Hiragino Sans GB" panose="020B0300000000000000" charset="-122"/>
@@ -8261,7 +8514,7 @@
           </a:solidFill>
           <a:ln w="9525">
             <a:solidFill>
-              <a:srgbClr val="C9D9E5"/>
+              <a:srgbClr val="BBD1DD"/>
             </a:solidFill>
             <a:prstDash val="solid"/>
           </a:ln>
@@ -8295,7 +8548,7 @@
             <a:defPPr>
               <a:defRPr sz="1350" b="1">
                 <a:solidFill>
-                  <a:srgbClr val="24364B"/>
+                  <a:srgbClr val="1F364D"/>
                 </a:solidFill>
                 <a:latin typeface="Hiragino Sans GB" panose="020B0300000000000000" charset="-122"/>
                 <a:ea typeface="Hiragino Sans GB" panose="020B0300000000000000" charset="-122"/>
@@ -8305,6 +8558,7 @@
           </a:lstStyle>
           <a:p>
             <a:pPr>
+              <a:buNone/>
               <a:defRPr sz="1350" b="1">
                 <a:solidFill>
                   <a:srgbClr val="24364B"/>
@@ -8317,7 +8571,7 @@
             <a:r>
               <a:rPr sz="1350" b="1">
                 <a:solidFill>
-                  <a:srgbClr val="24364B"/>
+                  <a:srgbClr val="1F364D"/>
                 </a:solidFill>
                 <a:latin typeface="Hiragino Sans GB" panose="020B0300000000000000" charset="-122"/>
                 <a:ea typeface="Hiragino Sans GB" panose="020B0300000000000000" charset="-122"/>
@@ -8357,7 +8611,7 @@
           </a:solidFill>
           <a:ln w="9525">
             <a:solidFill>
-              <a:srgbClr val="C9D9E5"/>
+              <a:srgbClr val="BBD1DD"/>
             </a:solidFill>
             <a:prstDash val="solid"/>
           </a:ln>
@@ -8391,7 +8645,7 @@
             <a:defPPr>
               <a:defRPr sz="1350" b="0">
                 <a:solidFill>
-                  <a:srgbClr val="24364B"/>
+                  <a:srgbClr val="1F364D"/>
                 </a:solidFill>
                 <a:latin typeface="Hiragino Sans GB" panose="020B0300000000000000" charset="-122"/>
                 <a:ea typeface="Hiragino Sans GB" panose="020B0300000000000000" charset="-122"/>
@@ -8401,6 +8655,7 @@
           </a:lstStyle>
           <a:p>
             <a:pPr>
+              <a:buNone/>
               <a:defRPr sz="1350" b="0">
                 <a:solidFill>
                   <a:srgbClr val="24364B"/>
@@ -8413,7 +8668,7 @@
             <a:r>
               <a:rPr sz="1350" b="0">
                 <a:solidFill>
-                  <a:srgbClr val="24364B"/>
+                  <a:srgbClr val="1F364D"/>
                 </a:solidFill>
                 <a:latin typeface="Hiragino Sans GB" panose="020B0300000000000000" charset="-122"/>
                 <a:ea typeface="Hiragino Sans GB" panose="020B0300000000000000" charset="-122"/>
@@ -8453,7 +8708,7 @@
           </a:solidFill>
           <a:ln w="9525">
             <a:solidFill>
-              <a:srgbClr val="C9D9E5"/>
+              <a:srgbClr val="BBD1DD"/>
             </a:solidFill>
             <a:prstDash val="solid"/>
           </a:ln>
@@ -8487,7 +8742,7 @@
             <a:defPPr>
               <a:defRPr sz="1350" b="0">
                 <a:solidFill>
-                  <a:srgbClr val="24364B"/>
+                  <a:srgbClr val="1F364D"/>
                 </a:solidFill>
                 <a:latin typeface="Hiragino Sans GB" panose="020B0300000000000000" charset="-122"/>
                 <a:ea typeface="Hiragino Sans GB" panose="020B0300000000000000" charset="-122"/>
@@ -8497,6 +8752,7 @@
           </a:lstStyle>
           <a:p>
             <a:pPr>
+              <a:buNone/>
               <a:defRPr sz="1350" b="0">
                 <a:solidFill>
                   <a:srgbClr val="24364B"/>
@@ -8509,7 +8765,7 @@
             <a:r>
               <a:rPr sz="1350" b="0">
                 <a:solidFill>
-                  <a:srgbClr val="24364B"/>
+                  <a:srgbClr val="1F364D"/>
                 </a:solidFill>
                 <a:latin typeface="Hiragino Sans GB" panose="020B0300000000000000" charset="-122"/>
                 <a:ea typeface="Hiragino Sans GB" panose="020B0300000000000000" charset="-122"/>
@@ -8549,7 +8805,7 @@
           </a:solidFill>
           <a:ln w="9525">
             <a:solidFill>
-              <a:srgbClr val="C9D9E5"/>
+              <a:srgbClr val="BBD1DD"/>
             </a:solidFill>
             <a:prstDash val="solid"/>
           </a:ln>
@@ -8583,7 +8839,7 @@
             <a:defPPr>
               <a:defRPr sz="1350" b="1">
                 <a:solidFill>
-                  <a:srgbClr val="24364B"/>
+                  <a:srgbClr val="1F364D"/>
                 </a:solidFill>
                 <a:latin typeface="Hiragino Sans GB" panose="020B0300000000000000" charset="-122"/>
                 <a:ea typeface="Hiragino Sans GB" panose="020B0300000000000000" charset="-122"/>
@@ -8593,6 +8849,7 @@
           </a:lstStyle>
           <a:p>
             <a:pPr>
+              <a:buNone/>
               <a:defRPr sz="1350" b="1">
                 <a:solidFill>
                   <a:srgbClr val="24364B"/>
@@ -8605,7 +8862,7 @@
             <a:r>
               <a:rPr sz="1350" b="1">
                 <a:solidFill>
-                  <a:srgbClr val="24364B"/>
+                  <a:srgbClr val="1F364D"/>
                 </a:solidFill>
                 <a:latin typeface="Hiragino Sans GB" panose="020B0300000000000000" charset="-122"/>
                 <a:ea typeface="Hiragino Sans GB" panose="020B0300000000000000" charset="-122"/>
@@ -8645,7 +8902,7 @@
           </a:solidFill>
           <a:ln w="9525">
             <a:solidFill>
-              <a:srgbClr val="C9D9E5"/>
+              <a:srgbClr val="BBD1DD"/>
             </a:solidFill>
             <a:prstDash val="solid"/>
           </a:ln>
@@ -8679,7 +8936,7 @@
             <a:defPPr>
               <a:defRPr sz="1350" b="0">
                 <a:solidFill>
-                  <a:srgbClr val="24364B"/>
+                  <a:srgbClr val="1F364D"/>
                 </a:solidFill>
                 <a:latin typeface="Hiragino Sans GB" panose="020B0300000000000000" charset="-122"/>
                 <a:ea typeface="Hiragino Sans GB" panose="020B0300000000000000" charset="-122"/>
@@ -8689,6 +8946,7 @@
           </a:lstStyle>
           <a:p>
             <a:pPr>
+              <a:buNone/>
               <a:defRPr sz="1350" b="0">
                 <a:solidFill>
                   <a:srgbClr val="24364B"/>
@@ -8701,7 +8959,7 @@
             <a:r>
               <a:rPr sz="1350" b="0">
                 <a:solidFill>
-                  <a:srgbClr val="24364B"/>
+                  <a:srgbClr val="1F364D"/>
                 </a:solidFill>
                 <a:latin typeface="Hiragino Sans GB" panose="020B0300000000000000" charset="-122"/>
                 <a:ea typeface="Hiragino Sans GB" panose="020B0300000000000000" charset="-122"/>
@@ -8741,7 +8999,7 @@
           </a:solidFill>
           <a:ln w="9525">
             <a:solidFill>
-              <a:srgbClr val="C9D9E5"/>
+              <a:srgbClr val="BBD1DD"/>
             </a:solidFill>
             <a:prstDash val="solid"/>
           </a:ln>
@@ -8775,7 +9033,7 @@
             <a:defPPr>
               <a:defRPr sz="1350" b="0">
                 <a:solidFill>
-                  <a:srgbClr val="24364B"/>
+                  <a:srgbClr val="1F364D"/>
                 </a:solidFill>
                 <a:latin typeface="Hiragino Sans GB" panose="020B0300000000000000" charset="-122"/>
                 <a:ea typeface="Hiragino Sans GB" panose="020B0300000000000000" charset="-122"/>
@@ -8785,6 +9043,7 @@
           </a:lstStyle>
           <a:p>
             <a:pPr>
+              <a:buNone/>
               <a:defRPr sz="1350" b="0">
                 <a:solidFill>
                   <a:srgbClr val="24364B"/>
@@ -8797,7 +9056,7 @@
             <a:r>
               <a:rPr sz="1350" b="0">
                 <a:solidFill>
-                  <a:srgbClr val="24364B"/>
+                  <a:srgbClr val="1F364D"/>
                 </a:solidFill>
                 <a:latin typeface="Hiragino Sans GB" panose="020B0300000000000000" charset="-122"/>
                 <a:ea typeface="Hiragino Sans GB" panose="020B0300000000000000" charset="-122"/>
@@ -8833,7 +9092,7 @@
             <a:avLst/>
           </a:prstGeom>
           <a:solidFill>
-            <a:srgbClr val="EAF1F8"/>
+            <a:srgbClr val="DDEEF2"/>
           </a:solidFill>
           <a:ln w="0">
             <a:noFill/>
@@ -8869,7 +9128,7 @@
             <a:defPPr>
               <a:defRPr sz="1350" b="0">
                 <a:solidFill>
-                  <a:srgbClr val="24364B"/>
+                  <a:srgbClr val="1F364D"/>
                 </a:solidFill>
                 <a:latin typeface="Hiragino Sans GB" panose="020B0300000000000000" charset="-122"/>
                 <a:ea typeface="Hiragino Sans GB" panose="020B0300000000000000" charset="-122"/>
@@ -8879,6 +9138,7 @@
           </a:lstStyle>
           <a:p>
             <a:pPr>
+              <a:buNone/>
               <a:defRPr sz="1350" b="0">
                 <a:solidFill>
                   <a:srgbClr val="24364B"/>
@@ -8891,13 +9151,13 @@
             <a:r>
               <a:rPr sz="1350" b="0">
                 <a:solidFill>
-                  <a:srgbClr val="24364B"/>
+                  <a:srgbClr val="1F364D"/>
                 </a:solidFill>
                 <a:latin typeface="Hiragino Sans GB" panose="020B0300000000000000" charset="-122"/>
                 <a:ea typeface="Hiragino Sans GB" panose="020B0300000000000000" charset="-122"/>
                 <a:cs typeface="Hiragino Sans GB" panose="020B0300000000000000" charset="-122"/>
               </a:rPr>
-              <a:t>本轮知网多次重试仍报错，记录为“查询失败”；失败与零结果分开，是 R04 的直接依据。</a:t>
+              <a:t>A2/A4 重试后仍见“请稍后重试”，因此 R04 要求把查询失败、明确零结果和未采集分别呈现。</a:t>
             </a:r>
             <a:endParaRPr sz="1350" b="0">
               <a:solidFill>
@@ -8962,9 +9222,9 @@
           <a:bodyPr anchor="ctr"/>
           <a:lstStyle>
             <a:defPPr>
-              <a:defRPr sz="2475" b="1">
-                <a:solidFill>
-                  <a:srgbClr val="24364B"/>
+              <a:defRPr sz="2700" b="1">
+                <a:solidFill>
+                  <a:srgbClr val="102A43"/>
                 </a:solidFill>
                 <a:latin typeface="Hiragino Sans GB" panose="020B0300000000000000" charset="-122"/>
                 <a:ea typeface="Hiragino Sans GB" panose="020B0300000000000000" charset="-122"/>
@@ -8974,6 +9234,7 @@
           </a:lstStyle>
           <a:p>
             <a:pPr>
+              <a:buNone/>
               <a:defRPr sz="2475" b="1">
                 <a:solidFill>
                   <a:srgbClr val="24364B"/>
@@ -8984,15 +9245,15 @@
               </a:defRPr>
             </a:pPr>
             <a:r>
-              <a:rPr sz="2475" b="1">
-                <a:solidFill>
-                  <a:srgbClr val="24364B"/>
+              <a:rPr sz="2700" b="1">
+                <a:solidFill>
+                  <a:srgbClr val="102A43"/>
                 </a:solidFill>
                 <a:latin typeface="Hiragino Sans GB" panose="020B0300000000000000" charset="-122"/>
                 <a:ea typeface="Hiragino Sans GB" panose="020B0300000000000000" charset="-122"/>
                 <a:cs typeface="Hiragino Sans GB" panose="020B0300000000000000" charset="-122"/>
               </a:rPr>
-              <a:t>五条论文验证开放题录可得性</a:t>
+              <a:t>开放论文源可取题录，也暴露版本问题</a:t>
             </a:r>
             <a:endParaRPr sz="2475" b="1">
               <a:solidFill>
@@ -9016,13 +9277,13 @@
         <p:spPr>
           <a:xfrm>
             <a:off x="590550" y="1057275"/>
-            <a:ext cx="11010900" cy="19050"/>
+            <a:ext cx="11010900" cy="38100"/>
           </a:xfrm>
           <a:prstGeom prst="rect">
             <a:avLst/>
           </a:prstGeom>
           <a:solidFill>
-            <a:srgbClr val="C9D9E5"/>
+            <a:srgbClr val="087E8B"/>
           </a:solidFill>
           <a:ln w="0">
             <a:noFill/>
@@ -9058,7 +9319,7 @@
             <a:defPPr>
               <a:defRPr sz="1050" b="0">
                 <a:solidFill>
-                  <a:srgbClr val="5D7183"/>
+                  <a:srgbClr val="62788B"/>
                 </a:solidFill>
                 <a:latin typeface="Hiragino Sans GB" panose="020B0300000000000000" charset="-122"/>
                 <a:ea typeface="Hiragino Sans GB" panose="020B0300000000000000" charset="-122"/>
@@ -9068,6 +9329,7 @@
           </a:lstStyle>
           <a:p>
             <a:pPr>
+              <a:buNone/>
               <a:defRPr sz="1050" b="0">
                 <a:solidFill>
                   <a:srgbClr val="5D7183"/>
@@ -9080,7 +9342,7 @@
             <a:r>
               <a:rPr sz="1050" b="0">
                 <a:solidFill>
-                  <a:srgbClr val="5D7183"/>
+                  <a:srgbClr val="62788B"/>
                 </a:solidFill>
                 <a:latin typeface="Hiragino Sans GB" panose="020B0300000000000000" charset="-122"/>
                 <a:ea typeface="Hiragino Sans GB" panose="020B0300000000000000" charset="-122"/>
@@ -9127,7 +9389,7 @@
             <a:defPPr>
               <a:defRPr sz="975" b="0">
                 <a:solidFill>
-                  <a:srgbClr val="5D7183"/>
+                  <a:srgbClr val="62788B"/>
                 </a:solidFill>
                 <a:latin typeface="Hiragino Sans GB" panose="020B0300000000000000" charset="-122"/>
                 <a:ea typeface="Hiragino Sans GB" panose="020B0300000000000000" charset="-122"/>
@@ -9137,6 +9399,7 @@
           </a:lstStyle>
           <a:p>
             <a:pPr>
+              <a:buNone/>
               <a:defRPr sz="975" b="0">
                 <a:solidFill>
                   <a:srgbClr val="5D7183"/>
@@ -9149,7 +9412,7 @@
             <a:r>
               <a:rPr sz="975" b="0">
                 <a:solidFill>
-                  <a:srgbClr val="5D7183"/>
+                  <a:srgbClr val="62788B"/>
                 </a:solidFill>
                 <a:latin typeface="Hiragino Sans GB" panose="020B0300000000000000" charset="-122"/>
                 <a:ea typeface="Hiragino Sans GB" panose="020B0300000000000000" charset="-122"/>
@@ -9189,7 +9452,7 @@
           </a:solidFill>
           <a:ln w="9525">
             <a:solidFill>
-              <a:srgbClr val="C9D9E5"/>
+              <a:srgbClr val="BBD1DD"/>
             </a:solidFill>
             <a:prstDash val="solid"/>
           </a:ln>
@@ -9212,7 +9475,7 @@
             <a:avLst/>
           </a:prstGeom>
           <a:solidFill>
-            <a:srgbClr val="385E7D"/>
+            <a:srgbClr val="087E8B"/>
           </a:solidFill>
           <a:ln w="0">
             <a:noFill/>
@@ -9246,9 +9509,9 @@
           <a:bodyPr anchor="ctr"/>
           <a:lstStyle>
             <a:defPPr>
-              <a:defRPr sz="1725" b="1">
-                <a:solidFill>
-                  <a:srgbClr val="385E7D"/>
+              <a:defRPr sz="1800" b="1">
+                <a:solidFill>
+                  <a:srgbClr val="0A6676"/>
                 </a:solidFill>
                 <a:latin typeface="Hiragino Sans GB" panose="020B0300000000000000" charset="-122"/>
                 <a:ea typeface="Hiragino Sans GB" panose="020B0300000000000000" charset="-122"/>
@@ -9258,6 +9521,7 @@
           </a:lstStyle>
           <a:p>
             <a:pPr>
+              <a:buNone/>
               <a:defRPr sz="1725" b="1">
                 <a:solidFill>
                   <a:srgbClr val="385E7D"/>
@@ -9268,9 +9532,9 @@
               </a:defRPr>
             </a:pPr>
             <a:r>
-              <a:rPr sz="1725" b="1">
-                <a:solidFill>
-                  <a:srgbClr val="385E7D"/>
+              <a:rPr sz="1800" b="1">
+                <a:solidFill>
+                  <a:srgbClr val="0A6676"/>
                 </a:solidFill>
                 <a:latin typeface="Hiragino Sans GB" panose="020B0300000000000000" charset="-122"/>
                 <a:ea typeface="Hiragino Sans GB" panose="020B0300000000000000" charset="-122"/>
@@ -9317,7 +9581,7 @@
             <a:defPPr>
               <a:defRPr sz="1425" b="0">
                 <a:solidFill>
-                  <a:srgbClr val="24364B"/>
+                  <a:srgbClr val="1F364D"/>
                 </a:solidFill>
                 <a:latin typeface="Hiragino Sans GB" panose="020B0300000000000000" charset="-122"/>
                 <a:ea typeface="Hiragino Sans GB" panose="020B0300000000000000" charset="-122"/>
@@ -9327,6 +9591,7 @@
           </a:lstStyle>
           <a:p>
             <a:pPr>
+              <a:buNone/>
               <a:defRPr sz="1425" b="0">
                 <a:solidFill>
                   <a:srgbClr val="24364B"/>
@@ -9339,13 +9604,13 @@
             <a:r>
               <a:rPr sz="1425" b="0">
                 <a:solidFill>
-                  <a:srgbClr val="24364B"/>
+                  <a:srgbClr val="1F364D"/>
                 </a:solidFill>
                 <a:latin typeface="Hiragino Sans GB" panose="020B0300000000000000" charset="-122"/>
                 <a:ea typeface="Hiragino Sans GB" panose="020B0300000000000000" charset="-122"/>
                 <a:cs typeface="Hiragino Sans GB" panose="020B0300000000000000" charset="-122"/>
               </a:rPr>
-              <a:t>五条已知 DOI 均返回 ID、DOI、题名和发表年份，且与选取的题目对应。</a:t>
+              <a:t>5 条已知 DOI 均返回 ID、DOI、题名和年份。</a:t>
             </a:r>
             <a:endParaRPr sz="1425" b="0">
               <a:solidFill>
@@ -9361,6 +9626,7 @@
           </a:p>
           <a:p>
             <a:pPr>
+              <a:buNone/>
               <a:defRPr sz="1425" b="0">
                 <a:solidFill>
                   <a:srgbClr val="24364B"/>
@@ -9373,13 +9639,13 @@
             <a:r>
               <a:rPr sz="1425" b="0">
                 <a:solidFill>
-                  <a:srgbClr val="24364B"/>
+                  <a:srgbClr val="1F364D"/>
                 </a:solidFill>
                 <a:latin typeface="Hiragino Sans GB" panose="020B0300000000000000" charset="-122"/>
                 <a:ea typeface="Hiragino Sans GB" panose="020B0300000000000000" charset="-122"/>
                 <a:cs typeface="Hiragino Sans GB" panose="020B0300000000000000" charset="-122"/>
               </a:rPr>
-              <a:t>这验证了单条候选元数据获取，不是总体覆盖率测量。</a:t>
+              <a:t>这只验证单条元数据可得性，不能推算平台对学院论文的总体覆盖率。</a:t>
             </a:r>
             <a:endParaRPr sz="1425" b="0">
               <a:solidFill>
@@ -9413,7 +9679,7 @@
           </a:solidFill>
           <a:ln w="9525">
             <a:solidFill>
-              <a:srgbClr val="C9D9E5"/>
+              <a:srgbClr val="BBD1DD"/>
             </a:solidFill>
             <a:prstDash val="solid"/>
           </a:ln>
@@ -9436,7 +9702,7 @@
             <a:avLst/>
           </a:prstGeom>
           <a:solidFill>
-            <a:srgbClr val="385E7D"/>
+            <a:srgbClr val="087E8B"/>
           </a:solidFill>
           <a:ln w="0">
             <a:noFill/>
@@ -9470,9 +9736,9 @@
           <a:bodyPr anchor="ctr"/>
           <a:lstStyle>
             <a:defPPr>
-              <a:defRPr sz="1725" b="1">
-                <a:solidFill>
-                  <a:srgbClr val="385E7D"/>
+              <a:defRPr sz="1800" b="1">
+                <a:solidFill>
+                  <a:srgbClr val="0A6676"/>
                 </a:solidFill>
                 <a:latin typeface="Hiragino Sans GB" panose="020B0300000000000000" charset="-122"/>
                 <a:ea typeface="Hiragino Sans GB" panose="020B0300000000000000" charset="-122"/>
@@ -9482,6 +9748,7 @@
           </a:lstStyle>
           <a:p>
             <a:pPr>
+              <a:buNone/>
               <a:defRPr sz="1725" b="1">
                 <a:solidFill>
                   <a:srgbClr val="385E7D"/>
@@ -9492,9 +9759,9 @@
               </a:defRPr>
             </a:pPr>
             <a:r>
-              <a:rPr sz="1725" b="1">
-                <a:solidFill>
-                  <a:srgbClr val="385E7D"/>
+              <a:rPr sz="1800" b="1">
+                <a:solidFill>
+                  <a:srgbClr val="0A6676"/>
                 </a:solidFill>
                 <a:latin typeface="Hiragino Sans GB" panose="020B0300000000000000" charset="-122"/>
                 <a:ea typeface="Hiragino Sans GB" panose="020B0300000000000000" charset="-122"/>
@@ -9541,7 +9808,7 @@
             <a:defPPr>
               <a:defRPr sz="1425" b="0">
                 <a:solidFill>
-                  <a:srgbClr val="24364B"/>
+                  <a:srgbClr val="1F364D"/>
                 </a:solidFill>
                 <a:latin typeface="Hiragino Sans GB" panose="020B0300000000000000" charset="-122"/>
                 <a:ea typeface="Hiragino Sans GB" panose="020B0300000000000000" charset="-122"/>
@@ -9551,6 +9818,7 @@
           </a:lstStyle>
           <a:p>
             <a:pPr>
+              <a:buNone/>
               <a:defRPr sz="1425" b="0">
                 <a:solidFill>
                   <a:srgbClr val="24364B"/>
@@ -9563,13 +9831,13 @@
             <a:r>
               <a:rPr sz="1425" b="0">
                 <a:solidFill>
-                  <a:srgbClr val="24364B"/>
+                  <a:srgbClr val="1F364D"/>
                 </a:solidFill>
                 <a:latin typeface="Hiragino Sans GB" panose="020B0300000000000000" charset="-122"/>
                 <a:ea typeface="Hiragino Sans GB" panose="020B0300000000000000" charset="-122"/>
                 <a:cs typeface="Hiragino Sans GB" panose="020B0300000000000000" charset="-122"/>
               </a:rPr>
-              <a:t>五个同题检索均返回记录；P3 返回两条。</a:t>
+              <a:t>5 个同题检索均有返回；P3 返回 2 条。</a:t>
             </a:r>
             <a:endParaRPr sz="1425" b="0">
               <a:solidFill>
@@ -9585,6 +9853,7 @@
           </a:p>
           <a:p>
             <a:pPr>
+              <a:buNone/>
               <a:defRPr sz="1425" b="0">
                 <a:solidFill>
                   <a:srgbClr val="24364B"/>
@@ -9597,13 +9866,13 @@
             <a:r>
               <a:rPr sz="1425" b="0">
                 <a:solidFill>
-                  <a:srgbClr val="24364B"/>
+                  <a:srgbClr val="1F364D"/>
                 </a:solidFill>
                 <a:latin typeface="Hiragino Sans GB" panose="020B0300000000000000" charset="-122"/>
                 <a:ea typeface="Hiragino Sans GB" panose="020B0300000000000000" charset="-122"/>
                 <a:cs typeface="Hiragino Sans GB" panose="020B0300000000000000" charset="-122"/>
               </a:rPr>
-              <a:t>需要核对预印本与正式发表版本，不能按相似题名直接重复计数或自动合并。</a:t>
+              <a:t>正式发表与其他版本需核对，不能按题名自动计为两项，也不能直接合并。</a:t>
             </a:r>
             <a:endParaRPr sz="1425" b="0">
               <a:solidFill>
@@ -9637,7 +9906,7 @@
           </a:solidFill>
           <a:ln w="9525">
             <a:solidFill>
-              <a:srgbClr val="C9D9E5"/>
+              <a:srgbClr val="BBD1DD"/>
             </a:solidFill>
             <a:prstDash val="solid"/>
           </a:ln>
@@ -9660,7 +9929,7 @@
             <a:avLst/>
           </a:prstGeom>
           <a:solidFill>
-            <a:srgbClr val="385E7D"/>
+            <a:srgbClr val="087E8B"/>
           </a:solidFill>
           <a:ln w="0">
             <a:noFill/>
@@ -9694,9 +9963,9 @@
           <a:bodyPr anchor="ctr"/>
           <a:lstStyle>
             <a:defPPr>
-              <a:defRPr sz="1725" b="1">
-                <a:solidFill>
-                  <a:srgbClr val="385E7D"/>
+              <a:defRPr sz="1800" b="1">
+                <a:solidFill>
+                  <a:srgbClr val="0A6676"/>
                 </a:solidFill>
                 <a:latin typeface="Hiragino Sans GB" panose="020B0300000000000000" charset="-122"/>
                 <a:ea typeface="Hiragino Sans GB" panose="020B0300000000000000" charset="-122"/>
@@ -9706,6 +9975,7 @@
           </a:lstStyle>
           <a:p>
             <a:pPr>
+              <a:buNone/>
               <a:defRPr sz="1725" b="1">
                 <a:solidFill>
                   <a:srgbClr val="385E7D"/>
@@ -9716,9 +9986,9 @@
               </a:defRPr>
             </a:pPr>
             <a:r>
-              <a:rPr sz="1725" b="1">
-                <a:solidFill>
-                  <a:srgbClr val="385E7D"/>
+              <a:rPr sz="1800" b="1">
+                <a:solidFill>
+                  <a:srgbClr val="0A6676"/>
                 </a:solidFill>
                 <a:latin typeface="Hiragino Sans GB" panose="020B0300000000000000" charset="-122"/>
                 <a:ea typeface="Hiragino Sans GB" panose="020B0300000000000000" charset="-122"/>
@@ -9765,7 +10035,7 @@
             <a:defPPr>
               <a:defRPr sz="1425" b="0">
                 <a:solidFill>
-                  <a:srgbClr val="24364B"/>
+                  <a:srgbClr val="1F364D"/>
                 </a:solidFill>
                 <a:latin typeface="Hiragino Sans GB" panose="020B0300000000000000" charset="-122"/>
                 <a:ea typeface="Hiragino Sans GB" panose="020B0300000000000000" charset="-122"/>
@@ -9775,6 +10045,7 @@
           </a:lstStyle>
           <a:p>
             <a:pPr>
+              <a:buNone/>
               <a:defRPr sz="1425" b="0">
                 <a:solidFill>
                   <a:srgbClr val="24364B"/>
@@ -9787,13 +10058,13 @@
             <a:r>
               <a:rPr sz="1425" b="0">
                 <a:solidFill>
-                  <a:srgbClr val="24364B"/>
+                  <a:srgbClr val="1F364D"/>
                 </a:solidFill>
                 <a:latin typeface="Hiragino Sans GB" panose="020B0300000000000000" charset="-122"/>
                 <a:ea typeface="Hiragino Sans GB" panose="020B0300000000000000" charset="-122"/>
                 <a:cs typeface="Hiragino Sans GB" panose="020B0300000000000000" charset="-122"/>
               </a:rPr>
-              <a:t>同一作者的写法可能不同；来源原始作者名与平台规范名均须保留。</a:t>
+              <a:t>跨源作者写法可能不同，保留原始值和规范值。</a:t>
             </a:r>
             <a:endParaRPr sz="1425" b="0">
               <a:solidFill>
@@ -9809,6 +10080,7 @@
           </a:p>
           <a:p>
             <a:pPr>
+              <a:buNone/>
               <a:defRPr sz="1425" b="0">
                 <a:solidFill>
                   <a:srgbClr val="24364B"/>
@@ -9821,13 +10093,13 @@
             <a:r>
               <a:rPr sz="1425" b="0">
                 <a:solidFill>
-                  <a:srgbClr val="24364B"/>
+                  <a:srgbClr val="1F364D"/>
                 </a:solidFill>
                 <a:latin typeface="Hiragino Sans GB" panose="020B0300000000000000" charset="-122"/>
                 <a:ea typeface="Hiragino Sans GB" panose="020B0300000000000000" charset="-122"/>
                 <a:cs typeface="Hiragino Sans GB" panose="020B0300000000000000" charset="-122"/>
               </a:rPr>
-              <a:t>DOI或关键词缺失时保留状态，避免自动填造。</a:t>
+              <a:t>DOI、关键词缺失时记录状态，不补造信息。</a:t>
             </a:r>
             <a:endParaRPr sz="1425" b="0">
               <a:solidFill>
@@ -9857,7 +10129,7 @@
             <a:avLst/>
           </a:prstGeom>
           <a:solidFill>
-            <a:srgbClr val="EAF1F8"/>
+            <a:srgbClr val="DDEEF2"/>
           </a:solidFill>
           <a:ln w="0">
             <a:noFill/>
@@ -9893,7 +10165,7 @@
             <a:defPPr>
               <a:defRPr sz="1350" b="0">
                 <a:solidFill>
-                  <a:srgbClr val="24364B"/>
+                  <a:srgbClr val="1F364D"/>
                 </a:solidFill>
                 <a:latin typeface="Hiragino Sans GB" panose="020B0300000000000000" charset="-122"/>
                 <a:ea typeface="Hiragino Sans GB" panose="020B0300000000000000" charset="-122"/>
@@ -9903,6 +10175,7 @@
           </a:lstStyle>
           <a:p>
             <a:pPr>
+              <a:buNone/>
               <a:defRPr sz="1350" b="0">
                 <a:solidFill>
                   <a:srgbClr val="24364B"/>
@@ -9915,13 +10188,13 @@
             <a:r>
               <a:rPr sz="1350" b="0">
                 <a:solidFill>
-                  <a:srgbClr val="24364B"/>
+                  <a:srgbClr val="1F364D"/>
                 </a:solidFill>
                 <a:latin typeface="Hiragino Sans GB" panose="020B0300000000000000" charset="-122"/>
                 <a:ea typeface="Hiragino Sans GB" panose="020B0300000000000000" charset="-122"/>
                 <a:cs typeface="Hiragino Sans GB" panose="020B0300000000000000" charset="-122"/>
               </a:rPr>
-              <a:t>采集设计只针对获许可的元数据；开放题录与论文全文分别核对使用条件。</a:t>
+              <a:t>元数据可获取、可批量使用和可转载全文是三项不同的许可判断。</a:t>
             </a:r>
             <a:endParaRPr sz="1350" b="0">
               <a:solidFill>
@@ -9986,9 +10259,9 @@
           <a:bodyPr anchor="ctr"/>
           <a:lstStyle>
             <a:defPPr>
-              <a:defRPr sz="2475" b="1">
-                <a:solidFill>
-                  <a:srgbClr val="24364B"/>
+              <a:defRPr sz="2700" b="1">
+                <a:solidFill>
+                  <a:srgbClr val="102A43"/>
                 </a:solidFill>
                 <a:latin typeface="Hiragino Sans GB" panose="020B0300000000000000" charset="-122"/>
                 <a:ea typeface="Hiragino Sans GB" panose="020B0300000000000000" charset="-122"/>
@@ -9998,6 +10271,7 @@
           </a:lstStyle>
           <a:p>
             <a:pPr>
+              <a:buNone/>
               <a:defRPr sz="2475" b="1">
                 <a:solidFill>
                   <a:srgbClr val="24364B"/>
@@ -10008,15 +10282,15 @@
               </a:defRPr>
             </a:pPr>
             <a:r>
-              <a:rPr sz="2475" b="1">
-                <a:solidFill>
-                  <a:srgbClr val="24364B"/>
+              <a:rPr sz="2700" b="1">
+                <a:solidFill>
+                  <a:srgbClr val="102A43"/>
                 </a:solidFill>
                 <a:latin typeface="Hiragino Sans GB" panose="020B0300000000000000" charset="-122"/>
                 <a:ea typeface="Hiragino Sans GB" panose="020B0300000000000000" charset="-122"/>
                 <a:cs typeface="Hiragino Sans GB" panose="020B0300000000000000" charset="-122"/>
               </a:rPr>
-              <a:t>专利、项目、获奖的字段缺口不同</a:t>
+              <a:t>跨类型成果需要各自的字段和证据</a:t>
             </a:r>
             <a:endParaRPr sz="2475" b="1">
               <a:solidFill>
@@ -10040,13 +10314,13 @@
         <p:spPr>
           <a:xfrm>
             <a:off x="590550" y="1057275"/>
-            <a:ext cx="11010900" cy="19050"/>
+            <a:ext cx="11010900" cy="38100"/>
           </a:xfrm>
           <a:prstGeom prst="rect">
             <a:avLst/>
           </a:prstGeom>
           <a:solidFill>
-            <a:srgbClr val="C9D9E5"/>
+            <a:srgbClr val="087E8B"/>
           </a:solidFill>
           <a:ln w="0">
             <a:noFill/>
@@ -10082,7 +10356,7 @@
             <a:defPPr>
               <a:defRPr sz="1050" b="0">
                 <a:solidFill>
-                  <a:srgbClr val="5D7183"/>
+                  <a:srgbClr val="62788B"/>
                 </a:solidFill>
                 <a:latin typeface="Hiragino Sans GB" panose="020B0300000000000000" charset="-122"/>
                 <a:ea typeface="Hiragino Sans GB" panose="020B0300000000000000" charset="-122"/>
@@ -10092,6 +10366,7 @@
           </a:lstStyle>
           <a:p>
             <a:pPr>
+              <a:buNone/>
               <a:defRPr sz="1050" b="0">
                 <a:solidFill>
                   <a:srgbClr val="5D7183"/>
@@ -10104,7 +10379,7 @@
             <a:r>
               <a:rPr sz="1050" b="0">
                 <a:solidFill>
-                  <a:srgbClr val="5D7183"/>
+                  <a:srgbClr val="62788B"/>
                 </a:solidFill>
                 <a:latin typeface="Hiragino Sans GB" panose="020B0300000000000000" charset="-122"/>
                 <a:ea typeface="Hiragino Sans GB" panose="020B0300000000000000" charset="-122"/>
@@ -10151,7 +10426,7 @@
             <a:defPPr>
               <a:defRPr sz="975" b="0">
                 <a:solidFill>
-                  <a:srgbClr val="5D7183"/>
+                  <a:srgbClr val="62788B"/>
                 </a:solidFill>
                 <a:latin typeface="Hiragino Sans GB" panose="020B0300000000000000" charset="-122"/>
                 <a:ea typeface="Hiragino Sans GB" panose="020B0300000000000000" charset="-122"/>
@@ -10161,6 +10436,7 @@
           </a:lstStyle>
           <a:p>
             <a:pPr>
+              <a:buNone/>
               <a:defRPr sz="975" b="0">
                 <a:solidFill>
                   <a:srgbClr val="5D7183"/>
@@ -10173,7 +10449,7 @@
             <a:r>
               <a:rPr sz="975" b="0">
                 <a:solidFill>
-                  <a:srgbClr val="5D7183"/>
+                  <a:srgbClr val="62788B"/>
                 </a:solidFill>
                 <a:latin typeface="Hiragino Sans GB" panose="020B0300000000000000" charset="-122"/>
                 <a:ea typeface="Hiragino Sans GB" panose="020B0300000000000000" charset="-122"/>
@@ -10213,7 +10489,7 @@
           </a:solidFill>
           <a:ln w="9525">
             <a:solidFill>
-              <a:srgbClr val="C9D9E5"/>
+              <a:srgbClr val="BBD1DD"/>
             </a:solidFill>
             <a:prstDash val="solid"/>
           </a:ln>
@@ -10236,7 +10512,7 @@
             <a:avLst/>
           </a:prstGeom>
           <a:solidFill>
-            <a:srgbClr val="385E7D"/>
+            <a:srgbClr val="087E8B"/>
           </a:solidFill>
           <a:ln w="0">
             <a:noFill/>
@@ -10270,9 +10546,9 @@
           <a:bodyPr anchor="ctr"/>
           <a:lstStyle>
             <a:defPPr>
-              <a:defRPr sz="1725" b="1">
-                <a:solidFill>
-                  <a:srgbClr val="385E7D"/>
+              <a:defRPr sz="1800" b="1">
+                <a:solidFill>
+                  <a:srgbClr val="0A6676"/>
                 </a:solidFill>
                 <a:latin typeface="Hiragino Sans GB" panose="020B0300000000000000" charset="-122"/>
                 <a:ea typeface="Hiragino Sans GB" panose="020B0300000000000000" charset="-122"/>
@@ -10282,6 +10558,7 @@
           </a:lstStyle>
           <a:p>
             <a:pPr>
+              <a:buNone/>
               <a:defRPr sz="1725" b="1">
                 <a:solidFill>
                   <a:srgbClr val="385E7D"/>
@@ -10292,9 +10569,9 @@
               </a:defRPr>
             </a:pPr>
             <a:r>
-              <a:rPr sz="1725" b="1">
-                <a:solidFill>
-                  <a:srgbClr val="385E7D"/>
+              <a:rPr sz="1800" b="1">
+                <a:solidFill>
+                  <a:srgbClr val="0A6676"/>
                 </a:solidFill>
                 <a:latin typeface="Hiragino Sans GB" panose="020B0300000000000000" charset="-122"/>
                 <a:ea typeface="Hiragino Sans GB" panose="020B0300000000000000" charset="-122"/>
@@ -10341,7 +10618,7 @@
             <a:defPPr>
               <a:defRPr sz="1425" b="0">
                 <a:solidFill>
-                  <a:srgbClr val="24364B"/>
+                  <a:srgbClr val="1F364D"/>
                 </a:solidFill>
                 <a:latin typeface="Hiragino Sans GB" panose="020B0300000000000000" charset="-122"/>
                 <a:ea typeface="Hiragino Sans GB" panose="020B0300000000000000" charset="-122"/>
@@ -10351,6 +10628,7 @@
           </a:lstStyle>
           <a:p>
             <a:pPr>
+              <a:buNone/>
               <a:defRPr sz="1425" b="0">
                 <a:solidFill>
                   <a:srgbClr val="24364B"/>
@@ -10363,13 +10641,13 @@
             <a:r>
               <a:rPr sz="1425" b="0">
                 <a:solidFill>
-                  <a:srgbClr val="24364B"/>
+                  <a:srgbClr val="1F364D"/>
                 </a:solidFill>
                 <a:latin typeface="Hiragino Sans GB" panose="020B0300000000000000" charset="-122"/>
                 <a:ea typeface="Hiragino Sans GB" panose="020B0300000000000000" charset="-122"/>
                 <a:cs typeface="Hiragino Sans GB" panose="020B0300000000000000" charset="-122"/>
               </a:rPr>
-              <a:t>可核公布号、申请号、申请人和发明人。</a:t>
+              <a:t>三件专利可核公布号、申请号、申请人和发明人。</a:t>
             </a:r>
             <a:endParaRPr sz="1425" b="0">
               <a:solidFill>
@@ -10385,6 +10663,7 @@
           </a:p>
           <a:p>
             <a:pPr>
+              <a:buNone/>
               <a:defRPr sz="1425" b="0">
                 <a:solidFill>
                   <a:srgbClr val="24364B"/>
@@ -10397,13 +10676,13 @@
             <a:r>
               <a:rPr sz="1425" b="0">
                 <a:solidFill>
-                  <a:srgbClr val="24364B"/>
+                  <a:srgbClr val="1F364D"/>
                 </a:solidFill>
                 <a:latin typeface="Hiragino Sans GB" panose="020B0300000000000000" charset="-122"/>
                 <a:ea typeface="Hiragino Sans GB" panose="020B0300000000000000" charset="-122"/>
                 <a:cs typeface="Hiragino Sans GB" panose="020B0300000000000000" charset="-122"/>
               </a:rPr>
-              <a:t>教师现任学院不能反推其任职前专利的学院归属；第三方页面的法律状态需主管机构核对。</a:t>
+              <a:t>现任学院不能反推历史归属；第三方页面不能代替官方法律状态。</a:t>
             </a:r>
             <a:endParaRPr sz="1425" b="0">
               <a:solidFill>
@@ -10437,7 +10716,7 @@
           </a:solidFill>
           <a:ln w="9525">
             <a:solidFill>
-              <a:srgbClr val="C9D9E5"/>
+              <a:srgbClr val="BBD1DD"/>
             </a:solidFill>
             <a:prstDash val="solid"/>
           </a:ln>
@@ -10460,7 +10739,7 @@
             <a:avLst/>
           </a:prstGeom>
           <a:solidFill>
-            <a:srgbClr val="385E7D"/>
+            <a:srgbClr val="087E8B"/>
           </a:solidFill>
           <a:ln w="0">
             <a:noFill/>
@@ -10494,9 +10773,9 @@
           <a:bodyPr anchor="ctr"/>
           <a:lstStyle>
             <a:defPPr>
-              <a:defRPr sz="1725" b="1">
-                <a:solidFill>
-                  <a:srgbClr val="385E7D"/>
+              <a:defRPr sz="1800" b="1">
+                <a:solidFill>
+                  <a:srgbClr val="0A6676"/>
                 </a:solidFill>
                 <a:latin typeface="Hiragino Sans GB" panose="020B0300000000000000" charset="-122"/>
                 <a:ea typeface="Hiragino Sans GB" panose="020B0300000000000000" charset="-122"/>
@@ -10506,6 +10785,7 @@
           </a:lstStyle>
           <a:p>
             <a:pPr>
+              <a:buNone/>
               <a:defRPr sz="1725" b="1">
                 <a:solidFill>
                   <a:srgbClr val="385E7D"/>
@@ -10516,9 +10796,9 @@
               </a:defRPr>
             </a:pPr>
             <a:r>
-              <a:rPr sz="1725" b="1">
-                <a:solidFill>
-                  <a:srgbClr val="385E7D"/>
+              <a:rPr sz="1800" b="1">
+                <a:solidFill>
+                  <a:srgbClr val="0A6676"/>
                 </a:solidFill>
                 <a:latin typeface="Hiragino Sans GB" panose="020B0300000000000000" charset="-122"/>
                 <a:ea typeface="Hiragino Sans GB" panose="020B0300000000000000" charset="-122"/>
@@ -10565,7 +10845,7 @@
             <a:defPPr>
               <a:defRPr sz="1425" b="0">
                 <a:solidFill>
-                  <a:srgbClr val="24364B"/>
+                  <a:srgbClr val="1F364D"/>
                 </a:solidFill>
                 <a:latin typeface="Hiragino Sans GB" panose="020B0300000000000000" charset="-122"/>
                 <a:ea typeface="Hiragino Sans GB" panose="020B0300000000000000" charset="-122"/>
@@ -10575,6 +10855,7 @@
           </a:lstStyle>
           <a:p>
             <a:pPr>
+              <a:buNone/>
               <a:defRPr sz="1425" b="0">
                 <a:solidFill>
                   <a:srgbClr val="24364B"/>
@@ -10587,13 +10868,13 @@
             <a:r>
               <a:rPr sz="1425" b="0">
                 <a:solidFill>
-                  <a:srgbClr val="24364B"/>
+                  <a:srgbClr val="1F364D"/>
                 </a:solidFill>
                 <a:latin typeface="Hiragino Sans GB" panose="020B0300000000000000" charset="-122"/>
                 <a:ea typeface="Hiragino Sans GB" panose="020B0300000000000000" charset="-122"/>
                 <a:cs typeface="Hiragino Sans GB" panose="020B0300000000000000" charset="-122"/>
               </a:rPr>
-              <a:t>教师主页可查项目名称与来源，但编号、期限、负责人或状态不齐。</a:t>
+              <a:t>三项项目有教师主页线索，但编号、期限、负责人或状态不齐。</a:t>
             </a:r>
             <a:endParaRPr sz="1425" b="0">
               <a:solidFill>
@@ -10609,6 +10890,7 @@
           </a:p>
           <a:p>
             <a:pPr>
+              <a:buNone/>
               <a:defRPr sz="1425" b="0">
                 <a:solidFill>
                   <a:srgbClr val="24364B"/>
@@ -10621,13 +10903,13 @@
             <a:r>
               <a:rPr sz="1425" b="0">
                 <a:solidFill>
-                  <a:srgbClr val="24364B"/>
+                  <a:srgbClr val="1F364D"/>
                 </a:solidFill>
                 <a:latin typeface="Hiragino Sans GB" panose="020B0300000000000000" charset="-122"/>
                 <a:ea typeface="Hiragino Sans GB" panose="020B0300000000000000" charset="-122"/>
                 <a:cs typeface="Hiragino Sans GB" panose="020B0300000000000000" charset="-122"/>
               </a:rPr>
-              <a:t>论文致谢编号仅是交叉线索，不能直接填成正式项目编号。</a:t>
+              <a:t>论文致谢编号只能用于交叉查找，不能直接填为正式项目编号。</a:t>
             </a:r>
             <a:endParaRPr sz="1425" b="0">
               <a:solidFill>
@@ -10661,7 +10943,7 @@
           </a:solidFill>
           <a:ln w="9525">
             <a:solidFill>
-              <a:srgbClr val="C9D9E5"/>
+              <a:srgbClr val="BBD1DD"/>
             </a:solidFill>
             <a:prstDash val="solid"/>
           </a:ln>
@@ -10684,7 +10966,7 @@
             <a:avLst/>
           </a:prstGeom>
           <a:solidFill>
-            <a:srgbClr val="385E7D"/>
+            <a:srgbClr val="087E8B"/>
           </a:solidFill>
           <a:ln w="0">
             <a:noFill/>
@@ -10718,9 +11000,9 @@
           <a:bodyPr anchor="ctr"/>
           <a:lstStyle>
             <a:defPPr>
-              <a:defRPr sz="1725" b="1">
-                <a:solidFill>
-                  <a:srgbClr val="385E7D"/>
+              <a:defRPr sz="1800" b="1">
+                <a:solidFill>
+                  <a:srgbClr val="0A6676"/>
                 </a:solidFill>
                 <a:latin typeface="Hiragino Sans GB" panose="020B0300000000000000" charset="-122"/>
                 <a:ea typeface="Hiragino Sans GB" panose="020B0300000000000000" charset="-122"/>
@@ -10730,6 +11012,7 @@
           </a:lstStyle>
           <a:p>
             <a:pPr>
+              <a:buNone/>
               <a:defRPr sz="1725" b="1">
                 <a:solidFill>
                   <a:srgbClr val="385E7D"/>
@@ -10740,9 +11023,9 @@
               </a:defRPr>
             </a:pPr>
             <a:r>
-              <a:rPr sz="1725" b="1">
-                <a:solidFill>
-                  <a:srgbClr val="385E7D"/>
+              <a:rPr sz="1800" b="1">
+                <a:solidFill>
+                  <a:srgbClr val="0A6676"/>
                 </a:solidFill>
                 <a:latin typeface="Hiragino Sans GB" panose="020B0300000000000000" charset="-122"/>
                 <a:ea typeface="Hiragino Sans GB" panose="020B0300000000000000" charset="-122"/>
@@ -10789,7 +11072,7 @@
             <a:defPPr>
               <a:defRPr sz="1425" b="0">
                 <a:solidFill>
-                  <a:srgbClr val="24364B"/>
+                  <a:srgbClr val="1F364D"/>
                 </a:solidFill>
                 <a:latin typeface="Hiragino Sans GB" panose="020B0300000000000000" charset="-122"/>
                 <a:ea typeface="Hiragino Sans GB" panose="020B0300000000000000" charset="-122"/>
@@ -10799,6 +11082,7 @@
           </a:lstStyle>
           <a:p>
             <a:pPr>
+              <a:buNone/>
               <a:defRPr sz="1425" b="0">
                 <a:solidFill>
                   <a:srgbClr val="24364B"/>
@@ -10811,13 +11095,13 @@
             <a:r>
               <a:rPr sz="1425" b="0">
                 <a:solidFill>
-                  <a:srgbClr val="24364B"/>
+                  <a:srgbClr val="1F364D"/>
                 </a:solidFill>
                 <a:latin typeface="Hiragino Sans GB" panose="020B0300000000000000" charset="-122"/>
                 <a:ea typeface="Hiragino Sans GB" panose="020B0300000000000000" charset="-122"/>
                 <a:cs typeface="Hiragino Sans GB" panose="020B0300000000000000" charset="-122"/>
               </a:rPr>
-              <a:t>会议名单、论文页与学院报道可交叉核对；证据等级有差异。</a:t>
+              <a:t>三项获奖可用会议名单、论文页与学院报道交叉核对。</a:t>
             </a:r>
             <a:endParaRPr sz="1425" b="0">
               <a:solidFill>
@@ -10833,6 +11117,7 @@
           </a:p>
           <a:p>
             <a:pPr>
+              <a:buNone/>
               <a:defRPr sz="1425" b="0">
                 <a:solidFill>
                   <a:srgbClr val="24364B"/>
@@ -10845,13 +11130,13 @@
             <a:r>
               <a:rPr sz="1425" b="0">
                 <a:solidFill>
-                  <a:srgbClr val="24364B"/>
+                  <a:srgbClr val="1F364D"/>
                 </a:solidFill>
                 <a:latin typeface="Hiragino Sans GB" panose="020B0300000000000000" charset="-122"/>
                 <a:ea typeface="Hiragino Sans GB" panose="020B0300000000000000" charset="-122"/>
                 <a:cs typeface="Hiragino Sans GB" panose="020B0300000000000000" charset="-122"/>
               </a:rPr>
-              <a:t>论文的DOI不能充当奖项编号。只有报道时须标“正式名单待核”。</a:t>
+              <a:t>新闻报道与正式名单证据等级不同，论文 DOI 也不是奖项编号。</a:t>
             </a:r>
             <a:endParaRPr sz="1425" b="0">
               <a:solidFill>
@@ -10881,7 +11166,7 @@
             <a:avLst/>
           </a:prstGeom>
           <a:solidFill>
-            <a:srgbClr val="EAF1F8"/>
+            <a:srgbClr val="DDEEF2"/>
           </a:solidFill>
           <a:ln w="0">
             <a:noFill/>
@@ -10917,7 +11202,7 @@
             <a:defPPr>
               <a:defRPr sz="1350" b="0">
                 <a:solidFill>
-                  <a:srgbClr val="24364B"/>
+                  <a:srgbClr val="1F364D"/>
                 </a:solidFill>
                 <a:latin typeface="Hiragino Sans GB" panose="020B0300000000000000" charset="-122"/>
                 <a:ea typeface="Hiragino Sans GB" panose="020B0300000000000000" charset="-122"/>
@@ -10927,6 +11212,7 @@
           </a:lstStyle>
           <a:p>
             <a:pPr>
+              <a:buNone/>
               <a:defRPr sz="1350" b="0">
                 <a:solidFill>
                   <a:srgbClr val="24364B"/>
@@ -10939,13 +11225,13 @@
             <a:r>
               <a:rPr sz="1350" b="0">
                 <a:solidFill>
-                  <a:srgbClr val="24364B"/>
+                  <a:srgbClr val="1F364D"/>
                 </a:solidFill>
                 <a:latin typeface="Hiragino Sans GB" panose="020B0300000000000000" charset="-122"/>
                 <a:ea typeface="Hiragino Sans GB" panose="020B0300000000000000" charset="-122"/>
                 <a:cs typeface="Hiragino Sans GB" panose="020B0300000000000000" charset="-122"/>
               </a:rPr>
-              <a:t>跨类型统一要求：记录来源、字段缺失和核验等级，避免把公开页面文字直接当作权威登记记录。</a:t>
+              <a:t>统一记录来源、字段缺失和核验等级，再决定能否进入正式成果记录。</a:t>
             </a:r>
             <a:endParaRPr sz="1350" b="0">
               <a:solidFill>
@@ -11010,9 +11296,9 @@
           <a:bodyPr anchor="ctr"/>
           <a:lstStyle>
             <a:defPPr>
-              <a:defRPr sz="2475" b="1">
-                <a:solidFill>
-                  <a:srgbClr val="24364B"/>
+              <a:defRPr sz="2700" b="1">
+                <a:solidFill>
+                  <a:srgbClr val="102A43"/>
                 </a:solidFill>
                 <a:latin typeface="Hiragino Sans GB" panose="020B0300000000000000" charset="-122"/>
                 <a:ea typeface="Hiragino Sans GB" panose="020B0300000000000000" charset="-122"/>
@@ -11022,6 +11308,7 @@
           </a:lstStyle>
           <a:p>
             <a:pPr>
+              <a:buNone/>
               <a:defRPr sz="2475" b="1">
                 <a:solidFill>
                   <a:srgbClr val="24364B"/>
@@ -11032,15 +11319,15 @@
               </a:defRPr>
             </a:pPr>
             <a:r>
-              <a:rPr sz="2475" b="1">
-                <a:solidFill>
-                  <a:srgbClr val="24364B"/>
+              <a:rPr sz="2700" b="1">
+                <a:solidFill>
+                  <a:srgbClr val="102A43"/>
                 </a:solidFill>
                 <a:latin typeface="Hiragino Sans GB" panose="020B0300000000000000" charset="-122"/>
                 <a:ea typeface="Hiragino Sans GB" panose="020B0300000000000000" charset="-122"/>
                 <a:cs typeface="Hiragino Sans GB" panose="020B0300000000000000" charset="-122"/>
               </a:rPr>
-              <a:t>领域分类与逐源许可形成入库边界</a:t>
+              <a:t>分类与许可共同决定入库边界</a:t>
             </a:r>
             <a:endParaRPr sz="2475" b="1">
               <a:solidFill>
@@ -11064,13 +11351,13 @@
         <p:spPr>
           <a:xfrm>
             <a:off x="590550" y="1057275"/>
-            <a:ext cx="11010900" cy="19050"/>
+            <a:ext cx="11010900" cy="38100"/>
           </a:xfrm>
           <a:prstGeom prst="rect">
             <a:avLst/>
           </a:prstGeom>
           <a:solidFill>
-            <a:srgbClr val="C9D9E5"/>
+            <a:srgbClr val="087E8B"/>
           </a:solidFill>
           <a:ln w="0">
             <a:noFill/>
@@ -11106,7 +11393,7 @@
             <a:defPPr>
               <a:defRPr sz="1050" b="0">
                 <a:solidFill>
-                  <a:srgbClr val="5D7183"/>
+                  <a:srgbClr val="62788B"/>
                 </a:solidFill>
                 <a:latin typeface="Hiragino Sans GB" panose="020B0300000000000000" charset="-122"/>
                 <a:ea typeface="Hiragino Sans GB" panose="020B0300000000000000" charset="-122"/>
@@ -11116,6 +11403,7 @@
           </a:lstStyle>
           <a:p>
             <a:pPr>
+              <a:buNone/>
               <a:defRPr sz="1050" b="0">
                 <a:solidFill>
                   <a:srgbClr val="5D7183"/>
@@ -11128,7 +11416,7 @@
             <a:r>
               <a:rPr sz="1050" b="0">
                 <a:solidFill>
-                  <a:srgbClr val="5D7183"/>
+                  <a:srgbClr val="62788B"/>
                 </a:solidFill>
                 <a:latin typeface="Hiragino Sans GB" panose="020B0300000000000000" charset="-122"/>
                 <a:ea typeface="Hiragino Sans GB" panose="020B0300000000000000" charset="-122"/>
@@ -11175,7 +11463,7 @@
             <a:defPPr>
               <a:defRPr sz="975" b="0">
                 <a:solidFill>
-                  <a:srgbClr val="5D7183"/>
+                  <a:srgbClr val="62788B"/>
                 </a:solidFill>
                 <a:latin typeface="Hiragino Sans GB" panose="020B0300000000000000" charset="-122"/>
                 <a:ea typeface="Hiragino Sans GB" panose="020B0300000000000000" charset="-122"/>
@@ -11185,6 +11473,7 @@
           </a:lstStyle>
           <a:p>
             <a:pPr>
+              <a:buNone/>
               <a:defRPr sz="975" b="0">
                 <a:solidFill>
                   <a:srgbClr val="5D7183"/>
@@ -11197,7 +11486,7 @@
             <a:r>
               <a:rPr sz="975" b="0">
                 <a:solidFill>
-                  <a:srgbClr val="5D7183"/>
+                  <a:srgbClr val="62788B"/>
                 </a:solidFill>
                 <a:latin typeface="Hiragino Sans GB" panose="020B0300000000000000" charset="-122"/>
                 <a:ea typeface="Hiragino Sans GB" panose="020B0300000000000000" charset="-122"/>
@@ -11237,7 +11526,7 @@
           </a:solidFill>
           <a:ln w="9525">
             <a:solidFill>
-              <a:srgbClr val="C9D9E5"/>
+              <a:srgbClr val="BBD1DD"/>
             </a:solidFill>
             <a:prstDash val="solid"/>
           </a:ln>
@@ -11260,7 +11549,7 @@
             <a:avLst/>
           </a:prstGeom>
           <a:solidFill>
-            <a:srgbClr val="385E7D"/>
+            <a:srgbClr val="087E8B"/>
           </a:solidFill>
           <a:ln w="0">
             <a:noFill/>
@@ -11294,9 +11583,9 @@
           <a:bodyPr anchor="ctr"/>
           <a:lstStyle>
             <a:defPPr>
-              <a:defRPr sz="1725" b="1">
-                <a:solidFill>
-                  <a:srgbClr val="385E7D"/>
+              <a:defRPr sz="1800" b="1">
+                <a:solidFill>
+                  <a:srgbClr val="0A6676"/>
                 </a:solidFill>
                 <a:latin typeface="Hiragino Sans GB" panose="020B0300000000000000" charset="-122"/>
                 <a:ea typeface="Hiragino Sans GB" panose="020B0300000000000000" charset="-122"/>
@@ -11306,6 +11595,7 @@
           </a:lstStyle>
           <a:p>
             <a:pPr>
+              <a:buNone/>
               <a:defRPr sz="1725" b="1">
                 <a:solidFill>
                   <a:srgbClr val="385E7D"/>
@@ -11316,9 +11606,9 @@
               </a:defRPr>
             </a:pPr>
             <a:r>
-              <a:rPr sz="1725" b="1">
-                <a:solidFill>
-                  <a:srgbClr val="385E7D"/>
+              <a:rPr sz="1800" b="1">
+                <a:solidFill>
+                  <a:srgbClr val="0A6676"/>
                 </a:solidFill>
                 <a:latin typeface="Hiragino Sans GB" panose="020B0300000000000000" charset="-122"/>
                 <a:ea typeface="Hiragino Sans GB" panose="020B0300000000000000" charset="-122"/>
@@ -11365,7 +11655,7 @@
             <a:defPPr>
               <a:defRPr sz="1425" b="0">
                 <a:solidFill>
-                  <a:srgbClr val="24364B"/>
+                  <a:srgbClr val="1F364D"/>
                 </a:solidFill>
                 <a:latin typeface="Hiragino Sans GB" panose="020B0300000000000000" charset="-122"/>
                 <a:ea typeface="Hiragino Sans GB" panose="020B0300000000000000" charset="-122"/>
@@ -11375,6 +11665,7 @@
           </a:lstStyle>
           <a:p>
             <a:pPr>
+              <a:buNone/>
               <a:defRPr sz="1425" b="0">
                 <a:solidFill>
                   <a:srgbClr val="24364B"/>
@@ -11387,13 +11678,13 @@
             <a:r>
               <a:rPr sz="1425" b="0">
                 <a:solidFill>
-                  <a:srgbClr val="24364B"/>
+                  <a:srgbClr val="1F364D"/>
                 </a:solidFill>
                 <a:latin typeface="Hiragino Sans GB" panose="020B0300000000000000" charset="-122"/>
                 <a:ea typeface="Hiragino Sans GB" panose="020B0300000000000000" charset="-122"/>
                 <a:cs typeface="Hiragino Sans GB" panose="020B0300000000000000" charset="-122"/>
               </a:rPr>
-              <a:t>成果类型与研究领域分开建模。</a:t>
+              <a:t>成果类型与研究领域分开。一级参考学科目录，二级参考学院方向，三级采用受控主题词。</a:t>
             </a:r>
             <a:endParaRPr sz="1425" b="0">
               <a:solidFill>
@@ -11409,6 +11700,7 @@
           </a:p>
           <a:p>
             <a:pPr>
+              <a:buNone/>
               <a:defRPr sz="1425" b="0">
                 <a:solidFill>
                   <a:srgbClr val="24364B"/>
@@ -11421,13 +11713,13 @@
             <a:r>
               <a:rPr sz="1425" b="0">
                 <a:solidFill>
-                  <a:srgbClr val="24364B"/>
+                  <a:srgbClr val="1F364D"/>
                 </a:solidFill>
                 <a:latin typeface="Hiragino Sans GB" panose="020B0300000000000000" charset="-122"/>
                 <a:ea typeface="Hiragino Sans GB" panose="020B0300000000000000" charset="-122"/>
                 <a:cs typeface="Hiragino Sans GB" panose="020B0300000000000000" charset="-122"/>
               </a:rPr>
-              <a:t>一级参考学科目录，二级参考学院／课题组方向，三级采用受控主题词。</a:t>
+              <a:t>10 条试标中 P3、T3、R2 跨一级学科，需多标签和人工复核。</a:t>
             </a:r>
             <a:endParaRPr sz="1425" b="0">
               <a:solidFill>
@@ -11438,40 +11730,6 @@
               <a:cs typeface="Hiragino Sans GB" panose="020B0300000000000000" charset="-122"/>
             </a:endParaRPr>
           </a:p>
-          <a:p>
-            <a:endParaRPr sz="1425"/>
-          </a:p>
-          <a:p>
-            <a:pPr>
-              <a:defRPr sz="1425" b="0">
-                <a:solidFill>
-                  <a:srgbClr val="24364B"/>
-                </a:solidFill>
-                <a:latin typeface="Hiragino Sans GB" panose="020B0300000000000000" charset="-122"/>
-                <a:ea typeface="Hiragino Sans GB" panose="020B0300000000000000" charset="-122"/>
-                <a:cs typeface="Hiragino Sans GB" panose="020B0300000000000000" charset="-122"/>
-              </a:defRPr>
-            </a:pPr>
-            <a:r>
-              <a:rPr sz="1425" b="0">
-                <a:solidFill>
-                  <a:srgbClr val="24364B"/>
-                </a:solidFill>
-                <a:latin typeface="Hiragino Sans GB" panose="020B0300000000000000" charset="-122"/>
-                <a:ea typeface="Hiragino Sans GB" panose="020B0300000000000000" charset="-122"/>
-                <a:cs typeface="Hiragino Sans GB" panose="020B0300000000000000" charset="-122"/>
-              </a:rPr>
-              <a:t>试标中P3、T3、R2跨一级学科，允许多标签并保留人工复核状态。</a:t>
-            </a:r>
-            <a:endParaRPr sz="1425" b="0">
-              <a:solidFill>
-                <a:srgbClr val="24364B"/>
-              </a:solidFill>
-              <a:latin typeface="Hiragino Sans GB" panose="020B0300000000000000" charset="-122"/>
-              <a:ea typeface="Hiragino Sans GB" panose="020B0300000000000000" charset="-122"/>
-              <a:cs typeface="Hiragino Sans GB" panose="020B0300000000000000" charset="-122"/>
-            </a:endParaRPr>
-          </a:p>
         </p:txBody>
       </p:sp>
       <p:sp>
@@ -11495,7 +11753,7 @@
           </a:solidFill>
           <a:ln w="9525">
             <a:solidFill>
-              <a:srgbClr val="C9D9E5"/>
+              <a:srgbClr val="BBD1DD"/>
             </a:solidFill>
             <a:prstDash val="solid"/>
           </a:ln>
@@ -11518,7 +11776,7 @@
             <a:avLst/>
           </a:prstGeom>
           <a:solidFill>
-            <a:srgbClr val="385E7D"/>
+            <a:srgbClr val="087E8B"/>
           </a:solidFill>
           <a:ln w="0">
             <a:noFill/>
@@ -11552,9 +11810,9 @@
           <a:bodyPr anchor="ctr"/>
           <a:lstStyle>
             <a:defPPr>
-              <a:defRPr sz="1725" b="1">
-                <a:solidFill>
-                  <a:srgbClr val="385E7D"/>
+              <a:defRPr sz="1800" b="1">
+                <a:solidFill>
+                  <a:srgbClr val="0A6676"/>
                 </a:solidFill>
                 <a:latin typeface="Hiragino Sans GB" panose="020B0300000000000000" charset="-122"/>
                 <a:ea typeface="Hiragino Sans GB" panose="020B0300000000000000" charset="-122"/>
@@ -11564,6 +11822,7 @@
           </a:lstStyle>
           <a:p>
             <a:pPr>
+              <a:buNone/>
               <a:defRPr sz="1725" b="1">
                 <a:solidFill>
                   <a:srgbClr val="385E7D"/>
@@ -11574,9 +11833,9 @@
               </a:defRPr>
             </a:pPr>
             <a:r>
-              <a:rPr sz="1725" b="1">
-                <a:solidFill>
-                  <a:srgbClr val="385E7D"/>
+              <a:rPr sz="1800" b="1">
+                <a:solidFill>
+                  <a:srgbClr val="0A6676"/>
                 </a:solidFill>
                 <a:latin typeface="Hiragino Sans GB" panose="020B0300000000000000" charset="-122"/>
                 <a:ea typeface="Hiragino Sans GB" panose="020B0300000000000000" charset="-122"/>
@@ -11623,7 +11882,7 @@
             <a:defPPr>
               <a:defRPr sz="1425" b="0">
                 <a:solidFill>
-                  <a:srgbClr val="24364B"/>
+                  <a:srgbClr val="1F364D"/>
                 </a:solidFill>
                 <a:latin typeface="Hiragino Sans GB" panose="020B0300000000000000" charset="-122"/>
                 <a:ea typeface="Hiragino Sans GB" panose="020B0300000000000000" charset="-122"/>
@@ -11633,6 +11892,7 @@
           </a:lstStyle>
           <a:p>
             <a:pPr>
+              <a:buNone/>
               <a:defRPr sz="1425" b="0">
                 <a:solidFill>
                   <a:srgbClr val="24364B"/>
@@ -11645,13 +11905,13 @@
             <a:r>
               <a:rPr sz="1425" b="0">
                 <a:solidFill>
-                  <a:srgbClr val="24364B"/>
+                  <a:srgbClr val="1F364D"/>
                 </a:solidFill>
                 <a:latin typeface="Hiragino Sans GB" panose="020B0300000000000000" charset="-122"/>
                 <a:ea typeface="Hiragino Sans GB" panose="020B0300000000000000" charset="-122"/>
                 <a:cs typeface="Hiragino Sans GB" panose="020B0300000000000000" charset="-122"/>
               </a:rPr>
-              <a:t>OpenAlex／DBLP 本轮验证元数据请求；论文副本另核许可。</a:t>
+              <a:t>OpenAlex、DBLP 已验证单条元数据请求；论文全文另核许可。</a:t>
             </a:r>
             <a:endParaRPr sz="1425" b="0">
               <a:solidFill>
@@ -11667,6 +11927,7 @@
           </a:p>
           <a:p>
             <a:pPr>
+              <a:buNone/>
               <a:defRPr sz="1425" b="0">
                 <a:solidFill>
                   <a:srgbClr val="24364B"/>
@@ -11679,13 +11940,13 @@
             <a:r>
               <a:rPr sz="1425" b="0">
                 <a:solidFill>
-                  <a:srgbClr val="24364B"/>
+                  <a:srgbClr val="1F364D"/>
                 </a:solidFill>
                 <a:latin typeface="Hiragino Sans GB" panose="020B0300000000000000" charset="-122"/>
                 <a:ea typeface="Hiragino Sans GB" panose="020B0300000000000000" charset="-122"/>
                 <a:cs typeface="Hiragino Sans GB" panose="020B0300000000000000" charset="-122"/>
               </a:rPr>
-              <a:t>知网仅作授权范围内人工核对及单条导出。专利系统、学院与会议站点的批量获取条件仍待确认。</a:t>
+              <a:t>知网限授权范围内人工核对；专利系统、学院及会议站点的批量获取条件待核。</a:t>
             </a:r>
             <a:endParaRPr sz="1425" b="0">
               <a:solidFill>
@@ -11701,6 +11962,7 @@
           </a:p>
           <a:p>
             <a:pPr>
+              <a:buNone/>
               <a:defRPr sz="1425" b="0">
                 <a:solidFill>
                   <a:srgbClr val="24364B"/>
@@ -11713,13 +11975,13 @@
             <a:r>
               <a:rPr sz="1425" b="0">
                 <a:solidFill>
-                  <a:srgbClr val="24364B"/>
+                  <a:srgbClr val="1F364D"/>
                 </a:solidFill>
                 <a:latin typeface="Hiragino Sans GB" panose="020B0300000000000000" charset="-122"/>
                 <a:ea typeface="Hiragino Sans GB" panose="020B0300000000000000" charset="-122"/>
                 <a:cs typeface="Hiragino Sans GB" panose="020B0300000000000000" charset="-122"/>
               </a:rPr>
-              <a:t>每条候选记录保存来源 URL、获取时间、原值及授权判断。</a:t>
+              <a:t>每条候选保存来源、时间、原值和授权判断。</a:t>
             </a:r>
             <a:endParaRPr sz="1425" b="0">
               <a:solidFill>
@@ -11749,7 +12011,7 @@
             <a:avLst/>
           </a:prstGeom>
           <a:solidFill>
-            <a:srgbClr val="EAF1F8"/>
+            <a:srgbClr val="DDEEF2"/>
           </a:solidFill>
           <a:ln w="0">
             <a:noFill/>
@@ -11785,7 +12047,7 @@
             <a:defPPr>
               <a:defRPr sz="1350" b="0">
                 <a:solidFill>
-                  <a:srgbClr val="24364B"/>
+                  <a:srgbClr val="1F364D"/>
                 </a:solidFill>
                 <a:latin typeface="Hiragino Sans GB" panose="020B0300000000000000" charset="-122"/>
                 <a:ea typeface="Hiragino Sans GB" panose="020B0300000000000000" charset="-122"/>
@@ -11795,6 +12057,7 @@
           </a:lstStyle>
           <a:p>
             <a:pPr>
+              <a:buNone/>
               <a:defRPr sz="1350" b="0">
                 <a:solidFill>
                   <a:srgbClr val="24364B"/>
@@ -11807,13 +12070,13 @@
             <a:r>
               <a:rPr sz="1350" b="0">
                 <a:solidFill>
-                  <a:srgbClr val="24364B"/>
+                  <a:srgbClr val="1F364D"/>
                 </a:solidFill>
                 <a:latin typeface="Hiragino Sans GB" panose="020B0300000000000000" charset="-122"/>
                 <a:ea typeface="Hiragino Sans GB" panose="020B0300000000000000" charset="-122"/>
                 <a:cs typeface="Hiragino Sans GB" panose="020B0300000000000000" charset="-122"/>
               </a:rPr>
-              <a:t>公开可读不自动等于可批量采集；本轮没有对未授权站点执行爬虫。</a:t>
+              <a:t>公开页面可读，不等于取得批量采集或附件再发布许可。</a:t>
             </a:r>
             <a:endParaRPr sz="1350" b="0">
               <a:solidFill>
@@ -11878,9 +12141,9 @@
           <a:bodyPr anchor="ctr"/>
           <a:lstStyle>
             <a:defPPr>
-              <a:defRPr sz="2475" b="1">
-                <a:solidFill>
-                  <a:srgbClr val="24364B"/>
+              <a:defRPr sz="2700" b="1">
+                <a:solidFill>
+                  <a:srgbClr val="102A43"/>
                 </a:solidFill>
                 <a:latin typeface="Hiragino Sans GB" panose="020B0300000000000000" charset="-122"/>
                 <a:ea typeface="Hiragino Sans GB" panose="020B0300000000000000" charset="-122"/>
@@ -11890,6 +12153,7 @@
           </a:lstStyle>
           <a:p>
             <a:pPr>
+              <a:buNone/>
               <a:defRPr sz="2475" b="1">
                 <a:solidFill>
                   <a:srgbClr val="24364B"/>
@@ -11900,15 +12164,15 @@
               </a:defRPr>
             </a:pPr>
             <a:r>
-              <a:rPr sz="2475" b="1">
-                <a:solidFill>
-                  <a:srgbClr val="24364B"/>
+              <a:rPr sz="2700" b="1">
+                <a:solidFill>
+                  <a:srgbClr val="102A43"/>
                 </a:solidFill>
                 <a:latin typeface="Hiragino Sans GB" panose="020B0300000000000000" charset="-122"/>
                 <a:ea typeface="Hiragino Sans GB" panose="020B0300000000000000" charset="-122"/>
                 <a:cs typeface="Hiragino Sans GB" panose="020B0300000000000000" charset="-122"/>
               </a:rPr>
-              <a:t>调研结论如何转成需求</a:t>
+              <a:t>从观察到需求：同时保留证据边界</a:t>
             </a:r>
             <a:endParaRPr sz="2475" b="1">
               <a:solidFill>
@@ -11932,13 +12196,13 @@
         <p:spPr>
           <a:xfrm>
             <a:off x="590550" y="1057275"/>
-            <a:ext cx="11010900" cy="19050"/>
+            <a:ext cx="11010900" cy="38100"/>
           </a:xfrm>
           <a:prstGeom prst="rect">
             <a:avLst/>
           </a:prstGeom>
           <a:solidFill>
-            <a:srgbClr val="C9D9E5"/>
+            <a:srgbClr val="087E8B"/>
           </a:solidFill>
           <a:ln w="0">
             <a:noFill/>
@@ -11974,7 +12238,7 @@
             <a:defPPr>
               <a:defRPr sz="1050" b="0">
                 <a:solidFill>
-                  <a:srgbClr val="5D7183"/>
+                  <a:srgbClr val="62788B"/>
                 </a:solidFill>
                 <a:latin typeface="Hiragino Sans GB" panose="020B0300000000000000" charset="-122"/>
                 <a:ea typeface="Hiragino Sans GB" panose="020B0300000000000000" charset="-122"/>
@@ -11984,6 +12248,7 @@
           </a:lstStyle>
           <a:p>
             <a:pPr>
+              <a:buNone/>
               <a:defRPr sz="1050" b="0">
                 <a:solidFill>
                   <a:srgbClr val="5D7183"/>
@@ -11996,7 +12261,7 @@
             <a:r>
               <a:rPr sz="1050" b="0">
                 <a:solidFill>
-                  <a:srgbClr val="5D7183"/>
+                  <a:srgbClr val="62788B"/>
                 </a:solidFill>
                 <a:latin typeface="Hiragino Sans GB" panose="020B0300000000000000" charset="-122"/>
                 <a:ea typeface="Hiragino Sans GB" panose="020B0300000000000000" charset="-122"/>
@@ -12043,7 +12308,7 @@
             <a:defPPr>
               <a:defRPr sz="975" b="0">
                 <a:solidFill>
-                  <a:srgbClr val="5D7183"/>
+                  <a:srgbClr val="62788B"/>
                 </a:solidFill>
                 <a:latin typeface="Hiragino Sans GB" panose="020B0300000000000000" charset="-122"/>
                 <a:ea typeface="Hiragino Sans GB" panose="020B0300000000000000" charset="-122"/>
@@ -12053,6 +12318,7 @@
           </a:lstStyle>
           <a:p>
             <a:pPr>
+              <a:buNone/>
               <a:defRPr sz="975" b="0">
                 <a:solidFill>
                   <a:srgbClr val="5D7183"/>
@@ -12065,7 +12331,7 @@
             <a:r>
               <a:rPr sz="975" b="0">
                 <a:solidFill>
-                  <a:srgbClr val="5D7183"/>
+                  <a:srgbClr val="62788B"/>
                 </a:solidFill>
                 <a:latin typeface="Hiragino Sans GB" panose="020B0300000000000000" charset="-122"/>
                 <a:ea typeface="Hiragino Sans GB" panose="020B0300000000000000" charset="-122"/>
@@ -12101,7 +12367,7 @@
             <a:avLst/>
           </a:prstGeom>
           <a:solidFill>
-            <a:srgbClr val="EAF1F8"/>
+            <a:srgbClr val="DDEEF2"/>
           </a:solidFill>
           <a:ln w="9525">
             <a:solidFill>
@@ -12139,7 +12405,7 @@
             <a:defPPr>
               <a:defRPr sz="1350" b="1">
                 <a:solidFill>
-                  <a:srgbClr val="385E7D"/>
+                  <a:srgbClr val="0A6676"/>
                 </a:solidFill>
                 <a:latin typeface="Hiragino Sans GB" panose="020B0300000000000000" charset="-122"/>
                 <a:ea typeface="Hiragino Sans GB" panose="020B0300000000000000" charset="-122"/>
@@ -12149,6 +12415,7 @@
           </a:lstStyle>
           <a:p>
             <a:pPr>
+              <a:buNone/>
               <a:defRPr sz="1350" b="1">
                 <a:solidFill>
                   <a:srgbClr val="385E7D"/>
@@ -12161,7 +12428,7 @@
             <a:r>
               <a:rPr sz="1350" b="1">
                 <a:solidFill>
-                  <a:srgbClr val="385E7D"/>
+                  <a:srgbClr val="0A6676"/>
                 </a:solidFill>
                 <a:latin typeface="Hiragino Sans GB" panose="020B0300000000000000" charset="-122"/>
                 <a:ea typeface="Hiragino Sans GB" panose="020B0300000000000000" charset="-122"/>
@@ -12197,7 +12464,7 @@
             <a:avLst/>
           </a:prstGeom>
           <a:solidFill>
-            <a:srgbClr val="EAF1F8"/>
+            <a:srgbClr val="DDEEF2"/>
           </a:solidFill>
           <a:ln w="9525">
             <a:solidFill>
@@ -12235,7 +12502,7 @@
             <a:defPPr>
               <a:defRPr sz="1350" b="1">
                 <a:solidFill>
-                  <a:srgbClr val="385E7D"/>
+                  <a:srgbClr val="0A6676"/>
                 </a:solidFill>
                 <a:latin typeface="Hiragino Sans GB" panose="020B0300000000000000" charset="-122"/>
                 <a:ea typeface="Hiragino Sans GB" panose="020B0300000000000000" charset="-122"/>
@@ -12245,6 +12512,7 @@
           </a:lstStyle>
           <a:p>
             <a:pPr>
+              <a:buNone/>
               <a:defRPr sz="1350" b="1">
                 <a:solidFill>
                   <a:srgbClr val="385E7D"/>
@@ -12257,7 +12525,7 @@
             <a:r>
               <a:rPr sz="1350" b="1">
                 <a:solidFill>
-                  <a:srgbClr val="385E7D"/>
+                  <a:srgbClr val="0A6676"/>
                 </a:solidFill>
                 <a:latin typeface="Hiragino Sans GB" panose="020B0300000000000000" charset="-122"/>
                 <a:ea typeface="Hiragino Sans GB" panose="020B0300000000000000" charset="-122"/>
@@ -12293,7 +12561,7 @@
             <a:avLst/>
           </a:prstGeom>
           <a:solidFill>
-            <a:srgbClr val="EAF1F8"/>
+            <a:srgbClr val="DDEEF2"/>
           </a:solidFill>
           <a:ln w="9525">
             <a:solidFill>
@@ -12331,7 +12599,7 @@
             <a:defPPr>
               <a:defRPr sz="1350" b="1">
                 <a:solidFill>
-                  <a:srgbClr val="385E7D"/>
+                  <a:srgbClr val="0A6676"/>
                 </a:solidFill>
                 <a:latin typeface="Hiragino Sans GB" panose="020B0300000000000000" charset="-122"/>
                 <a:ea typeface="Hiragino Sans GB" panose="020B0300000000000000" charset="-122"/>
@@ -12341,6 +12609,7 @@
           </a:lstStyle>
           <a:p>
             <a:pPr>
+              <a:buNone/>
               <a:defRPr sz="1350" b="1">
                 <a:solidFill>
                   <a:srgbClr val="385E7D"/>
@@ -12353,7 +12622,7 @@
             <a:r>
               <a:rPr sz="1350" b="1">
                 <a:solidFill>
-                  <a:srgbClr val="385E7D"/>
+                  <a:srgbClr val="0A6676"/>
                 </a:solidFill>
                 <a:latin typeface="Hiragino Sans GB" panose="020B0300000000000000" charset="-122"/>
                 <a:ea typeface="Hiragino Sans GB" panose="020B0300000000000000" charset="-122"/>
@@ -12393,7 +12662,7 @@
           </a:solidFill>
           <a:ln w="9525">
             <a:solidFill>
-              <a:srgbClr val="C9D9E5"/>
+              <a:srgbClr val="BBD1DD"/>
             </a:solidFill>
             <a:prstDash val="solid"/>
           </a:ln>
@@ -12427,7 +12696,7 @@
             <a:defPPr>
               <a:defRPr sz="1275" b="1">
                 <a:solidFill>
-                  <a:srgbClr val="24364B"/>
+                  <a:srgbClr val="1F364D"/>
                 </a:solidFill>
                 <a:latin typeface="Hiragino Sans GB" panose="020B0300000000000000" charset="-122"/>
                 <a:ea typeface="Hiragino Sans GB" panose="020B0300000000000000" charset="-122"/>
@@ -12437,6 +12706,7 @@
           </a:lstStyle>
           <a:p>
             <a:pPr>
+              <a:buNone/>
               <a:defRPr sz="1275" b="1">
                 <a:solidFill>
                   <a:srgbClr val="24364B"/>
@@ -12449,13 +12719,13 @@
             <a:r>
               <a:rPr sz="1275" b="1">
                 <a:solidFill>
-                  <a:srgbClr val="24364B"/>
+                  <a:srgbClr val="1F364D"/>
                 </a:solidFill>
                 <a:latin typeface="Hiragino Sans GB" panose="020B0300000000000000" charset="-122"/>
                 <a:ea typeface="Hiragino Sans GB" panose="020B0300000000000000" charset="-122"/>
                 <a:cs typeface="Hiragino Sans GB" panose="020B0300000000000000" charset="-122"/>
               </a:rPr>
-              <a:t>问卷与宽词任务暴露查找成本</a:t>
+              <a:t>问卷和宽词任务显示查找成本</a:t>
             </a:r>
             <a:endParaRPr sz="1275" b="1">
               <a:solidFill>
@@ -12489,7 +12759,7 @@
           </a:solidFill>
           <a:ln w="9525">
             <a:solidFill>
-              <a:srgbClr val="C9D9E5"/>
+              <a:srgbClr val="BBD1DD"/>
             </a:solidFill>
             <a:prstDash val="solid"/>
           </a:ln>
@@ -12523,7 +12793,7 @@
             <a:defPPr>
               <a:defRPr sz="1275" b="0">
                 <a:solidFill>
-                  <a:srgbClr val="24364B"/>
+                  <a:srgbClr val="1F364D"/>
                 </a:solidFill>
                 <a:latin typeface="Hiragino Sans GB" panose="020B0300000000000000" charset="-122"/>
                 <a:ea typeface="Hiragino Sans GB" panose="020B0300000000000000" charset="-122"/>
@@ -12533,6 +12803,7 @@
           </a:lstStyle>
           <a:p>
             <a:pPr>
+              <a:buNone/>
               <a:defRPr sz="1275" b="0">
                 <a:solidFill>
                   <a:srgbClr val="24364B"/>
@@ -12545,13 +12816,13 @@
             <a:r>
               <a:rPr sz="1275" b="0">
                 <a:solidFill>
-                  <a:srgbClr val="24364B"/>
+                  <a:srgbClr val="1F364D"/>
                 </a:solidFill>
                 <a:latin typeface="Hiragino Sans GB" panose="020B0300000000000000" charset="-122"/>
                 <a:ea typeface="Hiragino Sans GB" panose="020B0300000000000000" charset="-122"/>
                 <a:cs typeface="Hiragino Sans GB" panose="020B0300000000000000" charset="-122"/>
               </a:rPr>
-              <a:t>R02 组合检索、条件回显</a:t>
+              <a:t>R02 组合检索与条件回显</a:t>
             </a:r>
             <a:endParaRPr sz="1275" b="0">
               <a:solidFill>
@@ -12585,7 +12856,7 @@
           </a:solidFill>
           <a:ln w="9525">
             <a:solidFill>
-              <a:srgbClr val="C9D9E5"/>
+              <a:srgbClr val="BBD1DD"/>
             </a:solidFill>
             <a:prstDash val="solid"/>
           </a:ln>
@@ -12619,7 +12890,7 @@
             <a:defPPr>
               <a:defRPr sz="1275" b="0">
                 <a:solidFill>
-                  <a:srgbClr val="24364B"/>
+                  <a:srgbClr val="1F364D"/>
                 </a:solidFill>
                 <a:latin typeface="Hiragino Sans GB" panose="020B0300000000000000" charset="-122"/>
                 <a:ea typeface="Hiragino Sans GB" panose="020B0300000000000000" charset="-122"/>
@@ -12629,6 +12900,7 @@
           </a:lstStyle>
           <a:p>
             <a:pPr>
+              <a:buNone/>
               <a:defRPr sz="1275" b="0">
                 <a:solidFill>
                   <a:srgbClr val="24364B"/>
@@ -12641,13 +12913,13 @@
             <a:r>
               <a:rPr sz="1275" b="0">
                 <a:solidFill>
-                  <a:srgbClr val="24364B"/>
+                  <a:srgbClr val="1F364D"/>
                 </a:solidFill>
                 <a:latin typeface="Hiragino Sans GB" panose="020B0300000000000000" charset="-122"/>
                 <a:ea typeface="Hiragino Sans GB" panose="020B0300000000000000" charset="-122"/>
                 <a:cs typeface="Hiragino Sans GB" panose="020B0300000000000000" charset="-122"/>
               </a:rPr>
-              <a:t>普通用户样本 n=20</a:t>
+              <a:t>仅代表学生样本 n=20</a:t>
             </a:r>
             <a:endParaRPr sz="1275" b="0">
               <a:solidFill>
@@ -12681,7 +12953,7 @@
           </a:solidFill>
           <a:ln w="9525">
             <a:solidFill>
-              <a:srgbClr val="C9D9E5"/>
+              <a:srgbClr val="BBD1DD"/>
             </a:solidFill>
             <a:prstDash val="solid"/>
           </a:ln>
@@ -12715,7 +12987,7 @@
             <a:defPPr>
               <a:defRPr sz="1275" b="1">
                 <a:solidFill>
-                  <a:srgbClr val="24364B"/>
+                  <a:srgbClr val="1F364D"/>
                 </a:solidFill>
                 <a:latin typeface="Hiragino Sans GB" panose="020B0300000000000000" charset="-122"/>
                 <a:ea typeface="Hiragino Sans GB" panose="020B0300000000000000" charset="-122"/>
@@ -12725,6 +12997,7 @@
           </a:lstStyle>
           <a:p>
             <a:pPr>
+              <a:buNone/>
               <a:defRPr sz="1275" b="1">
                 <a:solidFill>
                   <a:srgbClr val="24364B"/>
@@ -12737,7 +13010,7 @@
             <a:r>
               <a:rPr sz="1275" b="1">
                 <a:solidFill>
-                  <a:srgbClr val="24364B"/>
+                  <a:srgbClr val="1F364D"/>
                 </a:solidFill>
                 <a:latin typeface="Hiragino Sans GB" panose="020B0300000000000000" charset="-122"/>
                 <a:ea typeface="Hiragino Sans GB" panose="020B0300000000000000" charset="-122"/>
@@ -12777,7 +13050,7 @@
           </a:solidFill>
           <a:ln w="9525">
             <a:solidFill>
-              <a:srgbClr val="C9D9E5"/>
+              <a:srgbClr val="BBD1DD"/>
             </a:solidFill>
             <a:prstDash val="solid"/>
           </a:ln>
@@ -12811,7 +13084,7 @@
             <a:defPPr>
               <a:defRPr sz="1275" b="0">
                 <a:solidFill>
-                  <a:srgbClr val="24364B"/>
+                  <a:srgbClr val="1F364D"/>
                 </a:solidFill>
                 <a:latin typeface="Hiragino Sans GB" panose="020B0300000000000000" charset="-122"/>
                 <a:ea typeface="Hiragino Sans GB" panose="020B0300000000000000" charset="-122"/>
@@ -12821,6 +13094,7 @@
           </a:lstStyle>
           <a:p>
             <a:pPr>
+              <a:buNone/>
               <a:defRPr sz="1275" b="0">
                 <a:solidFill>
                   <a:srgbClr val="24364B"/>
@@ -12833,13 +13107,13 @@
             <a:r>
               <a:rPr sz="1275" b="0">
                 <a:solidFill>
-                  <a:srgbClr val="24364B"/>
+                  <a:srgbClr val="1F364D"/>
                 </a:solidFill>
                 <a:latin typeface="Hiragino Sans GB" panose="020B0300000000000000" charset="-122"/>
                 <a:ea typeface="Hiragino Sans GB" panose="020B0300000000000000" charset="-122"/>
                 <a:cs typeface="Hiragino Sans GB" panose="020B0300000000000000" charset="-122"/>
               </a:rPr>
-              <a:t>R04 区分零结果与失败</a:t>
+              <a:t>R04 分开显示零结果与失败</a:t>
             </a:r>
             <a:endParaRPr sz="1275" b="0">
               <a:solidFill>
@@ -12873,7 +13147,7 @@
           </a:solidFill>
           <a:ln w="9525">
             <a:solidFill>
-              <a:srgbClr val="C9D9E5"/>
+              <a:srgbClr val="BBD1DD"/>
             </a:solidFill>
             <a:prstDash val="solid"/>
           </a:ln>
@@ -12907,7 +13181,7 @@
             <a:defPPr>
               <a:defRPr sz="1275" b="0">
                 <a:solidFill>
-                  <a:srgbClr val="24364B"/>
+                  <a:srgbClr val="1F364D"/>
                 </a:solidFill>
                 <a:latin typeface="Hiragino Sans GB" panose="020B0300000000000000" charset="-122"/>
                 <a:ea typeface="Hiragino Sans GB" panose="020B0300000000000000" charset="-122"/>
@@ -12917,6 +13191,7 @@
           </a:lstStyle>
           <a:p>
             <a:pPr>
+              <a:buNone/>
               <a:defRPr sz="1275" b="0">
                 <a:solidFill>
                   <a:srgbClr val="24364B"/>
@@ -12929,13 +13204,13 @@
             <a:r>
               <a:rPr sz="1275" b="0">
                 <a:solidFill>
-                  <a:srgbClr val="24364B"/>
+                  <a:srgbClr val="1F364D"/>
                 </a:solidFill>
                 <a:latin typeface="Hiragino Sans GB" panose="020B0300000000000000" charset="-122"/>
                 <a:ea typeface="Hiragino Sans GB" panose="020B0300000000000000" charset="-122"/>
                 <a:cs typeface="Hiragino Sans GB" panose="020B0300000000000000" charset="-122"/>
               </a:rPr>
-              <a:t>不推断数据库零收录</a:t>
+              <a:t>不能推断数据库零收录</a:t>
             </a:r>
             <a:endParaRPr sz="1275" b="0">
               <a:solidFill>
@@ -12969,7 +13244,7 @@
           </a:solidFill>
           <a:ln w="9525">
             <a:solidFill>
-              <a:srgbClr val="C9D9E5"/>
+              <a:srgbClr val="BBD1DD"/>
             </a:solidFill>
             <a:prstDash val="solid"/>
           </a:ln>
@@ -13003,7 +13278,7 @@
             <a:defPPr>
               <a:defRPr sz="1275" b="1">
                 <a:solidFill>
-                  <a:srgbClr val="24364B"/>
+                  <a:srgbClr val="1F364D"/>
                 </a:solidFill>
                 <a:latin typeface="Hiragino Sans GB" panose="020B0300000000000000" charset="-122"/>
                 <a:ea typeface="Hiragino Sans GB" panose="020B0300000000000000" charset="-122"/>
@@ -13013,6 +13288,7 @@
           </a:lstStyle>
           <a:p>
             <a:pPr>
+              <a:buNone/>
               <a:defRPr sz="1275" b="1">
                 <a:solidFill>
                   <a:srgbClr val="24364B"/>
@@ -13025,13 +13301,13 @@
             <a:r>
               <a:rPr sz="1275" b="1">
                 <a:solidFill>
-                  <a:srgbClr val="24364B"/>
+                  <a:srgbClr val="1F364D"/>
                 </a:solidFill>
                 <a:latin typeface="Hiragino Sans GB" panose="020B0300000000000000" charset="-122"/>
                 <a:ea typeface="Hiragino Sans GB" panose="020B0300000000000000" charset="-122"/>
                 <a:cs typeface="Hiragino Sans GB" panose="020B0300000000000000" charset="-122"/>
               </a:rPr>
-              <a:t>五条论文跨源；P3 返回两条记录</a:t>
+              <a:t>5 条论文跨源，P3 同题两记录</a:t>
             </a:r>
             <a:endParaRPr sz="1275" b="1">
               <a:solidFill>
@@ -13065,7 +13341,7 @@
           </a:solidFill>
           <a:ln w="9525">
             <a:solidFill>
-              <a:srgbClr val="C9D9E5"/>
+              <a:srgbClr val="BBD1DD"/>
             </a:solidFill>
             <a:prstDash val="solid"/>
           </a:ln>
@@ -13099,7 +13375,7 @@
             <a:defPPr>
               <a:defRPr sz="1275" b="0">
                 <a:solidFill>
-                  <a:srgbClr val="24364B"/>
+                  <a:srgbClr val="1F364D"/>
                 </a:solidFill>
                 <a:latin typeface="Hiragino Sans GB" panose="020B0300000000000000" charset="-122"/>
                 <a:ea typeface="Hiragino Sans GB" panose="020B0300000000000000" charset="-122"/>
@@ -13109,6 +13385,7 @@
           </a:lstStyle>
           <a:p>
             <a:pPr>
+              <a:buNone/>
               <a:defRPr sz="1275" b="0">
                 <a:solidFill>
                   <a:srgbClr val="24364B"/>
@@ -13121,13 +13398,13 @@
             <a:r>
               <a:rPr sz="1275" b="0">
                 <a:solidFill>
-                  <a:srgbClr val="24364B"/>
+                  <a:srgbClr val="1F364D"/>
                 </a:solidFill>
                 <a:latin typeface="Hiragino Sans GB" panose="020B0300000000000000" charset="-122"/>
                 <a:ea typeface="Hiragino Sans GB" panose="020B0300000000000000" charset="-122"/>
                 <a:cs typeface="Hiragino Sans GB" panose="020B0300000000000000" charset="-122"/>
               </a:rPr>
-              <a:t>R03 来源留痕、去重核验</a:t>
+              <a:t>R03 来源留痕与去重核验</a:t>
             </a:r>
             <a:endParaRPr sz="1275" b="0">
               <a:solidFill>
@@ -13161,7 +13438,7 @@
           </a:solidFill>
           <a:ln w="9525">
             <a:solidFill>
-              <a:srgbClr val="C9D9E5"/>
+              <a:srgbClr val="BBD1DD"/>
             </a:solidFill>
             <a:prstDash val="solid"/>
           </a:ln>
@@ -13195,7 +13472,7 @@
             <a:defPPr>
               <a:defRPr sz="1275" b="0">
                 <a:solidFill>
-                  <a:srgbClr val="24364B"/>
+                  <a:srgbClr val="1F364D"/>
                 </a:solidFill>
                 <a:latin typeface="Hiragino Sans GB" panose="020B0300000000000000" charset="-122"/>
                 <a:ea typeface="Hiragino Sans GB" panose="020B0300000000000000" charset="-122"/>
@@ -13205,6 +13482,7 @@
           </a:lstStyle>
           <a:p>
             <a:pPr>
+              <a:buNone/>
               <a:defRPr sz="1275" b="0">
                 <a:solidFill>
                   <a:srgbClr val="24364B"/>
@@ -13217,13 +13495,13 @@
             <a:r>
               <a:rPr sz="1275" b="0">
                 <a:solidFill>
-                  <a:srgbClr val="24364B"/>
+                  <a:srgbClr val="1F364D"/>
                 </a:solidFill>
                 <a:latin typeface="Hiragino Sans GB" panose="020B0300000000000000" charset="-122"/>
                 <a:ea typeface="Hiragino Sans GB" panose="020B0300000000000000" charset="-122"/>
                 <a:cs typeface="Hiragino Sans GB" panose="020B0300000000000000" charset="-122"/>
               </a:rPr>
-              <a:t>同题与同名不自动合并</a:t>
+              <a:t>版本和作者关系需人工核对</a:t>
             </a:r>
             <a:endParaRPr sz="1275" b="0">
               <a:solidFill>
@@ -13257,7 +13535,7 @@
           </a:solidFill>
           <a:ln w="9525">
             <a:solidFill>
-              <a:srgbClr val="C9D9E5"/>
+              <a:srgbClr val="BBD1DD"/>
             </a:solidFill>
             <a:prstDash val="solid"/>
           </a:ln>
@@ -13291,7 +13569,7 @@
             <a:defPPr>
               <a:defRPr sz="1275" b="1">
                 <a:solidFill>
-                  <a:srgbClr val="24364B"/>
+                  <a:srgbClr val="1F364D"/>
                 </a:solidFill>
                 <a:latin typeface="Hiragino Sans GB" panose="020B0300000000000000" charset="-122"/>
                 <a:ea typeface="Hiragino Sans GB" panose="020B0300000000000000" charset="-122"/>
@@ -13301,6 +13579,7 @@
           </a:lstStyle>
           <a:p>
             <a:pPr>
+              <a:buNone/>
               <a:defRPr sz="1275" b="1">
                 <a:solidFill>
                   <a:srgbClr val="24364B"/>
@@ -13313,13 +13592,13 @@
             <a:r>
               <a:rPr sz="1275" b="1">
                 <a:solidFill>
-                  <a:srgbClr val="24364B"/>
+                  <a:srgbClr val="1F364D"/>
                 </a:solidFill>
                 <a:latin typeface="Hiragino Sans GB" panose="020B0300000000000000" charset="-122"/>
                 <a:ea typeface="Hiragino Sans GB" panose="020B0300000000000000" charset="-122"/>
                 <a:cs typeface="Hiragino Sans GB" panose="020B0300000000000000" charset="-122"/>
               </a:rPr>
-              <a:t>B组20条样本存在字段缺失</a:t>
+              <a:t>B 组 20 条页面中 13 条未显示 DOI</a:t>
             </a:r>
             <a:endParaRPr sz="1275" b="1">
               <a:solidFill>
@@ -13353,7 +13632,7 @@
           </a:solidFill>
           <a:ln w="9525">
             <a:solidFill>
-              <a:srgbClr val="C9D9E5"/>
+              <a:srgbClr val="BBD1DD"/>
             </a:solidFill>
             <a:prstDash val="solid"/>
           </a:ln>
@@ -13387,7 +13666,7 @@
             <a:defPPr>
               <a:defRPr sz="1275" b="0">
                 <a:solidFill>
-                  <a:srgbClr val="24364B"/>
+                  <a:srgbClr val="1F364D"/>
                 </a:solidFill>
                 <a:latin typeface="Hiragino Sans GB" panose="020B0300000000000000" charset="-122"/>
                 <a:ea typeface="Hiragino Sans GB" panose="020B0300000000000000" charset="-122"/>
@@ -13397,6 +13676,7 @@
           </a:lstStyle>
           <a:p>
             <a:pPr>
+              <a:buNone/>
               <a:defRPr sz="1275" b="0">
                 <a:solidFill>
                   <a:srgbClr val="24364B"/>
@@ -13409,13 +13689,13 @@
             <a:r>
               <a:rPr sz="1275" b="0">
                 <a:solidFill>
-                  <a:srgbClr val="24364B"/>
+                  <a:srgbClr val="1F364D"/>
                 </a:solidFill>
                 <a:latin typeface="Hiragino Sans GB" panose="020B0300000000000000" charset="-122"/>
                 <a:ea typeface="Hiragino Sans GB" panose="020B0300000000000000" charset="-122"/>
                 <a:cs typeface="Hiragino Sans GB" panose="020B0300000000000000" charset="-122"/>
               </a:rPr>
-              <a:t>R08 DOI／关键词可缺失</a:t>
+              <a:t>R08 字段可缺失并标状态</a:t>
             </a:r>
             <a:endParaRPr sz="1275" b="0">
               <a:solidFill>
@@ -13449,7 +13729,7 @@
           </a:solidFill>
           <a:ln w="9525">
             <a:solidFill>
-              <a:srgbClr val="C9D9E5"/>
+              <a:srgbClr val="BBD1DD"/>
             </a:solidFill>
             <a:prstDash val="solid"/>
           </a:ln>
@@ -13483,7 +13763,7 @@
             <a:defPPr>
               <a:defRPr sz="1275" b="0">
                 <a:solidFill>
-                  <a:srgbClr val="24364B"/>
+                  <a:srgbClr val="1F364D"/>
                 </a:solidFill>
                 <a:latin typeface="Hiragino Sans GB" panose="020B0300000000000000" charset="-122"/>
                 <a:ea typeface="Hiragino Sans GB" panose="020B0300000000000000" charset="-122"/>
@@ -13493,6 +13773,7 @@
           </a:lstStyle>
           <a:p>
             <a:pPr>
+              <a:buNone/>
               <a:defRPr sz="1275" b="0">
                 <a:solidFill>
                   <a:srgbClr val="24364B"/>
@@ -13505,13 +13786,13 @@
             <a:r>
               <a:rPr sz="1275" b="0">
                 <a:solidFill>
-                  <a:srgbClr val="24364B"/>
+                  <a:srgbClr val="1F364D"/>
                 </a:solidFill>
                 <a:latin typeface="Hiragino Sans GB" panose="020B0300000000000000" charset="-122"/>
                 <a:ea typeface="Hiragino Sans GB" panose="020B0300000000000000" charset="-122"/>
                 <a:cs typeface="Hiragino Sans GB" panose="020B0300000000000000" charset="-122"/>
               </a:rPr>
-              <a:t>抽样不外推完整率</a:t>
+              <a:t>页面未显示不等于原文没有</a:t>
             </a:r>
             <a:endParaRPr sz="1275" b="0">
               <a:solidFill>
@@ -13545,7 +13826,7 @@
           </a:solidFill>
           <a:ln w="9525">
             <a:solidFill>
-              <a:srgbClr val="C9D9E5"/>
+              <a:srgbClr val="BBD1DD"/>
             </a:solidFill>
             <a:prstDash val="solid"/>
           </a:ln>
@@ -13579,7 +13860,7 @@
             <a:defPPr>
               <a:defRPr sz="1275" b="1">
                 <a:solidFill>
-                  <a:srgbClr val="24364B"/>
+                  <a:srgbClr val="1F364D"/>
                 </a:solidFill>
                 <a:latin typeface="Hiragino Sans GB" panose="020B0300000000000000" charset="-122"/>
                 <a:ea typeface="Hiragino Sans GB" panose="020B0300000000000000" charset="-122"/>
@@ -13589,6 +13870,7 @@
           </a:lstStyle>
           <a:p>
             <a:pPr>
+              <a:buNone/>
               <a:defRPr sz="1275" b="1">
                 <a:solidFill>
                   <a:srgbClr val="24364B"/>
@@ -13601,13 +13883,13 @@
             <a:r>
               <a:rPr sz="1275" b="1">
                 <a:solidFill>
-                  <a:srgbClr val="24364B"/>
+                  <a:srgbClr val="1F364D"/>
                 </a:solidFill>
                 <a:latin typeface="Hiragino Sans GB" panose="020B0300000000000000" charset="-122"/>
                 <a:ea typeface="Hiragino Sans GB" panose="020B0300000000000000" charset="-122"/>
                 <a:cs typeface="Hiragino Sans GB" panose="020B0300000000000000" charset="-122"/>
               </a:rPr>
-              <a:t>公开接口可得，采集许可不同</a:t>
+              <a:t>开放接口可得，批量许可不一</a:t>
             </a:r>
             <a:endParaRPr sz="1275" b="1">
               <a:solidFill>
@@ -13641,7 +13923,7 @@
           </a:solidFill>
           <a:ln w="9525">
             <a:solidFill>
-              <a:srgbClr val="C9D9E5"/>
+              <a:srgbClr val="BBD1DD"/>
             </a:solidFill>
             <a:prstDash val="solid"/>
           </a:ln>
@@ -13675,7 +13957,7 @@
             <a:defPPr>
               <a:defRPr sz="1275" b="0">
                 <a:solidFill>
-                  <a:srgbClr val="24364B"/>
+                  <a:srgbClr val="1F364D"/>
                 </a:solidFill>
                 <a:latin typeface="Hiragino Sans GB" panose="020B0300000000000000" charset="-122"/>
                 <a:ea typeface="Hiragino Sans GB" panose="020B0300000000000000" charset="-122"/>
@@ -13685,6 +13967,7 @@
           </a:lstStyle>
           <a:p>
             <a:pPr>
+              <a:buNone/>
               <a:defRPr sz="1275" b="0">
                 <a:solidFill>
                   <a:srgbClr val="24364B"/>
@@ -13697,13 +13980,13 @@
             <a:r>
               <a:rPr sz="1275" b="0">
                 <a:solidFill>
-                  <a:srgbClr val="24364B"/>
+                  <a:srgbClr val="1F364D"/>
                 </a:solidFill>
                 <a:latin typeface="Hiragino Sans GB" panose="020B0300000000000000" charset="-122"/>
                 <a:ea typeface="Hiragino Sans GB" panose="020B0300000000000000" charset="-122"/>
                 <a:cs typeface="Hiragino Sans GB" panose="020B0300000000000000" charset="-122"/>
               </a:rPr>
-              <a:t>R06 合法采集、清洗、更新</a:t>
+              <a:t>R06 合法采集、清洗与更新</a:t>
             </a:r>
             <a:endParaRPr sz="1275" b="0">
               <a:solidFill>
@@ -13737,7 +14020,7 @@
           </a:solidFill>
           <a:ln w="9525">
             <a:solidFill>
-              <a:srgbClr val="C9D9E5"/>
+              <a:srgbClr val="BBD1DD"/>
             </a:solidFill>
             <a:prstDash val="solid"/>
           </a:ln>
@@ -13771,7 +14054,7 @@
             <a:defPPr>
               <a:defRPr sz="1275" b="0">
                 <a:solidFill>
-                  <a:srgbClr val="24364B"/>
+                  <a:srgbClr val="1F364D"/>
                 </a:solidFill>
                 <a:latin typeface="Hiragino Sans GB" panose="020B0300000000000000" charset="-122"/>
                 <a:ea typeface="Hiragino Sans GB" panose="020B0300000000000000" charset="-122"/>
@@ -13781,6 +14064,7 @@
           </a:lstStyle>
           <a:p>
             <a:pPr>
+              <a:buNone/>
               <a:defRPr sz="1275" b="0">
                 <a:solidFill>
                   <a:srgbClr val="24364B"/>
@@ -13793,13 +14077,13 @@
             <a:r>
               <a:rPr sz="1275" b="0">
                 <a:solidFill>
-                  <a:srgbClr val="24364B"/>
+                  <a:srgbClr val="1F364D"/>
                 </a:solidFill>
                 <a:latin typeface="Hiragino Sans GB" panose="020B0300000000000000" charset="-122"/>
                 <a:ea typeface="Hiragino Sans GB" panose="020B0300000000000000" charset="-122"/>
                 <a:cs typeface="Hiragino Sans GB" panose="020B0300000000000000" charset="-122"/>
               </a:rPr>
-              <a:t>批量许可逐源确认</a:t>
+              <a:t>逐源确认许可与频率要求</a:t>
             </a:r>
             <a:endParaRPr sz="1275" b="0">
               <a:solidFill>
@@ -13833,7 +14117,7 @@
           </a:solidFill>
           <a:ln w="9525">
             <a:solidFill>
-              <a:srgbClr val="C9D9E5"/>
+              <a:srgbClr val="BBD1DD"/>
             </a:solidFill>
             <a:prstDash val="solid"/>
           </a:ln>
@@ -13867,7 +14151,7 @@
             <a:defPPr>
               <a:defRPr sz="1275" b="1">
                 <a:solidFill>
-                  <a:srgbClr val="24364B"/>
+                  <a:srgbClr val="1F364D"/>
                 </a:solidFill>
                 <a:latin typeface="Hiragino Sans GB" panose="020B0300000000000000" charset="-122"/>
                 <a:ea typeface="Hiragino Sans GB" panose="020B0300000000000000" charset="-122"/>
@@ -13877,6 +14161,7 @@
           </a:lstStyle>
           <a:p>
             <a:pPr>
+              <a:buNone/>
               <a:defRPr sz="1275" b="1">
                 <a:solidFill>
                   <a:srgbClr val="24364B"/>
@@ -13889,13 +14174,13 @@
             <a:r>
               <a:rPr sz="1275" b="1">
                 <a:solidFill>
-                  <a:srgbClr val="24364B"/>
+                  <a:srgbClr val="1F364D"/>
                 </a:solidFill>
                 <a:latin typeface="Hiragino Sans GB" panose="020B0300000000000000" charset="-122"/>
                 <a:ea typeface="Hiragino Sans GB" panose="020B0300000000000000" charset="-122"/>
                 <a:cs typeface="Hiragino Sans GB" panose="020B0300000000000000" charset="-122"/>
               </a:rPr>
-              <a:t>教师／管理员尚无真实访谈</a:t>
+              <a:t>教师和管理员没有真实访谈</a:t>
             </a:r>
             <a:endParaRPr sz="1275" b="1">
               <a:solidFill>
@@ -13929,7 +14214,7 @@
           </a:solidFill>
           <a:ln w="9525">
             <a:solidFill>
-              <a:srgbClr val="C9D9E5"/>
+              <a:srgbClr val="BBD1DD"/>
             </a:solidFill>
             <a:prstDash val="solid"/>
           </a:ln>
@@ -13963,7 +14248,7 @@
             <a:defPPr>
               <a:defRPr sz="1275" b="0">
                 <a:solidFill>
-                  <a:srgbClr val="24364B"/>
+                  <a:srgbClr val="1F364D"/>
                 </a:solidFill>
                 <a:latin typeface="Hiragino Sans GB" panose="020B0300000000000000" charset="-122"/>
                 <a:ea typeface="Hiragino Sans GB" panose="020B0300000000000000" charset="-122"/>
@@ -13973,6 +14258,7 @@
           </a:lstStyle>
           <a:p>
             <a:pPr>
+              <a:buNone/>
               <a:defRPr sz="1275" b="0">
                 <a:solidFill>
                   <a:srgbClr val="24364B"/>
@@ -13985,13 +14271,13 @@
             <a:r>
               <a:rPr sz="1275" b="0">
                 <a:solidFill>
-                  <a:srgbClr val="24364B"/>
+                  <a:srgbClr val="1F364D"/>
                 </a:solidFill>
                 <a:latin typeface="Hiragino Sans GB" panose="020B0300000000000000" charset="-122"/>
                 <a:ea typeface="Hiragino Sans GB" panose="020B0300000000000000" charset="-122"/>
                 <a:cs typeface="Hiragino Sans GB" panose="020B0300000000000000" charset="-122"/>
               </a:rPr>
-              <a:t>R05 审核细则保持待验证</a:t>
+              <a:t>R05 本人认领及审核</a:t>
             </a:r>
             <a:endParaRPr sz="1275" b="0">
               <a:solidFill>
@@ -14025,7 +14311,7 @@
           </a:solidFill>
           <a:ln w="9525">
             <a:solidFill>
-              <a:srgbClr val="C9D9E5"/>
+              <a:srgbClr val="BBD1DD"/>
             </a:solidFill>
             <a:prstDash val="solid"/>
           </a:ln>
@@ -14059,7 +14345,7 @@
             <a:defPPr>
               <a:defRPr sz="1275" b="0">
                 <a:solidFill>
-                  <a:srgbClr val="24364B"/>
+                  <a:srgbClr val="1F364D"/>
                 </a:solidFill>
                 <a:latin typeface="Hiragino Sans GB" panose="020B0300000000000000" charset="-122"/>
                 <a:ea typeface="Hiragino Sans GB" panose="020B0300000000000000" charset="-122"/>
@@ -14069,6 +14355,7 @@
           </a:lstStyle>
           <a:p>
             <a:pPr>
+              <a:buNone/>
               <a:defRPr sz="1275" b="0">
                 <a:solidFill>
                   <a:srgbClr val="24364B"/>
@@ -14081,13 +14368,13 @@
             <a:r>
               <a:rPr sz="1275" b="0">
                 <a:solidFill>
-                  <a:srgbClr val="24364B"/>
+                  <a:srgbClr val="1F364D"/>
                 </a:solidFill>
                 <a:latin typeface="Hiragino Sans GB" panose="020B0300000000000000" charset="-122"/>
                 <a:ea typeface="Hiragino Sans GB" panose="020B0300000000000000" charset="-122"/>
                 <a:cs typeface="Hiragino Sans GB" panose="020B0300000000000000" charset="-122"/>
               </a:rPr>
-              <a:t>推演不作为已确认需求</a:t>
+              <a:t>任务书必做，具体制度待核</a:t>
             </a:r>
             <a:endParaRPr sz="1275" b="0">
               <a:solidFill>
